--- a/Shreyas_Ionic_AMC/09_PRODUCT/reports/NDPMS_Portfolio_Review_ABXY_RM_Lite.pptx
+++ b/Shreyas_Ionic_AMC/09_PRODUCT/reports/NDPMS_Portfolio_Review_ABXY_RM_Lite.pptx
@@ -9638,7 +9638,7 @@
                 </a:solidFill>
                 <a:latin typeface="Georgia"/>
               </a:rPr>
-              <a:t>LIC MF Flexi Cap</a:t>
+              <a:t>HDFC Flexi Cap (Dir)</a:t>
             </a:r>
           </a:p>
         </p:txBody>
@@ -9780,7 +9780,7 @@
         <p:spPr>
           <a:xfrm>
             <a:off x="7259576" y="2660904"/>
-            <a:ext cx="204825" cy="64008"/>
+            <a:ext cx="473659" cy="64008"/>
           </a:xfrm>
           <a:prstGeom prst="rect">
             <a:avLst/>
@@ -9896,7 +9896,7 @@
                 </a:solidFill>
                 <a:latin typeface="Bahnschrift"/>
               </a:rPr>
-              <a:t>32</a:t>
+              <a:t>74</a:t>
             </a:r>
           </a:p>
         </p:txBody>
@@ -9910,6 +9910,440 @@
         <p:spPr>
           <a:xfrm>
             <a:off x="9044157" y="2560320"/>
+            <a:ext cx="1280160" cy="219456"/>
+          </a:xfrm>
+          <a:prstGeom prst="roundRect">
+            <a:avLst>
+              <a:gd name="adj" fmla="val 50000"/>
+            </a:avLst>
+          </a:prstGeom>
+          <a:solidFill>
+            <a:srgbClr val="E0F2EA"/>
+          </a:solidFill>
+          <a:ln w="9525">
+            <a:solidFill>
+              <a:srgbClr val="1E9E6A"/>
+            </a:solidFill>
+          </a:ln>
+          <a:effectLst/>
+        </p:spPr>
+        <p:style>
+          <a:lnRef idx="1">
+            <a:schemeClr val="accent1"/>
+          </a:lnRef>
+          <a:fillRef idx="3">
+            <a:schemeClr val="accent1"/>
+          </a:fillRef>
+          <a:effectRef idx="2">
+            <a:schemeClr val="accent1"/>
+          </a:effectRef>
+          <a:fontRef idx="minor">
+            <a:schemeClr val="lt1"/>
+          </a:fontRef>
+        </p:style>
+        <p:txBody>
+          <a:bodyPr rtlCol="0" anchor="ctr"/>
+          <a:lstStyle/>
+          <a:p>
+            <a:pPr algn="ctr"/>
+          </a:p>
+        </p:txBody>
+      </p:sp>
+      <p:sp>
+        <p:nvSpPr>
+          <p:cNvPr id="41" name="TextBox 40"/>
+          <p:cNvSpPr txBox="1"/>
+          <p:nvPr/>
+        </p:nvSpPr>
+        <p:spPr>
+          <a:xfrm>
+            <a:off x="9044157" y="2554833"/>
+            <a:ext cx="1280160" cy="228600"/>
+          </a:xfrm>
+          <a:prstGeom prst="rect">
+            <a:avLst/>
+          </a:prstGeom>
+          <a:noFill/>
+        </p:spPr>
+        <p:txBody>
+          <a:bodyPr wrap="square" anchor="ctr" lIns="0" rIns="0" tIns="0" bIns="0">
+            <a:spAutoFit/>
+          </a:bodyPr>
+          <a:lstStyle/>
+          <a:p>
+            <a:pPr algn="ctr">
+              <a:spcBef>
+                <a:spcPts val="0"/>
+              </a:spcBef>
+              <a:spcAft>
+                <a:spcPts val="0"/>
+              </a:spcAft>
+            </a:pPr>
+            <a:r>
+              <a:rPr sz="800" b="1" i="0" spc="60">
+                <a:solidFill>
+                  <a:srgbClr val="1E9E6A"/>
+                </a:solidFill>
+                <a:latin typeface="Bahnschrift"/>
+              </a:rPr>
+              <a:t>HOLD</a:t>
+            </a:r>
+          </a:p>
+        </p:txBody>
+      </p:sp>
+      <p:sp>
+        <p:nvSpPr>
+          <p:cNvPr id="42" name="Rectangle 41"/>
+          <p:cNvSpPr/>
+          <p:nvPr/>
+        </p:nvSpPr>
+        <p:spPr>
+          <a:xfrm>
+            <a:off x="841248" y="2843784"/>
+            <a:ext cx="10509199" cy="5486"/>
+          </a:xfrm>
+          <a:prstGeom prst="rect">
+            <a:avLst/>
+          </a:prstGeom>
+          <a:solidFill>
+            <a:srgbClr val="E5E7EB"/>
+          </a:solidFill>
+          <a:ln>
+            <a:noFill/>
+          </a:ln>
+          <a:effectLst/>
+        </p:spPr>
+        <p:style>
+          <a:lnRef idx="1">
+            <a:schemeClr val="accent1"/>
+          </a:lnRef>
+          <a:fillRef idx="3">
+            <a:schemeClr val="accent1"/>
+          </a:fillRef>
+          <a:effectRef idx="2">
+            <a:schemeClr val="accent1"/>
+          </a:effectRef>
+          <a:fontRef idx="minor">
+            <a:schemeClr val="lt1"/>
+          </a:fontRef>
+        </p:style>
+        <p:txBody>
+          <a:bodyPr rtlCol="0" anchor="ctr"/>
+          <a:lstStyle/>
+          <a:p>
+            <a:pPr algn="ctr"/>
+          </a:p>
+        </p:txBody>
+      </p:sp>
+      <p:sp>
+        <p:nvSpPr>
+          <p:cNvPr id="43" name="TextBox 42"/>
+          <p:cNvSpPr txBox="1"/>
+          <p:nvPr/>
+        </p:nvSpPr>
+        <p:spPr>
+          <a:xfrm>
+            <a:off x="914400" y="2862072"/>
+            <a:ext cx="3422857" cy="365760"/>
+          </a:xfrm>
+          <a:prstGeom prst="rect">
+            <a:avLst/>
+          </a:prstGeom>
+          <a:noFill/>
+        </p:spPr>
+        <p:txBody>
+          <a:bodyPr wrap="square" anchor="ctr" lIns="0" rIns="0" tIns="0" bIns="0">
+            <a:spAutoFit/>
+          </a:bodyPr>
+          <a:lstStyle/>
+          <a:p>
+            <a:pPr algn="l">
+              <a:spcBef>
+                <a:spcPts val="0"/>
+              </a:spcBef>
+              <a:spcAft>
+                <a:spcPts val="0"/>
+              </a:spcAft>
+            </a:pPr>
+            <a:r>
+              <a:rPr sz="1100" b="0" i="0">
+                <a:solidFill>
+                  <a:srgbClr val="16233B"/>
+                </a:solidFill>
+                <a:latin typeface="Georgia"/>
+              </a:rPr>
+              <a:t>LIC MF Multi Cap</a:t>
+            </a:r>
+          </a:p>
+        </p:txBody>
+      </p:sp>
+      <p:sp>
+        <p:nvSpPr>
+          <p:cNvPr id="44" name="TextBox 43"/>
+          <p:cNvSpPr txBox="1"/>
+          <p:nvPr/>
+        </p:nvSpPr>
+        <p:spPr>
+          <a:xfrm>
+            <a:off x="4483561" y="2862072"/>
+            <a:ext cx="1439990" cy="365760"/>
+          </a:xfrm>
+          <a:prstGeom prst="rect">
+            <a:avLst/>
+          </a:prstGeom>
+          <a:noFill/>
+        </p:spPr>
+        <p:txBody>
+          <a:bodyPr wrap="square" anchor="ctr" lIns="0" rIns="0" tIns="0" bIns="0">
+            <a:spAutoFit/>
+          </a:bodyPr>
+          <a:lstStyle/>
+          <a:p>
+            <a:pPr algn="l">
+              <a:spcBef>
+                <a:spcPts val="0"/>
+              </a:spcBef>
+              <a:spcAft>
+                <a:spcPts val="0"/>
+              </a:spcAft>
+            </a:pPr>
+            <a:r>
+              <a:rPr sz="1100" b="0" i="0">
+                <a:solidFill>
+                  <a:srgbClr val="16233B"/>
+                </a:solidFill>
+                <a:latin typeface="Georgia"/>
+              </a:rPr>
+              <a:t>Equity</a:t>
+            </a:r>
+          </a:p>
+        </p:txBody>
+      </p:sp>
+      <p:sp>
+        <p:nvSpPr>
+          <p:cNvPr id="45" name="TextBox 44"/>
+          <p:cNvSpPr txBox="1"/>
+          <p:nvPr/>
+        </p:nvSpPr>
+        <p:spPr>
+          <a:xfrm>
+            <a:off x="6069856" y="2862072"/>
+            <a:ext cx="1043416" cy="365760"/>
+          </a:xfrm>
+          <a:prstGeom prst="rect">
+            <a:avLst/>
+          </a:prstGeom>
+          <a:noFill/>
+        </p:spPr>
+        <p:txBody>
+          <a:bodyPr wrap="square" anchor="ctr" lIns="0" rIns="0" tIns="0" bIns="0">
+            <a:spAutoFit/>
+          </a:bodyPr>
+          <a:lstStyle/>
+          <a:p>
+            <a:pPr algn="r">
+              <a:spcBef>
+                <a:spcPts val="0"/>
+              </a:spcBef>
+              <a:spcAft>
+                <a:spcPts val="0"/>
+              </a:spcAft>
+            </a:pPr>
+            <a:r>
+              <a:rPr sz="1100" b="0" i="0">
+                <a:solidFill>
+                  <a:srgbClr val="16233B"/>
+                </a:solidFill>
+                <a:latin typeface="Georgia"/>
+              </a:rPr>
+              <a:t>3.3</a:t>
+            </a:r>
+          </a:p>
+        </p:txBody>
+      </p:sp>
+      <p:sp>
+        <p:nvSpPr>
+          <p:cNvPr id="46" name="Rectangle 45"/>
+          <p:cNvSpPr/>
+          <p:nvPr/>
+        </p:nvSpPr>
+        <p:spPr>
+          <a:xfrm>
+            <a:off x="7259576" y="3026664"/>
+            <a:ext cx="640080" cy="64008"/>
+          </a:xfrm>
+          <a:prstGeom prst="rect">
+            <a:avLst/>
+          </a:prstGeom>
+          <a:solidFill>
+            <a:srgbClr val="EEEFF7"/>
+          </a:solidFill>
+          <a:ln>
+            <a:noFill/>
+          </a:ln>
+          <a:effectLst/>
+        </p:spPr>
+        <p:style>
+          <a:lnRef idx="1">
+            <a:schemeClr val="accent1"/>
+          </a:lnRef>
+          <a:fillRef idx="3">
+            <a:schemeClr val="accent1"/>
+          </a:fillRef>
+          <a:effectRef idx="2">
+            <a:schemeClr val="accent1"/>
+          </a:effectRef>
+          <a:fontRef idx="minor">
+            <a:schemeClr val="lt1"/>
+          </a:fontRef>
+        </p:style>
+        <p:txBody>
+          <a:bodyPr rtlCol="0" anchor="ctr"/>
+          <a:lstStyle/>
+          <a:p>
+            <a:pPr algn="ctr"/>
+          </a:p>
+        </p:txBody>
+      </p:sp>
+      <p:sp>
+        <p:nvSpPr>
+          <p:cNvPr id="47" name="Rectangle 46"/>
+          <p:cNvSpPr/>
+          <p:nvPr/>
+        </p:nvSpPr>
+        <p:spPr>
+          <a:xfrm>
+            <a:off x="7259576" y="3026664"/>
+            <a:ext cx="377647" cy="64008"/>
+          </a:xfrm>
+          <a:prstGeom prst="rect">
+            <a:avLst/>
+          </a:prstGeom>
+          <a:solidFill>
+            <a:srgbClr val="4A57C4"/>
+          </a:solidFill>
+          <a:ln>
+            <a:noFill/>
+          </a:ln>
+          <a:effectLst/>
+        </p:spPr>
+        <p:style>
+          <a:lnRef idx="1">
+            <a:schemeClr val="accent1"/>
+          </a:lnRef>
+          <a:fillRef idx="3">
+            <a:schemeClr val="accent1"/>
+          </a:fillRef>
+          <a:effectRef idx="2">
+            <a:schemeClr val="accent1"/>
+          </a:effectRef>
+          <a:fontRef idx="minor">
+            <a:schemeClr val="lt1"/>
+          </a:fontRef>
+        </p:style>
+        <p:txBody>
+          <a:bodyPr rtlCol="0" anchor="ctr"/>
+          <a:lstStyle/>
+          <a:p>
+            <a:pPr algn="ctr"/>
+          </a:p>
+        </p:txBody>
+      </p:sp>
+      <p:sp>
+        <p:nvSpPr>
+          <p:cNvPr id="48" name="Rectangle 47"/>
+          <p:cNvSpPr/>
+          <p:nvPr/>
+        </p:nvSpPr>
+        <p:spPr>
+          <a:xfrm>
+            <a:off x="7515608" y="2999232"/>
+            <a:ext cx="10972" cy="118872"/>
+          </a:xfrm>
+          <a:prstGeom prst="rect">
+            <a:avLst/>
+          </a:prstGeom>
+          <a:solidFill>
+            <a:srgbClr val="16233B"/>
+          </a:solidFill>
+          <a:ln>
+            <a:noFill/>
+          </a:ln>
+          <a:effectLst/>
+        </p:spPr>
+        <p:style>
+          <a:lnRef idx="1">
+            <a:schemeClr val="accent1"/>
+          </a:lnRef>
+          <a:fillRef idx="3">
+            <a:schemeClr val="accent1"/>
+          </a:fillRef>
+          <a:effectRef idx="2">
+            <a:schemeClr val="accent1"/>
+          </a:effectRef>
+          <a:fontRef idx="minor">
+            <a:schemeClr val="lt1"/>
+          </a:fontRef>
+        </p:style>
+        <p:txBody>
+          <a:bodyPr rtlCol="0" anchor="ctr"/>
+          <a:lstStyle/>
+          <a:p>
+            <a:pPr algn="ctr"/>
+          </a:p>
+        </p:txBody>
+      </p:sp>
+      <p:sp>
+        <p:nvSpPr>
+          <p:cNvPr id="49" name="TextBox 48"/>
+          <p:cNvSpPr txBox="1"/>
+          <p:nvPr/>
+        </p:nvSpPr>
+        <p:spPr>
+          <a:xfrm>
+            <a:off x="7963664" y="2948940"/>
+            <a:ext cx="411480" cy="219456"/>
+          </a:xfrm>
+          <a:prstGeom prst="rect">
+            <a:avLst/>
+          </a:prstGeom>
+          <a:noFill/>
+        </p:spPr>
+        <p:txBody>
+          <a:bodyPr wrap="square" anchor="ctr" lIns="0" rIns="0" tIns="0" bIns="0">
+            <a:spAutoFit/>
+          </a:bodyPr>
+          <a:lstStyle/>
+          <a:p>
+            <a:pPr algn="l">
+              <a:spcBef>
+                <a:spcPts val="0"/>
+              </a:spcBef>
+              <a:spcAft>
+                <a:spcPts val="0"/>
+              </a:spcAft>
+            </a:pPr>
+            <a:r>
+              <a:rPr sz="900" b="0" i="0">
+                <a:solidFill>
+                  <a:srgbClr val="16233B"/>
+                </a:solidFill>
+                <a:latin typeface="Bahnschrift"/>
+              </a:rPr>
+              <a:t>59</a:t>
+            </a:r>
+          </a:p>
+        </p:txBody>
+      </p:sp>
+      <p:sp>
+        <p:nvSpPr>
+          <p:cNvPr id="50" name="Rounded Rectangle 49"/>
+          <p:cNvSpPr/>
+          <p:nvPr/>
+        </p:nvSpPr>
+        <p:spPr>
+          <a:xfrm>
+            <a:off x="9044157" y="2926080"/>
             <a:ext cx="1280160" cy="219456"/>
           </a:xfrm>
           <a:prstGeom prst="roundRect">
@@ -9951,13 +10385,13 @@
       </p:sp>
       <p:sp>
         <p:nvSpPr>
-          <p:cNvPr id="41" name="TextBox 40"/>
-          <p:cNvSpPr txBox="1"/>
-          <p:nvPr/>
-        </p:nvSpPr>
-        <p:spPr>
-          <a:xfrm>
-            <a:off x="9044157" y="2554833"/>
+          <p:cNvPr id="51" name="TextBox 50"/>
+          <p:cNvSpPr txBox="1"/>
+          <p:nvPr/>
+        </p:nvSpPr>
+        <p:spPr>
+          <a:xfrm>
+            <a:off x="9044157" y="2920593"/>
             <a:ext cx="1280160" cy="228600"/>
           </a:xfrm>
           <a:prstGeom prst="rect">
@@ -9993,13 +10427,13 @@
       </p:sp>
       <p:sp>
         <p:nvSpPr>
-          <p:cNvPr id="42" name="Rectangle 41"/>
+          <p:cNvPr id="52" name="Rectangle 51"/>
           <p:cNvSpPr/>
           <p:nvPr/>
         </p:nvSpPr>
         <p:spPr>
           <a:xfrm>
-            <a:off x="841248" y="2843784"/>
+            <a:off x="841248" y="3209544"/>
             <a:ext cx="10509199" cy="5486"/>
           </a:xfrm>
           <a:prstGeom prst="rect">
@@ -10037,13 +10471,13 @@
       </p:sp>
       <p:sp>
         <p:nvSpPr>
-          <p:cNvPr id="43" name="TextBox 42"/>
-          <p:cNvSpPr txBox="1"/>
-          <p:nvPr/>
-        </p:nvSpPr>
-        <p:spPr>
-          <a:xfrm>
-            <a:off x="914400" y="2862072"/>
+          <p:cNvPr id="53" name="TextBox 52"/>
+          <p:cNvSpPr txBox="1"/>
+          <p:nvPr/>
+        </p:nvSpPr>
+        <p:spPr>
+          <a:xfrm>
+            <a:off x="914400" y="3227832"/>
             <a:ext cx="3422857" cy="365760"/>
           </a:xfrm>
           <a:prstGeom prst="rect">
@@ -10072,20 +10506,20 @@
                 </a:solidFill>
                 <a:latin typeface="Georgia"/>
               </a:rPr>
-              <a:t>LIC MF Multi Cap</a:t>
-            </a:r>
-          </a:p>
-        </p:txBody>
-      </p:sp>
-      <p:sp>
-        <p:nvSpPr>
-          <p:cNvPr id="44" name="TextBox 43"/>
-          <p:cNvSpPr txBox="1"/>
-          <p:nvPr/>
-        </p:nvSpPr>
-        <p:spPr>
-          <a:xfrm>
-            <a:off x="4483561" y="2862072"/>
+              <a:t>ICICI Pru Multi-Asset (Dir)</a:t>
+            </a:r>
+          </a:p>
+        </p:txBody>
+      </p:sp>
+      <p:sp>
+        <p:nvSpPr>
+          <p:cNvPr id="54" name="TextBox 53"/>
+          <p:cNvSpPr txBox="1"/>
+          <p:nvPr/>
+        </p:nvSpPr>
+        <p:spPr>
+          <a:xfrm>
+            <a:off x="4483561" y="3227832"/>
             <a:ext cx="1439990" cy="365760"/>
           </a:xfrm>
           <a:prstGeom prst="rect">
@@ -10114,20 +10548,20 @@
                 </a:solidFill>
                 <a:latin typeface="Georgia"/>
               </a:rPr>
-              <a:t>Equity</a:t>
-            </a:r>
-          </a:p>
-        </p:txBody>
-      </p:sp>
-      <p:sp>
-        <p:nvSpPr>
-          <p:cNvPr id="45" name="TextBox 44"/>
-          <p:cNvSpPr txBox="1"/>
-          <p:nvPr/>
-        </p:nvSpPr>
-        <p:spPr>
-          <a:xfrm>
-            <a:off x="6069856" y="2862072"/>
+              <a:t>Hybrid</a:t>
+            </a:r>
+          </a:p>
+        </p:txBody>
+      </p:sp>
+      <p:sp>
+        <p:nvSpPr>
+          <p:cNvPr id="55" name="TextBox 54"/>
+          <p:cNvSpPr txBox="1"/>
+          <p:nvPr/>
+        </p:nvSpPr>
+        <p:spPr>
+          <a:xfrm>
+            <a:off x="6069856" y="3227832"/>
             <a:ext cx="1043416" cy="365760"/>
           </a:xfrm>
           <a:prstGeom prst="rect">
@@ -10156,20 +10590,20 @@
                 </a:solidFill>
                 <a:latin typeface="Georgia"/>
               </a:rPr>
-              <a:t>3.3</a:t>
-            </a:r>
-          </a:p>
-        </p:txBody>
-      </p:sp>
-      <p:sp>
-        <p:nvSpPr>
-          <p:cNvPr id="46" name="Rectangle 45"/>
+              <a:t>3.7</a:t>
+            </a:r>
+          </a:p>
+        </p:txBody>
+      </p:sp>
+      <p:sp>
+        <p:nvSpPr>
+          <p:cNvPr id="56" name="Rectangle 55"/>
           <p:cNvSpPr/>
           <p:nvPr/>
         </p:nvSpPr>
         <p:spPr>
           <a:xfrm>
-            <a:off x="7259576" y="3026664"/>
+            <a:off x="7259576" y="3392424"/>
             <a:ext cx="640080" cy="64008"/>
           </a:xfrm>
           <a:prstGeom prst="rect">
@@ -10207,14 +10641,14 @@
       </p:sp>
       <p:sp>
         <p:nvSpPr>
-          <p:cNvPr id="47" name="Rectangle 46"/>
+          <p:cNvPr id="57" name="Rectangle 56"/>
           <p:cNvSpPr/>
           <p:nvPr/>
         </p:nvSpPr>
         <p:spPr>
           <a:xfrm>
-            <a:off x="7259576" y="3026664"/>
-            <a:ext cx="377647" cy="64008"/>
+            <a:off x="7259576" y="3392424"/>
+            <a:ext cx="480060" cy="64008"/>
           </a:xfrm>
           <a:prstGeom prst="rect">
             <a:avLst/>
@@ -10251,13 +10685,13 @@
       </p:sp>
       <p:sp>
         <p:nvSpPr>
-          <p:cNvPr id="48" name="Rectangle 47"/>
+          <p:cNvPr id="58" name="Rectangle 57"/>
           <p:cNvSpPr/>
           <p:nvPr/>
         </p:nvSpPr>
         <p:spPr>
           <a:xfrm>
-            <a:off x="7515608" y="2999232"/>
+            <a:off x="7515608" y="3364992"/>
             <a:ext cx="10972" cy="118872"/>
           </a:xfrm>
           <a:prstGeom prst="rect">
@@ -10295,13 +10729,13 @@
       </p:sp>
       <p:sp>
         <p:nvSpPr>
-          <p:cNvPr id="49" name="TextBox 48"/>
-          <p:cNvSpPr txBox="1"/>
-          <p:nvPr/>
-        </p:nvSpPr>
-        <p:spPr>
-          <a:xfrm>
-            <a:off x="7963664" y="2948940"/>
+          <p:cNvPr id="59" name="TextBox 58"/>
+          <p:cNvSpPr txBox="1"/>
+          <p:nvPr/>
+        </p:nvSpPr>
+        <p:spPr>
+          <a:xfrm>
+            <a:off x="7963664" y="3314700"/>
             <a:ext cx="411480" cy="219456"/>
           </a:xfrm>
           <a:prstGeom prst="rect">
@@ -10330,20 +10764,888 @@
                 </a:solidFill>
                 <a:latin typeface="Bahnschrift"/>
               </a:rPr>
-              <a:t>59</a:t>
-            </a:r>
-          </a:p>
-        </p:txBody>
-      </p:sp>
-      <p:sp>
-        <p:nvSpPr>
-          <p:cNvPr id="50" name="Rounded Rectangle 49"/>
+              <a:t>75</a:t>
+            </a:r>
+          </a:p>
+        </p:txBody>
+      </p:sp>
+      <p:sp>
+        <p:nvSpPr>
+          <p:cNvPr id="60" name="Rounded Rectangle 59"/>
           <p:cNvSpPr/>
           <p:nvPr/>
         </p:nvSpPr>
         <p:spPr>
           <a:xfrm>
-            <a:off x="9044157" y="2926080"/>
+            <a:off x="9044157" y="3291840"/>
+            <a:ext cx="1280160" cy="219456"/>
+          </a:xfrm>
+          <a:prstGeom prst="roundRect">
+            <a:avLst>
+              <a:gd name="adj" fmla="val 50000"/>
+            </a:avLst>
+          </a:prstGeom>
+          <a:solidFill>
+            <a:srgbClr val="E0F2EA"/>
+          </a:solidFill>
+          <a:ln w="9525">
+            <a:solidFill>
+              <a:srgbClr val="1E9E6A"/>
+            </a:solidFill>
+          </a:ln>
+          <a:effectLst/>
+        </p:spPr>
+        <p:style>
+          <a:lnRef idx="1">
+            <a:schemeClr val="accent1"/>
+          </a:lnRef>
+          <a:fillRef idx="3">
+            <a:schemeClr val="accent1"/>
+          </a:fillRef>
+          <a:effectRef idx="2">
+            <a:schemeClr val="accent1"/>
+          </a:effectRef>
+          <a:fontRef idx="minor">
+            <a:schemeClr val="lt1"/>
+          </a:fontRef>
+        </p:style>
+        <p:txBody>
+          <a:bodyPr rtlCol="0" anchor="ctr"/>
+          <a:lstStyle/>
+          <a:p>
+            <a:pPr algn="ctr"/>
+          </a:p>
+        </p:txBody>
+      </p:sp>
+      <p:sp>
+        <p:nvSpPr>
+          <p:cNvPr id="61" name="TextBox 60"/>
+          <p:cNvSpPr txBox="1"/>
+          <p:nvPr/>
+        </p:nvSpPr>
+        <p:spPr>
+          <a:xfrm>
+            <a:off x="9044157" y="3286353"/>
+            <a:ext cx="1280160" cy="228600"/>
+          </a:xfrm>
+          <a:prstGeom prst="rect">
+            <a:avLst/>
+          </a:prstGeom>
+          <a:noFill/>
+        </p:spPr>
+        <p:txBody>
+          <a:bodyPr wrap="square" anchor="ctr" lIns="0" rIns="0" tIns="0" bIns="0">
+            <a:spAutoFit/>
+          </a:bodyPr>
+          <a:lstStyle/>
+          <a:p>
+            <a:pPr algn="ctr">
+              <a:spcBef>
+                <a:spcPts val="0"/>
+              </a:spcBef>
+              <a:spcAft>
+                <a:spcPts val="0"/>
+              </a:spcAft>
+            </a:pPr>
+            <a:r>
+              <a:rPr sz="800" b="1" i="0" spc="60">
+                <a:solidFill>
+                  <a:srgbClr val="1E9E6A"/>
+                </a:solidFill>
+                <a:latin typeface="Bahnschrift"/>
+              </a:rPr>
+              <a:t>HOLD</a:t>
+            </a:r>
+          </a:p>
+        </p:txBody>
+      </p:sp>
+      <p:sp>
+        <p:nvSpPr>
+          <p:cNvPr id="62" name="Rectangle 61"/>
+          <p:cNvSpPr/>
+          <p:nvPr/>
+        </p:nvSpPr>
+        <p:spPr>
+          <a:xfrm>
+            <a:off x="841248" y="3575303"/>
+            <a:ext cx="10509199" cy="5486"/>
+          </a:xfrm>
+          <a:prstGeom prst="rect">
+            <a:avLst/>
+          </a:prstGeom>
+          <a:solidFill>
+            <a:srgbClr val="E5E7EB"/>
+          </a:solidFill>
+          <a:ln>
+            <a:noFill/>
+          </a:ln>
+          <a:effectLst/>
+        </p:spPr>
+        <p:style>
+          <a:lnRef idx="1">
+            <a:schemeClr val="accent1"/>
+          </a:lnRef>
+          <a:fillRef idx="3">
+            <a:schemeClr val="accent1"/>
+          </a:fillRef>
+          <a:effectRef idx="2">
+            <a:schemeClr val="accent1"/>
+          </a:effectRef>
+          <a:fontRef idx="minor">
+            <a:schemeClr val="lt1"/>
+          </a:fontRef>
+        </p:style>
+        <p:txBody>
+          <a:bodyPr rtlCol="0" anchor="ctr"/>
+          <a:lstStyle/>
+          <a:p>
+            <a:pPr algn="ctr"/>
+          </a:p>
+        </p:txBody>
+      </p:sp>
+      <p:sp>
+        <p:nvSpPr>
+          <p:cNvPr id="63" name="TextBox 62"/>
+          <p:cNvSpPr txBox="1"/>
+          <p:nvPr/>
+        </p:nvSpPr>
+        <p:spPr>
+          <a:xfrm>
+            <a:off x="914400" y="3593591"/>
+            <a:ext cx="3422857" cy="365760"/>
+          </a:xfrm>
+          <a:prstGeom prst="rect">
+            <a:avLst/>
+          </a:prstGeom>
+          <a:noFill/>
+        </p:spPr>
+        <p:txBody>
+          <a:bodyPr wrap="square" anchor="ctr" lIns="0" rIns="0" tIns="0" bIns="0">
+            <a:spAutoFit/>
+          </a:bodyPr>
+          <a:lstStyle/>
+          <a:p>
+            <a:pPr algn="l">
+              <a:spcBef>
+                <a:spcPts val="0"/>
+              </a:spcBef>
+              <a:spcAft>
+                <a:spcPts val="0"/>
+              </a:spcAft>
+            </a:pPr>
+            <a:r>
+              <a:rPr sz="1100" b="0" i="0">
+                <a:solidFill>
+                  <a:srgbClr val="16233B"/>
+                </a:solidFill>
+                <a:latin typeface="Georgia"/>
+              </a:rPr>
+              <a:t>PGIM India Small Cap</a:t>
+            </a:r>
+          </a:p>
+        </p:txBody>
+      </p:sp>
+      <p:sp>
+        <p:nvSpPr>
+          <p:cNvPr id="64" name="TextBox 63"/>
+          <p:cNvSpPr txBox="1"/>
+          <p:nvPr/>
+        </p:nvSpPr>
+        <p:spPr>
+          <a:xfrm>
+            <a:off x="4483561" y="3593591"/>
+            <a:ext cx="1439990" cy="365760"/>
+          </a:xfrm>
+          <a:prstGeom prst="rect">
+            <a:avLst/>
+          </a:prstGeom>
+          <a:noFill/>
+        </p:spPr>
+        <p:txBody>
+          <a:bodyPr wrap="square" anchor="ctr" lIns="0" rIns="0" tIns="0" bIns="0">
+            <a:spAutoFit/>
+          </a:bodyPr>
+          <a:lstStyle/>
+          <a:p>
+            <a:pPr algn="l">
+              <a:spcBef>
+                <a:spcPts val="0"/>
+              </a:spcBef>
+              <a:spcAft>
+                <a:spcPts val="0"/>
+              </a:spcAft>
+            </a:pPr>
+            <a:r>
+              <a:rPr sz="1100" b="0" i="0">
+                <a:solidFill>
+                  <a:srgbClr val="16233B"/>
+                </a:solidFill>
+                <a:latin typeface="Georgia"/>
+              </a:rPr>
+              <a:t>Equity</a:t>
+            </a:r>
+          </a:p>
+        </p:txBody>
+      </p:sp>
+      <p:sp>
+        <p:nvSpPr>
+          <p:cNvPr id="65" name="TextBox 64"/>
+          <p:cNvSpPr txBox="1"/>
+          <p:nvPr/>
+        </p:nvSpPr>
+        <p:spPr>
+          <a:xfrm>
+            <a:off x="6069856" y="3593591"/>
+            <a:ext cx="1043416" cy="365760"/>
+          </a:xfrm>
+          <a:prstGeom prst="rect">
+            <a:avLst/>
+          </a:prstGeom>
+          <a:noFill/>
+        </p:spPr>
+        <p:txBody>
+          <a:bodyPr wrap="square" anchor="ctr" lIns="0" rIns="0" tIns="0" bIns="0">
+            <a:spAutoFit/>
+          </a:bodyPr>
+          <a:lstStyle/>
+          <a:p>
+            <a:pPr algn="r">
+              <a:spcBef>
+                <a:spcPts val="0"/>
+              </a:spcBef>
+              <a:spcAft>
+                <a:spcPts val="0"/>
+              </a:spcAft>
+            </a:pPr>
+            <a:r>
+              <a:rPr sz="1100" b="0" i="0">
+                <a:solidFill>
+                  <a:srgbClr val="16233B"/>
+                </a:solidFill>
+                <a:latin typeface="Georgia"/>
+              </a:rPr>
+              <a:t>0.4</a:t>
+            </a:r>
+          </a:p>
+        </p:txBody>
+      </p:sp>
+      <p:sp>
+        <p:nvSpPr>
+          <p:cNvPr id="66" name="Rectangle 65"/>
+          <p:cNvSpPr/>
+          <p:nvPr/>
+        </p:nvSpPr>
+        <p:spPr>
+          <a:xfrm>
+            <a:off x="7259576" y="3758184"/>
+            <a:ext cx="640080" cy="64008"/>
+          </a:xfrm>
+          <a:prstGeom prst="rect">
+            <a:avLst/>
+          </a:prstGeom>
+          <a:solidFill>
+            <a:srgbClr val="EEEFF7"/>
+          </a:solidFill>
+          <a:ln>
+            <a:noFill/>
+          </a:ln>
+          <a:effectLst/>
+        </p:spPr>
+        <p:style>
+          <a:lnRef idx="1">
+            <a:schemeClr val="accent1"/>
+          </a:lnRef>
+          <a:fillRef idx="3">
+            <a:schemeClr val="accent1"/>
+          </a:fillRef>
+          <a:effectRef idx="2">
+            <a:schemeClr val="accent1"/>
+          </a:effectRef>
+          <a:fontRef idx="minor">
+            <a:schemeClr val="lt1"/>
+          </a:fontRef>
+        </p:style>
+        <p:txBody>
+          <a:bodyPr rtlCol="0" anchor="ctr"/>
+          <a:lstStyle/>
+          <a:p>
+            <a:pPr algn="ctr"/>
+          </a:p>
+        </p:txBody>
+      </p:sp>
+      <p:sp>
+        <p:nvSpPr>
+          <p:cNvPr id="67" name="Rectangle 66"/>
+          <p:cNvSpPr/>
+          <p:nvPr/>
+        </p:nvSpPr>
+        <p:spPr>
+          <a:xfrm>
+            <a:off x="7259576" y="3758184"/>
+            <a:ext cx="51206" cy="64008"/>
+          </a:xfrm>
+          <a:prstGeom prst="rect">
+            <a:avLst/>
+          </a:prstGeom>
+          <a:solidFill>
+            <a:srgbClr val="4A57C4"/>
+          </a:solidFill>
+          <a:ln>
+            <a:noFill/>
+          </a:ln>
+          <a:effectLst/>
+        </p:spPr>
+        <p:style>
+          <a:lnRef idx="1">
+            <a:schemeClr val="accent1"/>
+          </a:lnRef>
+          <a:fillRef idx="3">
+            <a:schemeClr val="accent1"/>
+          </a:fillRef>
+          <a:effectRef idx="2">
+            <a:schemeClr val="accent1"/>
+          </a:effectRef>
+          <a:fontRef idx="minor">
+            <a:schemeClr val="lt1"/>
+          </a:fontRef>
+        </p:style>
+        <p:txBody>
+          <a:bodyPr rtlCol="0" anchor="ctr"/>
+          <a:lstStyle/>
+          <a:p>
+            <a:pPr algn="ctr"/>
+          </a:p>
+        </p:txBody>
+      </p:sp>
+      <p:sp>
+        <p:nvSpPr>
+          <p:cNvPr id="68" name="Rectangle 67"/>
+          <p:cNvSpPr/>
+          <p:nvPr/>
+        </p:nvSpPr>
+        <p:spPr>
+          <a:xfrm>
+            <a:off x="7515608" y="3730752"/>
+            <a:ext cx="10972" cy="118872"/>
+          </a:xfrm>
+          <a:prstGeom prst="rect">
+            <a:avLst/>
+          </a:prstGeom>
+          <a:solidFill>
+            <a:srgbClr val="16233B"/>
+          </a:solidFill>
+          <a:ln>
+            <a:noFill/>
+          </a:ln>
+          <a:effectLst/>
+        </p:spPr>
+        <p:style>
+          <a:lnRef idx="1">
+            <a:schemeClr val="accent1"/>
+          </a:lnRef>
+          <a:fillRef idx="3">
+            <a:schemeClr val="accent1"/>
+          </a:fillRef>
+          <a:effectRef idx="2">
+            <a:schemeClr val="accent1"/>
+          </a:effectRef>
+          <a:fontRef idx="minor">
+            <a:schemeClr val="lt1"/>
+          </a:fontRef>
+        </p:style>
+        <p:txBody>
+          <a:bodyPr rtlCol="0" anchor="ctr"/>
+          <a:lstStyle/>
+          <a:p>
+            <a:pPr algn="ctr"/>
+          </a:p>
+        </p:txBody>
+      </p:sp>
+      <p:sp>
+        <p:nvSpPr>
+          <p:cNvPr id="69" name="TextBox 68"/>
+          <p:cNvSpPr txBox="1"/>
+          <p:nvPr/>
+        </p:nvSpPr>
+        <p:spPr>
+          <a:xfrm>
+            <a:off x="7963664" y="3680460"/>
+            <a:ext cx="411480" cy="219456"/>
+          </a:xfrm>
+          <a:prstGeom prst="rect">
+            <a:avLst/>
+          </a:prstGeom>
+          <a:noFill/>
+        </p:spPr>
+        <p:txBody>
+          <a:bodyPr wrap="square" anchor="ctr" lIns="0" rIns="0" tIns="0" bIns="0">
+            <a:spAutoFit/>
+          </a:bodyPr>
+          <a:lstStyle/>
+          <a:p>
+            <a:pPr algn="l">
+              <a:spcBef>
+                <a:spcPts val="0"/>
+              </a:spcBef>
+              <a:spcAft>
+                <a:spcPts val="0"/>
+              </a:spcAft>
+            </a:pPr>
+            <a:r>
+              <a:rPr sz="900" b="0" i="0">
+                <a:solidFill>
+                  <a:srgbClr val="16233B"/>
+                </a:solidFill>
+                <a:latin typeface="Bahnschrift"/>
+              </a:rPr>
+              <a:t>8</a:t>
+            </a:r>
+          </a:p>
+        </p:txBody>
+      </p:sp>
+      <p:sp>
+        <p:nvSpPr>
+          <p:cNvPr id="70" name="Rounded Rectangle 69"/>
+          <p:cNvSpPr/>
+          <p:nvPr/>
+        </p:nvSpPr>
+        <p:spPr>
+          <a:xfrm>
+            <a:off x="9044157" y="3657600"/>
+            <a:ext cx="1280160" cy="219456"/>
+          </a:xfrm>
+          <a:prstGeom prst="roundRect">
+            <a:avLst>
+              <a:gd name="adj" fmla="val 50000"/>
+            </a:avLst>
+          </a:prstGeom>
+          <a:solidFill>
+            <a:srgbClr val="FBE3E0"/>
+          </a:solidFill>
+          <a:ln w="9525">
+            <a:solidFill>
+              <a:srgbClr val="E0402F"/>
+            </a:solidFill>
+          </a:ln>
+          <a:effectLst/>
+        </p:spPr>
+        <p:style>
+          <a:lnRef idx="1">
+            <a:schemeClr val="accent1"/>
+          </a:lnRef>
+          <a:fillRef idx="3">
+            <a:schemeClr val="accent1"/>
+          </a:fillRef>
+          <a:effectRef idx="2">
+            <a:schemeClr val="accent1"/>
+          </a:effectRef>
+          <a:fontRef idx="minor">
+            <a:schemeClr val="lt1"/>
+          </a:fontRef>
+        </p:style>
+        <p:txBody>
+          <a:bodyPr rtlCol="0" anchor="ctr"/>
+          <a:lstStyle/>
+          <a:p>
+            <a:pPr algn="ctr"/>
+          </a:p>
+        </p:txBody>
+      </p:sp>
+      <p:sp>
+        <p:nvSpPr>
+          <p:cNvPr id="71" name="TextBox 70"/>
+          <p:cNvSpPr txBox="1"/>
+          <p:nvPr/>
+        </p:nvSpPr>
+        <p:spPr>
+          <a:xfrm>
+            <a:off x="9044157" y="3652113"/>
+            <a:ext cx="1280160" cy="228600"/>
+          </a:xfrm>
+          <a:prstGeom prst="rect">
+            <a:avLst/>
+          </a:prstGeom>
+          <a:noFill/>
+        </p:spPr>
+        <p:txBody>
+          <a:bodyPr wrap="square" anchor="ctr" lIns="0" rIns="0" tIns="0" bIns="0">
+            <a:spAutoFit/>
+          </a:bodyPr>
+          <a:lstStyle/>
+          <a:p>
+            <a:pPr algn="ctr">
+              <a:spcBef>
+                <a:spcPts val="0"/>
+              </a:spcBef>
+              <a:spcAft>
+                <a:spcPts val="0"/>
+              </a:spcAft>
+            </a:pPr>
+            <a:r>
+              <a:rPr sz="800" b="1" i="0" spc="60">
+                <a:solidFill>
+                  <a:srgbClr val="E0402F"/>
+                </a:solidFill>
+                <a:latin typeface="Bahnschrift"/>
+              </a:rPr>
+              <a:t>EXIT</a:t>
+            </a:r>
+          </a:p>
+        </p:txBody>
+      </p:sp>
+      <p:sp>
+        <p:nvSpPr>
+          <p:cNvPr id="72" name="Rectangle 71"/>
+          <p:cNvSpPr/>
+          <p:nvPr/>
+        </p:nvSpPr>
+        <p:spPr>
+          <a:xfrm>
+            <a:off x="841248" y="3941064"/>
+            <a:ext cx="10509199" cy="5486"/>
+          </a:xfrm>
+          <a:prstGeom prst="rect">
+            <a:avLst/>
+          </a:prstGeom>
+          <a:solidFill>
+            <a:srgbClr val="E5E7EB"/>
+          </a:solidFill>
+          <a:ln>
+            <a:noFill/>
+          </a:ln>
+          <a:effectLst/>
+        </p:spPr>
+        <p:style>
+          <a:lnRef idx="1">
+            <a:schemeClr val="accent1"/>
+          </a:lnRef>
+          <a:fillRef idx="3">
+            <a:schemeClr val="accent1"/>
+          </a:fillRef>
+          <a:effectRef idx="2">
+            <a:schemeClr val="accent1"/>
+          </a:effectRef>
+          <a:fontRef idx="minor">
+            <a:schemeClr val="lt1"/>
+          </a:fontRef>
+        </p:style>
+        <p:txBody>
+          <a:bodyPr rtlCol="0" anchor="ctr"/>
+          <a:lstStyle/>
+          <a:p>
+            <a:pPr algn="ctr"/>
+          </a:p>
+        </p:txBody>
+      </p:sp>
+      <p:sp>
+        <p:nvSpPr>
+          <p:cNvPr id="73" name="TextBox 72"/>
+          <p:cNvSpPr txBox="1"/>
+          <p:nvPr/>
+        </p:nvSpPr>
+        <p:spPr>
+          <a:xfrm>
+            <a:off x="914400" y="3959352"/>
+            <a:ext cx="3422857" cy="365760"/>
+          </a:xfrm>
+          <a:prstGeom prst="rect">
+            <a:avLst/>
+          </a:prstGeom>
+          <a:noFill/>
+        </p:spPr>
+        <p:txBody>
+          <a:bodyPr wrap="square" anchor="ctr" lIns="0" rIns="0" tIns="0" bIns="0">
+            <a:spAutoFit/>
+          </a:bodyPr>
+          <a:lstStyle/>
+          <a:p>
+            <a:pPr algn="l">
+              <a:spcBef>
+                <a:spcPts val="0"/>
+              </a:spcBef>
+              <a:spcAft>
+                <a:spcPts val="0"/>
+              </a:spcAft>
+            </a:pPr>
+            <a:r>
+              <a:rPr sz="1100" b="0" i="0">
+                <a:solidFill>
+                  <a:srgbClr val="16233B"/>
+                </a:solidFill>
+                <a:latin typeface="Georgia"/>
+              </a:rPr>
+              <a:t>LIC MF Balanced Advantage</a:t>
+            </a:r>
+          </a:p>
+        </p:txBody>
+      </p:sp>
+      <p:sp>
+        <p:nvSpPr>
+          <p:cNvPr id="74" name="TextBox 73"/>
+          <p:cNvSpPr txBox="1"/>
+          <p:nvPr/>
+        </p:nvSpPr>
+        <p:spPr>
+          <a:xfrm>
+            <a:off x="4483561" y="3959352"/>
+            <a:ext cx="1439990" cy="365760"/>
+          </a:xfrm>
+          <a:prstGeom prst="rect">
+            <a:avLst/>
+          </a:prstGeom>
+          <a:noFill/>
+        </p:spPr>
+        <p:txBody>
+          <a:bodyPr wrap="square" anchor="ctr" lIns="0" rIns="0" tIns="0" bIns="0">
+            <a:spAutoFit/>
+          </a:bodyPr>
+          <a:lstStyle/>
+          <a:p>
+            <a:pPr algn="l">
+              <a:spcBef>
+                <a:spcPts val="0"/>
+              </a:spcBef>
+              <a:spcAft>
+                <a:spcPts val="0"/>
+              </a:spcAft>
+            </a:pPr>
+            <a:r>
+              <a:rPr sz="1100" b="0" i="0">
+                <a:solidFill>
+                  <a:srgbClr val="16233B"/>
+                </a:solidFill>
+                <a:latin typeface="Georgia"/>
+              </a:rPr>
+              <a:t>Hybrid</a:t>
+            </a:r>
+          </a:p>
+        </p:txBody>
+      </p:sp>
+      <p:sp>
+        <p:nvSpPr>
+          <p:cNvPr id="75" name="TextBox 74"/>
+          <p:cNvSpPr txBox="1"/>
+          <p:nvPr/>
+        </p:nvSpPr>
+        <p:spPr>
+          <a:xfrm>
+            <a:off x="6069856" y="3959352"/>
+            <a:ext cx="1043416" cy="365760"/>
+          </a:xfrm>
+          <a:prstGeom prst="rect">
+            <a:avLst/>
+          </a:prstGeom>
+          <a:noFill/>
+        </p:spPr>
+        <p:txBody>
+          <a:bodyPr wrap="square" anchor="ctr" lIns="0" rIns="0" tIns="0" bIns="0">
+            <a:spAutoFit/>
+          </a:bodyPr>
+          <a:lstStyle/>
+          <a:p>
+            <a:pPr algn="r">
+              <a:spcBef>
+                <a:spcPts val="0"/>
+              </a:spcBef>
+              <a:spcAft>
+                <a:spcPts val="0"/>
+              </a:spcAft>
+            </a:pPr>
+            <a:r>
+              <a:rPr sz="1100" b="0" i="0">
+                <a:solidFill>
+                  <a:srgbClr val="16233B"/>
+                </a:solidFill>
+                <a:latin typeface="Georgia"/>
+              </a:rPr>
+              <a:t>2.8</a:t>
+            </a:r>
+          </a:p>
+        </p:txBody>
+      </p:sp>
+      <p:sp>
+        <p:nvSpPr>
+          <p:cNvPr id="76" name="Rectangle 75"/>
+          <p:cNvSpPr/>
+          <p:nvPr/>
+        </p:nvSpPr>
+        <p:spPr>
+          <a:xfrm>
+            <a:off x="7259576" y="4123944"/>
+            <a:ext cx="640080" cy="64008"/>
+          </a:xfrm>
+          <a:prstGeom prst="rect">
+            <a:avLst/>
+          </a:prstGeom>
+          <a:solidFill>
+            <a:srgbClr val="EEEFF7"/>
+          </a:solidFill>
+          <a:ln>
+            <a:noFill/>
+          </a:ln>
+          <a:effectLst/>
+        </p:spPr>
+        <p:style>
+          <a:lnRef idx="1">
+            <a:schemeClr val="accent1"/>
+          </a:lnRef>
+          <a:fillRef idx="3">
+            <a:schemeClr val="accent1"/>
+          </a:fillRef>
+          <a:effectRef idx="2">
+            <a:schemeClr val="accent1"/>
+          </a:effectRef>
+          <a:fontRef idx="minor">
+            <a:schemeClr val="lt1"/>
+          </a:fontRef>
+        </p:style>
+        <p:txBody>
+          <a:bodyPr rtlCol="0" anchor="ctr"/>
+          <a:lstStyle/>
+          <a:p>
+            <a:pPr algn="ctr"/>
+          </a:p>
+        </p:txBody>
+      </p:sp>
+      <p:sp>
+        <p:nvSpPr>
+          <p:cNvPr id="77" name="Rectangle 76"/>
+          <p:cNvSpPr/>
+          <p:nvPr/>
+        </p:nvSpPr>
+        <p:spPr>
+          <a:xfrm>
+            <a:off x="7259576" y="4123944"/>
+            <a:ext cx="352044" cy="64008"/>
+          </a:xfrm>
+          <a:prstGeom prst="rect">
+            <a:avLst/>
+          </a:prstGeom>
+          <a:solidFill>
+            <a:srgbClr val="4A57C4"/>
+          </a:solidFill>
+          <a:ln>
+            <a:noFill/>
+          </a:ln>
+          <a:effectLst/>
+        </p:spPr>
+        <p:style>
+          <a:lnRef idx="1">
+            <a:schemeClr val="accent1"/>
+          </a:lnRef>
+          <a:fillRef idx="3">
+            <a:schemeClr val="accent1"/>
+          </a:fillRef>
+          <a:effectRef idx="2">
+            <a:schemeClr val="accent1"/>
+          </a:effectRef>
+          <a:fontRef idx="minor">
+            <a:schemeClr val="lt1"/>
+          </a:fontRef>
+        </p:style>
+        <p:txBody>
+          <a:bodyPr rtlCol="0" anchor="ctr"/>
+          <a:lstStyle/>
+          <a:p>
+            <a:pPr algn="ctr"/>
+          </a:p>
+        </p:txBody>
+      </p:sp>
+      <p:sp>
+        <p:nvSpPr>
+          <p:cNvPr id="78" name="Rectangle 77"/>
+          <p:cNvSpPr/>
+          <p:nvPr/>
+        </p:nvSpPr>
+        <p:spPr>
+          <a:xfrm>
+            <a:off x="7515608" y="4096512"/>
+            <a:ext cx="10972" cy="118872"/>
+          </a:xfrm>
+          <a:prstGeom prst="rect">
+            <a:avLst/>
+          </a:prstGeom>
+          <a:solidFill>
+            <a:srgbClr val="16233B"/>
+          </a:solidFill>
+          <a:ln>
+            <a:noFill/>
+          </a:ln>
+          <a:effectLst/>
+        </p:spPr>
+        <p:style>
+          <a:lnRef idx="1">
+            <a:schemeClr val="accent1"/>
+          </a:lnRef>
+          <a:fillRef idx="3">
+            <a:schemeClr val="accent1"/>
+          </a:fillRef>
+          <a:effectRef idx="2">
+            <a:schemeClr val="accent1"/>
+          </a:effectRef>
+          <a:fontRef idx="minor">
+            <a:schemeClr val="lt1"/>
+          </a:fontRef>
+        </p:style>
+        <p:txBody>
+          <a:bodyPr rtlCol="0" anchor="ctr"/>
+          <a:lstStyle/>
+          <a:p>
+            <a:pPr algn="ctr"/>
+          </a:p>
+        </p:txBody>
+      </p:sp>
+      <p:sp>
+        <p:nvSpPr>
+          <p:cNvPr id="79" name="TextBox 78"/>
+          <p:cNvSpPr txBox="1"/>
+          <p:nvPr/>
+        </p:nvSpPr>
+        <p:spPr>
+          <a:xfrm>
+            <a:off x="7963664" y="4046220"/>
+            <a:ext cx="411480" cy="219456"/>
+          </a:xfrm>
+          <a:prstGeom prst="rect">
+            <a:avLst/>
+          </a:prstGeom>
+          <a:noFill/>
+        </p:spPr>
+        <p:txBody>
+          <a:bodyPr wrap="square" anchor="ctr" lIns="0" rIns="0" tIns="0" bIns="0">
+            <a:spAutoFit/>
+          </a:bodyPr>
+          <a:lstStyle/>
+          <a:p>
+            <a:pPr algn="l">
+              <a:spcBef>
+                <a:spcPts val="0"/>
+              </a:spcBef>
+              <a:spcAft>
+                <a:spcPts val="0"/>
+              </a:spcAft>
+            </a:pPr>
+            <a:r>
+              <a:rPr sz="900" b="0" i="0">
+                <a:solidFill>
+                  <a:srgbClr val="16233B"/>
+                </a:solidFill>
+                <a:latin typeface="Bahnschrift"/>
+              </a:rPr>
+              <a:t>55</a:t>
+            </a:r>
+          </a:p>
+        </p:txBody>
+      </p:sp>
+      <p:sp>
+        <p:nvSpPr>
+          <p:cNvPr id="80" name="Rounded Rectangle 79"/>
+          <p:cNvSpPr/>
+          <p:nvPr/>
+        </p:nvSpPr>
+        <p:spPr>
+          <a:xfrm>
+            <a:off x="9044157" y="4023360"/>
             <a:ext cx="1280160" cy="219456"/>
           </a:xfrm>
           <a:prstGeom prst="roundRect">
@@ -10385,1308 +11687,6 @@
       </p:sp>
       <p:sp>
         <p:nvSpPr>
-          <p:cNvPr id="51" name="TextBox 50"/>
-          <p:cNvSpPr txBox="1"/>
-          <p:nvPr/>
-        </p:nvSpPr>
-        <p:spPr>
-          <a:xfrm>
-            <a:off x="9044157" y="2920593"/>
-            <a:ext cx="1280160" cy="228600"/>
-          </a:xfrm>
-          <a:prstGeom prst="rect">
-            <a:avLst/>
-          </a:prstGeom>
-          <a:noFill/>
-        </p:spPr>
-        <p:txBody>
-          <a:bodyPr wrap="square" anchor="ctr" lIns="0" rIns="0" tIns="0" bIns="0">
-            <a:spAutoFit/>
-          </a:bodyPr>
-          <a:lstStyle/>
-          <a:p>
-            <a:pPr algn="ctr">
-              <a:spcBef>
-                <a:spcPts val="0"/>
-              </a:spcBef>
-              <a:spcAft>
-                <a:spcPts val="0"/>
-              </a:spcAft>
-            </a:pPr>
-            <a:r>
-              <a:rPr sz="800" b="1" i="0" spc="60">
-                <a:solidFill>
-                  <a:srgbClr val="92400E"/>
-                </a:solidFill>
-                <a:latin typeface="Bahnschrift"/>
-              </a:rPr>
-              <a:t>SWITCH</a:t>
-            </a:r>
-          </a:p>
-        </p:txBody>
-      </p:sp>
-      <p:sp>
-        <p:nvSpPr>
-          <p:cNvPr id="52" name="Rectangle 51"/>
-          <p:cNvSpPr/>
-          <p:nvPr/>
-        </p:nvSpPr>
-        <p:spPr>
-          <a:xfrm>
-            <a:off x="841248" y="3209544"/>
-            <a:ext cx="10509199" cy="5486"/>
-          </a:xfrm>
-          <a:prstGeom prst="rect">
-            <a:avLst/>
-          </a:prstGeom>
-          <a:solidFill>
-            <a:srgbClr val="E5E7EB"/>
-          </a:solidFill>
-          <a:ln>
-            <a:noFill/>
-          </a:ln>
-          <a:effectLst/>
-        </p:spPr>
-        <p:style>
-          <a:lnRef idx="1">
-            <a:schemeClr val="accent1"/>
-          </a:lnRef>
-          <a:fillRef idx="3">
-            <a:schemeClr val="accent1"/>
-          </a:fillRef>
-          <a:effectRef idx="2">
-            <a:schemeClr val="accent1"/>
-          </a:effectRef>
-          <a:fontRef idx="minor">
-            <a:schemeClr val="lt1"/>
-          </a:fontRef>
-        </p:style>
-        <p:txBody>
-          <a:bodyPr rtlCol="0" anchor="ctr"/>
-          <a:lstStyle/>
-          <a:p>
-            <a:pPr algn="ctr"/>
-          </a:p>
-        </p:txBody>
-      </p:sp>
-      <p:sp>
-        <p:nvSpPr>
-          <p:cNvPr id="53" name="TextBox 52"/>
-          <p:cNvSpPr txBox="1"/>
-          <p:nvPr/>
-        </p:nvSpPr>
-        <p:spPr>
-          <a:xfrm>
-            <a:off x="914400" y="3227832"/>
-            <a:ext cx="3422857" cy="365760"/>
-          </a:xfrm>
-          <a:prstGeom prst="rect">
-            <a:avLst/>
-          </a:prstGeom>
-          <a:noFill/>
-        </p:spPr>
-        <p:txBody>
-          <a:bodyPr wrap="square" anchor="ctr" lIns="0" rIns="0" tIns="0" bIns="0">
-            <a:spAutoFit/>
-          </a:bodyPr>
-          <a:lstStyle/>
-          <a:p>
-            <a:pPr algn="l">
-              <a:spcBef>
-                <a:spcPts val="0"/>
-              </a:spcBef>
-              <a:spcAft>
-                <a:spcPts val="0"/>
-              </a:spcAft>
-            </a:pPr>
-            <a:r>
-              <a:rPr sz="1100" b="0" i="0">
-                <a:solidFill>
-                  <a:srgbClr val="16233B"/>
-                </a:solidFill>
-                <a:latin typeface="Georgia"/>
-              </a:rPr>
-              <a:t>ICICI Pru Multi-Asset (Reg)</a:t>
-            </a:r>
-          </a:p>
-        </p:txBody>
-      </p:sp>
-      <p:sp>
-        <p:nvSpPr>
-          <p:cNvPr id="54" name="TextBox 53"/>
-          <p:cNvSpPr txBox="1"/>
-          <p:nvPr/>
-        </p:nvSpPr>
-        <p:spPr>
-          <a:xfrm>
-            <a:off x="4483561" y="3227832"/>
-            <a:ext cx="1439990" cy="365760"/>
-          </a:xfrm>
-          <a:prstGeom prst="rect">
-            <a:avLst/>
-          </a:prstGeom>
-          <a:noFill/>
-        </p:spPr>
-        <p:txBody>
-          <a:bodyPr wrap="square" anchor="ctr" lIns="0" rIns="0" tIns="0" bIns="0">
-            <a:spAutoFit/>
-          </a:bodyPr>
-          <a:lstStyle/>
-          <a:p>
-            <a:pPr algn="l">
-              <a:spcBef>
-                <a:spcPts val="0"/>
-              </a:spcBef>
-              <a:spcAft>
-                <a:spcPts val="0"/>
-              </a:spcAft>
-            </a:pPr>
-            <a:r>
-              <a:rPr sz="1100" b="0" i="0">
-                <a:solidFill>
-                  <a:srgbClr val="16233B"/>
-                </a:solidFill>
-                <a:latin typeface="Georgia"/>
-              </a:rPr>
-              <a:t>Hybrid</a:t>
-            </a:r>
-          </a:p>
-        </p:txBody>
-      </p:sp>
-      <p:sp>
-        <p:nvSpPr>
-          <p:cNvPr id="55" name="TextBox 54"/>
-          <p:cNvSpPr txBox="1"/>
-          <p:nvPr/>
-        </p:nvSpPr>
-        <p:spPr>
-          <a:xfrm>
-            <a:off x="6069856" y="3227832"/>
-            <a:ext cx="1043416" cy="365760"/>
-          </a:xfrm>
-          <a:prstGeom prst="rect">
-            <a:avLst/>
-          </a:prstGeom>
-          <a:noFill/>
-        </p:spPr>
-        <p:txBody>
-          <a:bodyPr wrap="square" anchor="ctr" lIns="0" rIns="0" tIns="0" bIns="0">
-            <a:spAutoFit/>
-          </a:bodyPr>
-          <a:lstStyle/>
-          <a:p>
-            <a:pPr algn="r">
-              <a:spcBef>
-                <a:spcPts val="0"/>
-              </a:spcBef>
-              <a:spcAft>
-                <a:spcPts val="0"/>
-              </a:spcAft>
-            </a:pPr>
-            <a:r>
-              <a:rPr sz="1100" b="0" i="0">
-                <a:solidFill>
-                  <a:srgbClr val="16233B"/>
-                </a:solidFill>
-                <a:latin typeface="Georgia"/>
-              </a:rPr>
-              <a:t>3.7</a:t>
-            </a:r>
-          </a:p>
-        </p:txBody>
-      </p:sp>
-      <p:sp>
-        <p:nvSpPr>
-          <p:cNvPr id="56" name="Rectangle 55"/>
-          <p:cNvSpPr/>
-          <p:nvPr/>
-        </p:nvSpPr>
-        <p:spPr>
-          <a:xfrm>
-            <a:off x="7259576" y="3392424"/>
-            <a:ext cx="640080" cy="64008"/>
-          </a:xfrm>
-          <a:prstGeom prst="rect">
-            <a:avLst/>
-          </a:prstGeom>
-          <a:solidFill>
-            <a:srgbClr val="EEEFF7"/>
-          </a:solidFill>
-          <a:ln>
-            <a:noFill/>
-          </a:ln>
-          <a:effectLst/>
-        </p:spPr>
-        <p:style>
-          <a:lnRef idx="1">
-            <a:schemeClr val="accent1"/>
-          </a:lnRef>
-          <a:fillRef idx="3">
-            <a:schemeClr val="accent1"/>
-          </a:fillRef>
-          <a:effectRef idx="2">
-            <a:schemeClr val="accent1"/>
-          </a:effectRef>
-          <a:fontRef idx="minor">
-            <a:schemeClr val="lt1"/>
-          </a:fontRef>
-        </p:style>
-        <p:txBody>
-          <a:bodyPr rtlCol="0" anchor="ctr"/>
-          <a:lstStyle/>
-          <a:p>
-            <a:pPr algn="ctr"/>
-          </a:p>
-        </p:txBody>
-      </p:sp>
-      <p:sp>
-        <p:nvSpPr>
-          <p:cNvPr id="57" name="Rectangle 56"/>
-          <p:cNvSpPr/>
-          <p:nvPr/>
-        </p:nvSpPr>
-        <p:spPr>
-          <a:xfrm>
-            <a:off x="7259576" y="3392424"/>
-            <a:ext cx="467258" cy="64008"/>
-          </a:xfrm>
-          <a:prstGeom prst="rect">
-            <a:avLst/>
-          </a:prstGeom>
-          <a:solidFill>
-            <a:srgbClr val="4A57C4"/>
-          </a:solidFill>
-          <a:ln>
-            <a:noFill/>
-          </a:ln>
-          <a:effectLst/>
-        </p:spPr>
-        <p:style>
-          <a:lnRef idx="1">
-            <a:schemeClr val="accent1"/>
-          </a:lnRef>
-          <a:fillRef idx="3">
-            <a:schemeClr val="accent1"/>
-          </a:fillRef>
-          <a:effectRef idx="2">
-            <a:schemeClr val="accent1"/>
-          </a:effectRef>
-          <a:fontRef idx="minor">
-            <a:schemeClr val="lt1"/>
-          </a:fontRef>
-        </p:style>
-        <p:txBody>
-          <a:bodyPr rtlCol="0" anchor="ctr"/>
-          <a:lstStyle/>
-          <a:p>
-            <a:pPr algn="ctr"/>
-          </a:p>
-        </p:txBody>
-      </p:sp>
-      <p:sp>
-        <p:nvSpPr>
-          <p:cNvPr id="58" name="Rectangle 57"/>
-          <p:cNvSpPr/>
-          <p:nvPr/>
-        </p:nvSpPr>
-        <p:spPr>
-          <a:xfrm>
-            <a:off x="7515608" y="3364992"/>
-            <a:ext cx="10972" cy="118872"/>
-          </a:xfrm>
-          <a:prstGeom prst="rect">
-            <a:avLst/>
-          </a:prstGeom>
-          <a:solidFill>
-            <a:srgbClr val="16233B"/>
-          </a:solidFill>
-          <a:ln>
-            <a:noFill/>
-          </a:ln>
-          <a:effectLst/>
-        </p:spPr>
-        <p:style>
-          <a:lnRef idx="1">
-            <a:schemeClr val="accent1"/>
-          </a:lnRef>
-          <a:fillRef idx="3">
-            <a:schemeClr val="accent1"/>
-          </a:fillRef>
-          <a:effectRef idx="2">
-            <a:schemeClr val="accent1"/>
-          </a:effectRef>
-          <a:fontRef idx="minor">
-            <a:schemeClr val="lt1"/>
-          </a:fontRef>
-        </p:style>
-        <p:txBody>
-          <a:bodyPr rtlCol="0" anchor="ctr"/>
-          <a:lstStyle/>
-          <a:p>
-            <a:pPr algn="ctr"/>
-          </a:p>
-        </p:txBody>
-      </p:sp>
-      <p:sp>
-        <p:nvSpPr>
-          <p:cNvPr id="59" name="TextBox 58"/>
-          <p:cNvSpPr txBox="1"/>
-          <p:nvPr/>
-        </p:nvSpPr>
-        <p:spPr>
-          <a:xfrm>
-            <a:off x="7963664" y="3314700"/>
-            <a:ext cx="411480" cy="219456"/>
-          </a:xfrm>
-          <a:prstGeom prst="rect">
-            <a:avLst/>
-          </a:prstGeom>
-          <a:noFill/>
-        </p:spPr>
-        <p:txBody>
-          <a:bodyPr wrap="square" anchor="ctr" lIns="0" rIns="0" tIns="0" bIns="0">
-            <a:spAutoFit/>
-          </a:bodyPr>
-          <a:lstStyle/>
-          <a:p>
-            <a:pPr algn="l">
-              <a:spcBef>
-                <a:spcPts val="0"/>
-              </a:spcBef>
-              <a:spcAft>
-                <a:spcPts val="0"/>
-              </a:spcAft>
-            </a:pPr>
-            <a:r>
-              <a:rPr sz="900" b="0" i="0">
-                <a:solidFill>
-                  <a:srgbClr val="16233B"/>
-                </a:solidFill>
-                <a:latin typeface="Bahnschrift"/>
-              </a:rPr>
-              <a:t>73</a:t>
-            </a:r>
-          </a:p>
-        </p:txBody>
-      </p:sp>
-      <p:sp>
-        <p:nvSpPr>
-          <p:cNvPr id="60" name="Rounded Rectangle 59"/>
-          <p:cNvSpPr/>
-          <p:nvPr/>
-        </p:nvSpPr>
-        <p:spPr>
-          <a:xfrm>
-            <a:off x="9044157" y="3291840"/>
-            <a:ext cx="1280160" cy="219456"/>
-          </a:xfrm>
-          <a:prstGeom prst="roundRect">
-            <a:avLst>
-              <a:gd name="adj" fmla="val 50000"/>
-            </a:avLst>
-          </a:prstGeom>
-          <a:solidFill>
-            <a:srgbClr val="FBEFDC"/>
-          </a:solidFill>
-          <a:ln w="9525">
-            <a:solidFill>
-              <a:srgbClr val="92400E"/>
-            </a:solidFill>
-          </a:ln>
-          <a:effectLst/>
-        </p:spPr>
-        <p:style>
-          <a:lnRef idx="1">
-            <a:schemeClr val="accent1"/>
-          </a:lnRef>
-          <a:fillRef idx="3">
-            <a:schemeClr val="accent1"/>
-          </a:fillRef>
-          <a:effectRef idx="2">
-            <a:schemeClr val="accent1"/>
-          </a:effectRef>
-          <a:fontRef idx="minor">
-            <a:schemeClr val="lt1"/>
-          </a:fontRef>
-        </p:style>
-        <p:txBody>
-          <a:bodyPr rtlCol="0" anchor="ctr"/>
-          <a:lstStyle/>
-          <a:p>
-            <a:pPr algn="ctr"/>
-          </a:p>
-        </p:txBody>
-      </p:sp>
-      <p:sp>
-        <p:nvSpPr>
-          <p:cNvPr id="61" name="TextBox 60"/>
-          <p:cNvSpPr txBox="1"/>
-          <p:nvPr/>
-        </p:nvSpPr>
-        <p:spPr>
-          <a:xfrm>
-            <a:off x="9044157" y="3286353"/>
-            <a:ext cx="1280160" cy="228600"/>
-          </a:xfrm>
-          <a:prstGeom prst="rect">
-            <a:avLst/>
-          </a:prstGeom>
-          <a:noFill/>
-        </p:spPr>
-        <p:txBody>
-          <a:bodyPr wrap="square" anchor="ctr" lIns="0" rIns="0" tIns="0" bIns="0">
-            <a:spAutoFit/>
-          </a:bodyPr>
-          <a:lstStyle/>
-          <a:p>
-            <a:pPr algn="ctr">
-              <a:spcBef>
-                <a:spcPts val="0"/>
-              </a:spcBef>
-              <a:spcAft>
-                <a:spcPts val="0"/>
-              </a:spcAft>
-            </a:pPr>
-            <a:r>
-              <a:rPr sz="800" b="1" i="0" spc="60">
-                <a:solidFill>
-                  <a:srgbClr val="92400E"/>
-                </a:solidFill>
-                <a:latin typeface="Bahnschrift"/>
-              </a:rPr>
-              <a:t>TO-DIRECT</a:t>
-            </a:r>
-          </a:p>
-        </p:txBody>
-      </p:sp>
-      <p:sp>
-        <p:nvSpPr>
-          <p:cNvPr id="62" name="Rectangle 61"/>
-          <p:cNvSpPr/>
-          <p:nvPr/>
-        </p:nvSpPr>
-        <p:spPr>
-          <a:xfrm>
-            <a:off x="841248" y="3575303"/>
-            <a:ext cx="10509199" cy="5486"/>
-          </a:xfrm>
-          <a:prstGeom prst="rect">
-            <a:avLst/>
-          </a:prstGeom>
-          <a:solidFill>
-            <a:srgbClr val="E5E7EB"/>
-          </a:solidFill>
-          <a:ln>
-            <a:noFill/>
-          </a:ln>
-          <a:effectLst/>
-        </p:spPr>
-        <p:style>
-          <a:lnRef idx="1">
-            <a:schemeClr val="accent1"/>
-          </a:lnRef>
-          <a:fillRef idx="3">
-            <a:schemeClr val="accent1"/>
-          </a:fillRef>
-          <a:effectRef idx="2">
-            <a:schemeClr val="accent1"/>
-          </a:effectRef>
-          <a:fontRef idx="minor">
-            <a:schemeClr val="lt1"/>
-          </a:fontRef>
-        </p:style>
-        <p:txBody>
-          <a:bodyPr rtlCol="0" anchor="ctr"/>
-          <a:lstStyle/>
-          <a:p>
-            <a:pPr algn="ctr"/>
-          </a:p>
-        </p:txBody>
-      </p:sp>
-      <p:sp>
-        <p:nvSpPr>
-          <p:cNvPr id="63" name="TextBox 62"/>
-          <p:cNvSpPr txBox="1"/>
-          <p:nvPr/>
-        </p:nvSpPr>
-        <p:spPr>
-          <a:xfrm>
-            <a:off x="914400" y="3593591"/>
-            <a:ext cx="3422857" cy="365760"/>
-          </a:xfrm>
-          <a:prstGeom prst="rect">
-            <a:avLst/>
-          </a:prstGeom>
-          <a:noFill/>
-        </p:spPr>
-        <p:txBody>
-          <a:bodyPr wrap="square" anchor="ctr" lIns="0" rIns="0" tIns="0" bIns="0">
-            <a:spAutoFit/>
-          </a:bodyPr>
-          <a:lstStyle/>
-          <a:p>
-            <a:pPr algn="l">
-              <a:spcBef>
-                <a:spcPts val="0"/>
-              </a:spcBef>
-              <a:spcAft>
-                <a:spcPts val="0"/>
-              </a:spcAft>
-            </a:pPr>
-            <a:r>
-              <a:rPr sz="1100" b="0" i="0">
-                <a:solidFill>
-                  <a:srgbClr val="16233B"/>
-                </a:solidFill>
-                <a:latin typeface="Georgia"/>
-              </a:rPr>
-              <a:t>PGIM India Small Cap</a:t>
-            </a:r>
-          </a:p>
-        </p:txBody>
-      </p:sp>
-      <p:sp>
-        <p:nvSpPr>
-          <p:cNvPr id="64" name="TextBox 63"/>
-          <p:cNvSpPr txBox="1"/>
-          <p:nvPr/>
-        </p:nvSpPr>
-        <p:spPr>
-          <a:xfrm>
-            <a:off x="4483561" y="3593591"/>
-            <a:ext cx="1439990" cy="365760"/>
-          </a:xfrm>
-          <a:prstGeom prst="rect">
-            <a:avLst/>
-          </a:prstGeom>
-          <a:noFill/>
-        </p:spPr>
-        <p:txBody>
-          <a:bodyPr wrap="square" anchor="ctr" lIns="0" rIns="0" tIns="0" bIns="0">
-            <a:spAutoFit/>
-          </a:bodyPr>
-          <a:lstStyle/>
-          <a:p>
-            <a:pPr algn="l">
-              <a:spcBef>
-                <a:spcPts val="0"/>
-              </a:spcBef>
-              <a:spcAft>
-                <a:spcPts val="0"/>
-              </a:spcAft>
-            </a:pPr>
-            <a:r>
-              <a:rPr sz="1100" b="0" i="0">
-                <a:solidFill>
-                  <a:srgbClr val="16233B"/>
-                </a:solidFill>
-                <a:latin typeface="Georgia"/>
-              </a:rPr>
-              <a:t>Equity</a:t>
-            </a:r>
-          </a:p>
-        </p:txBody>
-      </p:sp>
-      <p:sp>
-        <p:nvSpPr>
-          <p:cNvPr id="65" name="TextBox 64"/>
-          <p:cNvSpPr txBox="1"/>
-          <p:nvPr/>
-        </p:nvSpPr>
-        <p:spPr>
-          <a:xfrm>
-            <a:off x="6069856" y="3593591"/>
-            <a:ext cx="1043416" cy="365760"/>
-          </a:xfrm>
-          <a:prstGeom prst="rect">
-            <a:avLst/>
-          </a:prstGeom>
-          <a:noFill/>
-        </p:spPr>
-        <p:txBody>
-          <a:bodyPr wrap="square" anchor="ctr" lIns="0" rIns="0" tIns="0" bIns="0">
-            <a:spAutoFit/>
-          </a:bodyPr>
-          <a:lstStyle/>
-          <a:p>
-            <a:pPr algn="r">
-              <a:spcBef>
-                <a:spcPts val="0"/>
-              </a:spcBef>
-              <a:spcAft>
-                <a:spcPts val="0"/>
-              </a:spcAft>
-            </a:pPr>
-            <a:r>
-              <a:rPr sz="1100" b="0" i="0">
-                <a:solidFill>
-                  <a:srgbClr val="16233B"/>
-                </a:solidFill>
-                <a:latin typeface="Georgia"/>
-              </a:rPr>
-              <a:t>0.4</a:t>
-            </a:r>
-          </a:p>
-        </p:txBody>
-      </p:sp>
-      <p:sp>
-        <p:nvSpPr>
-          <p:cNvPr id="66" name="Rectangle 65"/>
-          <p:cNvSpPr/>
-          <p:nvPr/>
-        </p:nvSpPr>
-        <p:spPr>
-          <a:xfrm>
-            <a:off x="7259576" y="3758184"/>
-            <a:ext cx="640080" cy="64008"/>
-          </a:xfrm>
-          <a:prstGeom prst="rect">
-            <a:avLst/>
-          </a:prstGeom>
-          <a:solidFill>
-            <a:srgbClr val="EEEFF7"/>
-          </a:solidFill>
-          <a:ln>
-            <a:noFill/>
-          </a:ln>
-          <a:effectLst/>
-        </p:spPr>
-        <p:style>
-          <a:lnRef idx="1">
-            <a:schemeClr val="accent1"/>
-          </a:lnRef>
-          <a:fillRef idx="3">
-            <a:schemeClr val="accent1"/>
-          </a:fillRef>
-          <a:effectRef idx="2">
-            <a:schemeClr val="accent1"/>
-          </a:effectRef>
-          <a:fontRef idx="minor">
-            <a:schemeClr val="lt1"/>
-          </a:fontRef>
-        </p:style>
-        <p:txBody>
-          <a:bodyPr rtlCol="0" anchor="ctr"/>
-          <a:lstStyle/>
-          <a:p>
-            <a:pPr algn="ctr"/>
-          </a:p>
-        </p:txBody>
-      </p:sp>
-      <p:sp>
-        <p:nvSpPr>
-          <p:cNvPr id="67" name="Rectangle 66"/>
-          <p:cNvSpPr/>
-          <p:nvPr/>
-        </p:nvSpPr>
-        <p:spPr>
-          <a:xfrm>
-            <a:off x="7259576" y="3758184"/>
-            <a:ext cx="51206" cy="64008"/>
-          </a:xfrm>
-          <a:prstGeom prst="rect">
-            <a:avLst/>
-          </a:prstGeom>
-          <a:solidFill>
-            <a:srgbClr val="4A57C4"/>
-          </a:solidFill>
-          <a:ln>
-            <a:noFill/>
-          </a:ln>
-          <a:effectLst/>
-        </p:spPr>
-        <p:style>
-          <a:lnRef idx="1">
-            <a:schemeClr val="accent1"/>
-          </a:lnRef>
-          <a:fillRef idx="3">
-            <a:schemeClr val="accent1"/>
-          </a:fillRef>
-          <a:effectRef idx="2">
-            <a:schemeClr val="accent1"/>
-          </a:effectRef>
-          <a:fontRef idx="minor">
-            <a:schemeClr val="lt1"/>
-          </a:fontRef>
-        </p:style>
-        <p:txBody>
-          <a:bodyPr rtlCol="0" anchor="ctr"/>
-          <a:lstStyle/>
-          <a:p>
-            <a:pPr algn="ctr"/>
-          </a:p>
-        </p:txBody>
-      </p:sp>
-      <p:sp>
-        <p:nvSpPr>
-          <p:cNvPr id="68" name="Rectangle 67"/>
-          <p:cNvSpPr/>
-          <p:nvPr/>
-        </p:nvSpPr>
-        <p:spPr>
-          <a:xfrm>
-            <a:off x="7515608" y="3730752"/>
-            <a:ext cx="10972" cy="118872"/>
-          </a:xfrm>
-          <a:prstGeom prst="rect">
-            <a:avLst/>
-          </a:prstGeom>
-          <a:solidFill>
-            <a:srgbClr val="16233B"/>
-          </a:solidFill>
-          <a:ln>
-            <a:noFill/>
-          </a:ln>
-          <a:effectLst/>
-        </p:spPr>
-        <p:style>
-          <a:lnRef idx="1">
-            <a:schemeClr val="accent1"/>
-          </a:lnRef>
-          <a:fillRef idx="3">
-            <a:schemeClr val="accent1"/>
-          </a:fillRef>
-          <a:effectRef idx="2">
-            <a:schemeClr val="accent1"/>
-          </a:effectRef>
-          <a:fontRef idx="minor">
-            <a:schemeClr val="lt1"/>
-          </a:fontRef>
-        </p:style>
-        <p:txBody>
-          <a:bodyPr rtlCol="0" anchor="ctr"/>
-          <a:lstStyle/>
-          <a:p>
-            <a:pPr algn="ctr"/>
-          </a:p>
-        </p:txBody>
-      </p:sp>
-      <p:sp>
-        <p:nvSpPr>
-          <p:cNvPr id="69" name="TextBox 68"/>
-          <p:cNvSpPr txBox="1"/>
-          <p:nvPr/>
-        </p:nvSpPr>
-        <p:spPr>
-          <a:xfrm>
-            <a:off x="7963664" y="3680460"/>
-            <a:ext cx="411480" cy="219456"/>
-          </a:xfrm>
-          <a:prstGeom prst="rect">
-            <a:avLst/>
-          </a:prstGeom>
-          <a:noFill/>
-        </p:spPr>
-        <p:txBody>
-          <a:bodyPr wrap="square" anchor="ctr" lIns="0" rIns="0" tIns="0" bIns="0">
-            <a:spAutoFit/>
-          </a:bodyPr>
-          <a:lstStyle/>
-          <a:p>
-            <a:pPr algn="l">
-              <a:spcBef>
-                <a:spcPts val="0"/>
-              </a:spcBef>
-              <a:spcAft>
-                <a:spcPts val="0"/>
-              </a:spcAft>
-            </a:pPr>
-            <a:r>
-              <a:rPr sz="900" b="0" i="0">
-                <a:solidFill>
-                  <a:srgbClr val="16233B"/>
-                </a:solidFill>
-                <a:latin typeface="Bahnschrift"/>
-              </a:rPr>
-              <a:t>8</a:t>
-            </a:r>
-          </a:p>
-        </p:txBody>
-      </p:sp>
-      <p:sp>
-        <p:nvSpPr>
-          <p:cNvPr id="70" name="Rounded Rectangle 69"/>
-          <p:cNvSpPr/>
-          <p:nvPr/>
-        </p:nvSpPr>
-        <p:spPr>
-          <a:xfrm>
-            <a:off x="9044157" y="3657600"/>
-            <a:ext cx="1280160" cy="219456"/>
-          </a:xfrm>
-          <a:prstGeom prst="roundRect">
-            <a:avLst>
-              <a:gd name="adj" fmla="val 50000"/>
-            </a:avLst>
-          </a:prstGeom>
-          <a:solidFill>
-            <a:srgbClr val="FBE3E0"/>
-          </a:solidFill>
-          <a:ln w="9525">
-            <a:solidFill>
-              <a:srgbClr val="E0402F"/>
-            </a:solidFill>
-          </a:ln>
-          <a:effectLst/>
-        </p:spPr>
-        <p:style>
-          <a:lnRef idx="1">
-            <a:schemeClr val="accent1"/>
-          </a:lnRef>
-          <a:fillRef idx="3">
-            <a:schemeClr val="accent1"/>
-          </a:fillRef>
-          <a:effectRef idx="2">
-            <a:schemeClr val="accent1"/>
-          </a:effectRef>
-          <a:fontRef idx="minor">
-            <a:schemeClr val="lt1"/>
-          </a:fontRef>
-        </p:style>
-        <p:txBody>
-          <a:bodyPr rtlCol="0" anchor="ctr"/>
-          <a:lstStyle/>
-          <a:p>
-            <a:pPr algn="ctr"/>
-          </a:p>
-        </p:txBody>
-      </p:sp>
-      <p:sp>
-        <p:nvSpPr>
-          <p:cNvPr id="71" name="TextBox 70"/>
-          <p:cNvSpPr txBox="1"/>
-          <p:nvPr/>
-        </p:nvSpPr>
-        <p:spPr>
-          <a:xfrm>
-            <a:off x="9044157" y="3652113"/>
-            <a:ext cx="1280160" cy="228600"/>
-          </a:xfrm>
-          <a:prstGeom prst="rect">
-            <a:avLst/>
-          </a:prstGeom>
-          <a:noFill/>
-        </p:spPr>
-        <p:txBody>
-          <a:bodyPr wrap="square" anchor="ctr" lIns="0" rIns="0" tIns="0" bIns="0">
-            <a:spAutoFit/>
-          </a:bodyPr>
-          <a:lstStyle/>
-          <a:p>
-            <a:pPr algn="ctr">
-              <a:spcBef>
-                <a:spcPts val="0"/>
-              </a:spcBef>
-              <a:spcAft>
-                <a:spcPts val="0"/>
-              </a:spcAft>
-            </a:pPr>
-            <a:r>
-              <a:rPr sz="800" b="1" i="0" spc="60">
-                <a:solidFill>
-                  <a:srgbClr val="E0402F"/>
-                </a:solidFill>
-                <a:latin typeface="Bahnschrift"/>
-              </a:rPr>
-              <a:t>EXIT</a:t>
-            </a:r>
-          </a:p>
-        </p:txBody>
-      </p:sp>
-      <p:sp>
-        <p:nvSpPr>
-          <p:cNvPr id="72" name="Rectangle 71"/>
-          <p:cNvSpPr/>
-          <p:nvPr/>
-        </p:nvSpPr>
-        <p:spPr>
-          <a:xfrm>
-            <a:off x="841248" y="3941064"/>
-            <a:ext cx="10509199" cy="5486"/>
-          </a:xfrm>
-          <a:prstGeom prst="rect">
-            <a:avLst/>
-          </a:prstGeom>
-          <a:solidFill>
-            <a:srgbClr val="E5E7EB"/>
-          </a:solidFill>
-          <a:ln>
-            <a:noFill/>
-          </a:ln>
-          <a:effectLst/>
-        </p:spPr>
-        <p:style>
-          <a:lnRef idx="1">
-            <a:schemeClr val="accent1"/>
-          </a:lnRef>
-          <a:fillRef idx="3">
-            <a:schemeClr val="accent1"/>
-          </a:fillRef>
-          <a:effectRef idx="2">
-            <a:schemeClr val="accent1"/>
-          </a:effectRef>
-          <a:fontRef idx="minor">
-            <a:schemeClr val="lt1"/>
-          </a:fontRef>
-        </p:style>
-        <p:txBody>
-          <a:bodyPr rtlCol="0" anchor="ctr"/>
-          <a:lstStyle/>
-          <a:p>
-            <a:pPr algn="ctr"/>
-          </a:p>
-        </p:txBody>
-      </p:sp>
-      <p:sp>
-        <p:nvSpPr>
-          <p:cNvPr id="73" name="TextBox 72"/>
-          <p:cNvSpPr txBox="1"/>
-          <p:nvPr/>
-        </p:nvSpPr>
-        <p:spPr>
-          <a:xfrm>
-            <a:off x="914400" y="3959352"/>
-            <a:ext cx="3422857" cy="365760"/>
-          </a:xfrm>
-          <a:prstGeom prst="rect">
-            <a:avLst/>
-          </a:prstGeom>
-          <a:noFill/>
-        </p:spPr>
-        <p:txBody>
-          <a:bodyPr wrap="square" anchor="ctr" lIns="0" rIns="0" tIns="0" bIns="0">
-            <a:spAutoFit/>
-          </a:bodyPr>
-          <a:lstStyle/>
-          <a:p>
-            <a:pPr algn="l">
-              <a:spcBef>
-                <a:spcPts val="0"/>
-              </a:spcBef>
-              <a:spcAft>
-                <a:spcPts val="0"/>
-              </a:spcAft>
-            </a:pPr>
-            <a:r>
-              <a:rPr sz="1100" b="0" i="0">
-                <a:solidFill>
-                  <a:srgbClr val="16233B"/>
-                </a:solidFill>
-                <a:latin typeface="Georgia"/>
-              </a:rPr>
-              <a:t>LIC MF Balanced Advantage</a:t>
-            </a:r>
-          </a:p>
-        </p:txBody>
-      </p:sp>
-      <p:sp>
-        <p:nvSpPr>
-          <p:cNvPr id="74" name="TextBox 73"/>
-          <p:cNvSpPr txBox="1"/>
-          <p:nvPr/>
-        </p:nvSpPr>
-        <p:spPr>
-          <a:xfrm>
-            <a:off x="4483561" y="3959352"/>
-            <a:ext cx="1439990" cy="365760"/>
-          </a:xfrm>
-          <a:prstGeom prst="rect">
-            <a:avLst/>
-          </a:prstGeom>
-          <a:noFill/>
-        </p:spPr>
-        <p:txBody>
-          <a:bodyPr wrap="square" anchor="ctr" lIns="0" rIns="0" tIns="0" bIns="0">
-            <a:spAutoFit/>
-          </a:bodyPr>
-          <a:lstStyle/>
-          <a:p>
-            <a:pPr algn="l">
-              <a:spcBef>
-                <a:spcPts val="0"/>
-              </a:spcBef>
-              <a:spcAft>
-                <a:spcPts val="0"/>
-              </a:spcAft>
-            </a:pPr>
-            <a:r>
-              <a:rPr sz="1100" b="0" i="0">
-                <a:solidFill>
-                  <a:srgbClr val="16233B"/>
-                </a:solidFill>
-                <a:latin typeface="Georgia"/>
-              </a:rPr>
-              <a:t>Hybrid</a:t>
-            </a:r>
-          </a:p>
-        </p:txBody>
-      </p:sp>
-      <p:sp>
-        <p:nvSpPr>
-          <p:cNvPr id="75" name="TextBox 74"/>
-          <p:cNvSpPr txBox="1"/>
-          <p:nvPr/>
-        </p:nvSpPr>
-        <p:spPr>
-          <a:xfrm>
-            <a:off x="6069856" y="3959352"/>
-            <a:ext cx="1043416" cy="365760"/>
-          </a:xfrm>
-          <a:prstGeom prst="rect">
-            <a:avLst/>
-          </a:prstGeom>
-          <a:noFill/>
-        </p:spPr>
-        <p:txBody>
-          <a:bodyPr wrap="square" anchor="ctr" lIns="0" rIns="0" tIns="0" bIns="0">
-            <a:spAutoFit/>
-          </a:bodyPr>
-          <a:lstStyle/>
-          <a:p>
-            <a:pPr algn="r">
-              <a:spcBef>
-                <a:spcPts val="0"/>
-              </a:spcBef>
-              <a:spcAft>
-                <a:spcPts val="0"/>
-              </a:spcAft>
-            </a:pPr>
-            <a:r>
-              <a:rPr sz="1100" b="0" i="0">
-                <a:solidFill>
-                  <a:srgbClr val="16233B"/>
-                </a:solidFill>
-                <a:latin typeface="Georgia"/>
-              </a:rPr>
-              <a:t>2.8</a:t>
-            </a:r>
-          </a:p>
-        </p:txBody>
-      </p:sp>
-      <p:sp>
-        <p:nvSpPr>
-          <p:cNvPr id="76" name="Rectangle 75"/>
-          <p:cNvSpPr/>
-          <p:nvPr/>
-        </p:nvSpPr>
-        <p:spPr>
-          <a:xfrm>
-            <a:off x="7259576" y="4123944"/>
-            <a:ext cx="640080" cy="64008"/>
-          </a:xfrm>
-          <a:prstGeom prst="rect">
-            <a:avLst/>
-          </a:prstGeom>
-          <a:solidFill>
-            <a:srgbClr val="EEEFF7"/>
-          </a:solidFill>
-          <a:ln>
-            <a:noFill/>
-          </a:ln>
-          <a:effectLst/>
-        </p:spPr>
-        <p:style>
-          <a:lnRef idx="1">
-            <a:schemeClr val="accent1"/>
-          </a:lnRef>
-          <a:fillRef idx="3">
-            <a:schemeClr val="accent1"/>
-          </a:fillRef>
-          <a:effectRef idx="2">
-            <a:schemeClr val="accent1"/>
-          </a:effectRef>
-          <a:fontRef idx="minor">
-            <a:schemeClr val="lt1"/>
-          </a:fontRef>
-        </p:style>
-        <p:txBody>
-          <a:bodyPr rtlCol="0" anchor="ctr"/>
-          <a:lstStyle/>
-          <a:p>
-            <a:pPr algn="ctr"/>
-          </a:p>
-        </p:txBody>
-      </p:sp>
-      <p:sp>
-        <p:nvSpPr>
-          <p:cNvPr id="77" name="Rectangle 76"/>
-          <p:cNvSpPr/>
-          <p:nvPr/>
-        </p:nvSpPr>
-        <p:spPr>
-          <a:xfrm>
-            <a:off x="7259576" y="4123944"/>
-            <a:ext cx="352044" cy="64008"/>
-          </a:xfrm>
-          <a:prstGeom prst="rect">
-            <a:avLst/>
-          </a:prstGeom>
-          <a:solidFill>
-            <a:srgbClr val="4A57C4"/>
-          </a:solidFill>
-          <a:ln>
-            <a:noFill/>
-          </a:ln>
-          <a:effectLst/>
-        </p:spPr>
-        <p:style>
-          <a:lnRef idx="1">
-            <a:schemeClr val="accent1"/>
-          </a:lnRef>
-          <a:fillRef idx="3">
-            <a:schemeClr val="accent1"/>
-          </a:fillRef>
-          <a:effectRef idx="2">
-            <a:schemeClr val="accent1"/>
-          </a:effectRef>
-          <a:fontRef idx="minor">
-            <a:schemeClr val="lt1"/>
-          </a:fontRef>
-        </p:style>
-        <p:txBody>
-          <a:bodyPr rtlCol="0" anchor="ctr"/>
-          <a:lstStyle/>
-          <a:p>
-            <a:pPr algn="ctr"/>
-          </a:p>
-        </p:txBody>
-      </p:sp>
-      <p:sp>
-        <p:nvSpPr>
-          <p:cNvPr id="78" name="Rectangle 77"/>
-          <p:cNvSpPr/>
-          <p:nvPr/>
-        </p:nvSpPr>
-        <p:spPr>
-          <a:xfrm>
-            <a:off x="7515608" y="4096512"/>
-            <a:ext cx="10972" cy="118872"/>
-          </a:xfrm>
-          <a:prstGeom prst="rect">
-            <a:avLst/>
-          </a:prstGeom>
-          <a:solidFill>
-            <a:srgbClr val="16233B"/>
-          </a:solidFill>
-          <a:ln>
-            <a:noFill/>
-          </a:ln>
-          <a:effectLst/>
-        </p:spPr>
-        <p:style>
-          <a:lnRef idx="1">
-            <a:schemeClr val="accent1"/>
-          </a:lnRef>
-          <a:fillRef idx="3">
-            <a:schemeClr val="accent1"/>
-          </a:fillRef>
-          <a:effectRef idx="2">
-            <a:schemeClr val="accent1"/>
-          </a:effectRef>
-          <a:fontRef idx="minor">
-            <a:schemeClr val="lt1"/>
-          </a:fontRef>
-        </p:style>
-        <p:txBody>
-          <a:bodyPr rtlCol="0" anchor="ctr"/>
-          <a:lstStyle/>
-          <a:p>
-            <a:pPr algn="ctr"/>
-          </a:p>
-        </p:txBody>
-      </p:sp>
-      <p:sp>
-        <p:nvSpPr>
-          <p:cNvPr id="79" name="TextBox 78"/>
-          <p:cNvSpPr txBox="1"/>
-          <p:nvPr/>
-        </p:nvSpPr>
-        <p:spPr>
-          <a:xfrm>
-            <a:off x="7963664" y="4046220"/>
-            <a:ext cx="411480" cy="219456"/>
-          </a:xfrm>
-          <a:prstGeom prst="rect">
-            <a:avLst/>
-          </a:prstGeom>
-          <a:noFill/>
-        </p:spPr>
-        <p:txBody>
-          <a:bodyPr wrap="square" anchor="ctr" lIns="0" rIns="0" tIns="0" bIns="0">
-            <a:spAutoFit/>
-          </a:bodyPr>
-          <a:lstStyle/>
-          <a:p>
-            <a:pPr algn="l">
-              <a:spcBef>
-                <a:spcPts val="0"/>
-              </a:spcBef>
-              <a:spcAft>
-                <a:spcPts val="0"/>
-              </a:spcAft>
-            </a:pPr>
-            <a:r>
-              <a:rPr sz="900" b="0" i="0">
-                <a:solidFill>
-                  <a:srgbClr val="16233B"/>
-                </a:solidFill>
-                <a:latin typeface="Bahnschrift"/>
-              </a:rPr>
-              <a:t>55</a:t>
-            </a:r>
-          </a:p>
-        </p:txBody>
-      </p:sp>
-      <p:sp>
-        <p:nvSpPr>
-          <p:cNvPr id="80" name="Rounded Rectangle 79"/>
-          <p:cNvSpPr/>
-          <p:nvPr/>
-        </p:nvSpPr>
-        <p:spPr>
-          <a:xfrm>
-            <a:off x="9044157" y="4023360"/>
-            <a:ext cx="1280160" cy="219456"/>
-          </a:xfrm>
-          <a:prstGeom prst="roundRect">
-            <a:avLst>
-              <a:gd name="adj" fmla="val 50000"/>
-            </a:avLst>
-          </a:prstGeom>
-          <a:solidFill>
-            <a:srgbClr val="FBEFDC"/>
-          </a:solidFill>
-          <a:ln w="9525">
-            <a:solidFill>
-              <a:srgbClr val="92400E"/>
-            </a:solidFill>
-          </a:ln>
-          <a:effectLst/>
-        </p:spPr>
-        <p:style>
-          <a:lnRef idx="1">
-            <a:schemeClr val="accent1"/>
-          </a:lnRef>
-          <a:fillRef idx="3">
-            <a:schemeClr val="accent1"/>
-          </a:fillRef>
-          <a:effectRef idx="2">
-            <a:schemeClr val="accent1"/>
-          </a:effectRef>
-          <a:fontRef idx="minor">
-            <a:schemeClr val="lt1"/>
-          </a:fontRef>
-        </p:style>
-        <p:txBody>
-          <a:bodyPr rtlCol="0" anchor="ctr"/>
-          <a:lstStyle/>
-          <a:p>
-            <a:pPr algn="ctr"/>
-          </a:p>
-        </p:txBody>
-      </p:sp>
-      <p:sp>
-        <p:nvSpPr>
           <p:cNvPr id="81" name="TextBox 80"/>
           <p:cNvSpPr txBox="1"/>
           <p:nvPr/>
@@ -13113,7 +13113,7 @@
                 </a:solidFill>
                 <a:latin typeface="Georgia"/>
               </a:rPr>
-              <a:t>What this means: 6 of 9 funds could be improved, usually because of high fees or the wrong structure, not just weak returns. 3 are worth keeping.</a:t>
+              <a:t>What this means: 4 of 9 funds could be improved, usually because of high fees or the wrong structure, not just weak returns. 5 are worth keeping.</a:t>
             </a:r>
           </a:p>
         </p:txBody>
@@ -13816,7 +13816,7 @@
         <p:spPr>
           <a:xfrm>
             <a:off x="841248" y="1920240"/>
-            <a:ext cx="5117439" cy="1200912"/>
+            <a:ext cx="5117439" cy="1481328"/>
           </a:xfrm>
           <a:prstGeom prst="roundRect">
             <a:avLst>
@@ -13864,7 +13864,7 @@
         <p:spPr>
           <a:xfrm>
             <a:off x="841248" y="1920240"/>
-            <a:ext cx="54864" cy="1200912"/>
+            <a:ext cx="54864" cy="1481328"/>
           </a:xfrm>
           <a:prstGeom prst="rect">
             <a:avLst/>
@@ -14082,7 +14082,7 @@
         <p:spPr>
           <a:xfrm>
             <a:off x="1005840" y="2542032"/>
-            <a:ext cx="4806543" cy="377952"/>
+            <a:ext cx="4806543" cy="658368"/>
           </a:xfrm>
           <a:prstGeom prst="rect">
             <a:avLst/>
@@ -14126,7 +14126,7 @@
         </p:nvSpPr>
         <p:spPr>
           <a:xfrm>
-            <a:off x="1005840" y="2901696"/>
+            <a:off x="1005840" y="3182112"/>
             <a:ext cx="4806543" cy="182880"/>
           </a:xfrm>
           <a:prstGeom prst="rect">
@@ -14177,8 +14177,8 @@
         </p:nvSpPr>
         <p:spPr>
           <a:xfrm>
-            <a:off x="841248" y="3230880"/>
-            <a:ext cx="5117439" cy="1200912"/>
+            <a:off x="841248" y="3511296"/>
+            <a:ext cx="5117439" cy="1481328"/>
           </a:xfrm>
           <a:prstGeom prst="roundRect">
             <a:avLst>
@@ -14225,8 +14225,8 @@
         </p:nvSpPr>
         <p:spPr>
           <a:xfrm>
-            <a:off x="841248" y="3230880"/>
-            <a:ext cx="54864" cy="1200912"/>
+            <a:off x="841248" y="3511296"/>
+            <a:ext cx="54864" cy="1481328"/>
           </a:xfrm>
           <a:prstGeom prst="rect">
             <a:avLst/>
@@ -14269,7 +14269,7 @@
         </p:nvSpPr>
         <p:spPr>
           <a:xfrm>
-            <a:off x="1005840" y="3358896"/>
+            <a:off x="1005840" y="3639312"/>
             <a:ext cx="1234440" cy="219456"/>
           </a:xfrm>
           <a:prstGeom prst="roundRect">
@@ -14317,7 +14317,7 @@
         </p:nvSpPr>
         <p:spPr>
           <a:xfrm>
-            <a:off x="1005840" y="3353409"/>
+            <a:off x="1005840" y="3633825"/>
             <a:ext cx="1234440" cy="228600"/>
           </a:xfrm>
           <a:prstGeom prst="rect">
@@ -14359,7 +14359,7 @@
         </p:nvSpPr>
         <p:spPr>
           <a:xfrm>
-            <a:off x="2322576" y="3349752"/>
+            <a:off x="2322576" y="3630168"/>
             <a:ext cx="3517239" cy="237744"/>
           </a:xfrm>
           <a:prstGeom prst="rect">
@@ -14388,7 +14388,7 @@
                 </a:solidFill>
                 <a:latin typeface="Bahnschrift"/>
               </a:rPr>
-              <a:t>LIC MF Flexi Cap</a:t>
+              <a:t>LIC MF Multi Cap</a:t>
             </a:r>
           </a:p>
         </p:txBody>
@@ -14401,7 +14401,7 @@
         </p:nvSpPr>
         <p:spPr>
           <a:xfrm>
-            <a:off x="1005840" y="3651504"/>
+            <a:off x="1005840" y="3931920"/>
             <a:ext cx="4843119" cy="182880"/>
           </a:xfrm>
           <a:prstGeom prst="rect">
@@ -14430,7 +14430,7 @@
                 </a:solidFill>
                 <a:latin typeface="Bahnschrift"/>
               </a:rPr>
-              <a:t>NEG_ALPHA  ·  WEAK_CONSIST</a:t>
+              <a:t>MANDATE_RIGIDITY</a:t>
             </a:r>
           </a:p>
         </p:txBody>
@@ -14443,8 +14443,8 @@
         </p:nvSpPr>
         <p:spPr>
           <a:xfrm>
-            <a:off x="1005840" y="3852672"/>
-            <a:ext cx="4806543" cy="377952"/>
+            <a:off x="1005840" y="4133088"/>
+            <a:ext cx="4806543" cy="658368"/>
           </a:xfrm>
           <a:prstGeom prst="rect">
             <a:avLst/>
@@ -14475,7 +14475,7 @@
                 </a:solidFill>
                 <a:latin typeface="Georgia"/>
               </a:rPr>
-              <a:t>Trails the broad market by ~4pp a year over five years; the record misses our consistency bar.</a:t>
+              <a:t>Multi-cap's SEBI 25/25/25 floor forces small/mid we prefer to size ourselves, structural, not performance.</a:t>
             </a:r>
           </a:p>
         </p:txBody>
@@ -14488,7 +14488,7 @@
         </p:nvSpPr>
         <p:spPr>
           <a:xfrm>
-            <a:off x="1005840" y="4212336"/>
+            <a:off x="1005840" y="4773168"/>
             <a:ext cx="4806543" cy="182880"/>
           </a:xfrm>
           <a:prstGeom prst="rect">
@@ -14526,7 +14526,7 @@
                 </a:solidFill>
                 <a:latin typeface="Georgia"/>
               </a:rPr>
-              <a:t>a top-quartile Flexi-Cap from the approved list</a:t>
+              <a:t>a Flexi-Cap (manager-flexible cap mix)</a:t>
             </a:r>
           </a:p>
         </p:txBody>
@@ -14539,8 +14539,370 @@
         </p:nvSpPr>
         <p:spPr>
           <a:xfrm>
-            <a:off x="841248" y="4541520"/>
-            <a:ext cx="5117439" cy="1200912"/>
+            <a:off x="6233007" y="1920240"/>
+            <a:ext cx="5117439" cy="1481328"/>
+          </a:xfrm>
+          <a:prstGeom prst="roundRect">
+            <a:avLst>
+              <a:gd name="adj" fmla="val 5000"/>
+            </a:avLst>
+          </a:prstGeom>
+          <a:solidFill>
+            <a:srgbClr val="F5F6FC"/>
+          </a:solidFill>
+          <a:ln w="12700">
+            <a:solidFill>
+              <a:srgbClr val="E0402F"/>
+            </a:solidFill>
+          </a:ln>
+          <a:effectLst/>
+        </p:spPr>
+        <p:style>
+          <a:lnRef idx="1">
+            <a:schemeClr val="accent1"/>
+          </a:lnRef>
+          <a:fillRef idx="3">
+            <a:schemeClr val="accent1"/>
+          </a:fillRef>
+          <a:effectRef idx="2">
+            <a:schemeClr val="accent1"/>
+          </a:effectRef>
+          <a:fontRef idx="minor">
+            <a:schemeClr val="lt1"/>
+          </a:fontRef>
+        </p:style>
+        <p:txBody>
+          <a:bodyPr rtlCol="0" anchor="ctr"/>
+          <a:lstStyle/>
+          <a:p>
+            <a:pPr algn="ctr"/>
+          </a:p>
+        </p:txBody>
+      </p:sp>
+      <p:sp>
+        <p:nvSpPr>
+          <p:cNvPr id="33" name="Rectangle 32"/>
+          <p:cNvSpPr/>
+          <p:nvPr/>
+        </p:nvSpPr>
+        <p:spPr>
+          <a:xfrm>
+            <a:off x="6233007" y="1920240"/>
+            <a:ext cx="54864" cy="1481328"/>
+          </a:xfrm>
+          <a:prstGeom prst="rect">
+            <a:avLst/>
+          </a:prstGeom>
+          <a:solidFill>
+            <a:srgbClr val="E0402F"/>
+          </a:solidFill>
+          <a:ln>
+            <a:noFill/>
+          </a:ln>
+          <a:effectLst/>
+        </p:spPr>
+        <p:style>
+          <a:lnRef idx="1">
+            <a:schemeClr val="accent1"/>
+          </a:lnRef>
+          <a:fillRef idx="3">
+            <a:schemeClr val="accent1"/>
+          </a:fillRef>
+          <a:effectRef idx="2">
+            <a:schemeClr val="accent1"/>
+          </a:effectRef>
+          <a:fontRef idx="minor">
+            <a:schemeClr val="lt1"/>
+          </a:fontRef>
+        </p:style>
+        <p:txBody>
+          <a:bodyPr rtlCol="0" anchor="ctr"/>
+          <a:lstStyle/>
+          <a:p>
+            <a:pPr algn="ctr"/>
+          </a:p>
+        </p:txBody>
+      </p:sp>
+      <p:sp>
+        <p:nvSpPr>
+          <p:cNvPr id="34" name="Rounded Rectangle 33"/>
+          <p:cNvSpPr/>
+          <p:nvPr/>
+        </p:nvSpPr>
+        <p:spPr>
+          <a:xfrm>
+            <a:off x="6397599" y="2048256"/>
+            <a:ext cx="1234440" cy="219456"/>
+          </a:xfrm>
+          <a:prstGeom prst="roundRect">
+            <a:avLst>
+              <a:gd name="adj" fmla="val 50000"/>
+            </a:avLst>
+          </a:prstGeom>
+          <a:solidFill>
+            <a:srgbClr val="FBE3E0"/>
+          </a:solidFill>
+          <a:ln w="9525">
+            <a:solidFill>
+              <a:srgbClr val="E0402F"/>
+            </a:solidFill>
+          </a:ln>
+          <a:effectLst/>
+        </p:spPr>
+        <p:style>
+          <a:lnRef idx="1">
+            <a:schemeClr val="accent1"/>
+          </a:lnRef>
+          <a:fillRef idx="3">
+            <a:schemeClr val="accent1"/>
+          </a:fillRef>
+          <a:effectRef idx="2">
+            <a:schemeClr val="accent1"/>
+          </a:effectRef>
+          <a:fontRef idx="minor">
+            <a:schemeClr val="lt1"/>
+          </a:fontRef>
+        </p:style>
+        <p:txBody>
+          <a:bodyPr rtlCol="0" anchor="ctr"/>
+          <a:lstStyle/>
+          <a:p>
+            <a:pPr algn="ctr"/>
+          </a:p>
+        </p:txBody>
+      </p:sp>
+      <p:sp>
+        <p:nvSpPr>
+          <p:cNvPr id="35" name="TextBox 34"/>
+          <p:cNvSpPr txBox="1"/>
+          <p:nvPr/>
+        </p:nvSpPr>
+        <p:spPr>
+          <a:xfrm>
+            <a:off x="6397599" y="2042769"/>
+            <a:ext cx="1234440" cy="228600"/>
+          </a:xfrm>
+          <a:prstGeom prst="rect">
+            <a:avLst/>
+          </a:prstGeom>
+          <a:noFill/>
+        </p:spPr>
+        <p:txBody>
+          <a:bodyPr wrap="square" anchor="ctr" lIns="0" rIns="0" tIns="0" bIns="0">
+            <a:spAutoFit/>
+          </a:bodyPr>
+          <a:lstStyle/>
+          <a:p>
+            <a:pPr algn="ctr">
+              <a:spcBef>
+                <a:spcPts val="0"/>
+              </a:spcBef>
+              <a:spcAft>
+                <a:spcPts val="0"/>
+              </a:spcAft>
+            </a:pPr>
+            <a:r>
+              <a:rPr sz="800" b="1" i="0" spc="60">
+                <a:solidFill>
+                  <a:srgbClr val="E0402F"/>
+                </a:solidFill>
+                <a:latin typeface="Bahnschrift"/>
+              </a:rPr>
+              <a:t>EXIT</a:t>
+            </a:r>
+          </a:p>
+        </p:txBody>
+      </p:sp>
+      <p:sp>
+        <p:nvSpPr>
+          <p:cNvPr id="36" name="TextBox 35"/>
+          <p:cNvSpPr txBox="1"/>
+          <p:nvPr/>
+        </p:nvSpPr>
+        <p:spPr>
+          <a:xfrm>
+            <a:off x="7714335" y="2039112"/>
+            <a:ext cx="3517239" cy="237744"/>
+          </a:xfrm>
+          <a:prstGeom prst="rect">
+            <a:avLst/>
+          </a:prstGeom>
+          <a:noFill/>
+        </p:spPr>
+        <p:txBody>
+          <a:bodyPr wrap="square" anchor="t" lIns="0" rIns="0" tIns="0" bIns="0">
+            <a:spAutoFit/>
+          </a:bodyPr>
+          <a:lstStyle/>
+          <a:p>
+            <a:pPr algn="l">
+              <a:spcBef>
+                <a:spcPts val="0"/>
+              </a:spcBef>
+              <a:spcAft>
+                <a:spcPts val="0"/>
+              </a:spcAft>
+            </a:pPr>
+            <a:r>
+              <a:rPr sz="1100" b="1" i="0">
+                <a:solidFill>
+                  <a:srgbClr val="16233B"/>
+                </a:solidFill>
+                <a:latin typeface="Bahnschrift"/>
+              </a:rPr>
+              <a:t>PGIM India Small Cap</a:t>
+            </a:r>
+          </a:p>
+        </p:txBody>
+      </p:sp>
+      <p:sp>
+        <p:nvSpPr>
+          <p:cNvPr id="37" name="TextBox 36"/>
+          <p:cNvSpPr txBox="1"/>
+          <p:nvPr/>
+        </p:nvSpPr>
+        <p:spPr>
+          <a:xfrm>
+            <a:off x="6397599" y="2340864"/>
+            <a:ext cx="4843119" cy="182880"/>
+          </a:xfrm>
+          <a:prstGeom prst="rect">
+            <a:avLst/>
+          </a:prstGeom>
+          <a:noFill/>
+        </p:spPr>
+        <p:txBody>
+          <a:bodyPr wrap="square" anchor="t" lIns="0" rIns="0" tIns="0" bIns="0">
+            <a:spAutoFit/>
+          </a:bodyPr>
+          <a:lstStyle/>
+          <a:p>
+            <a:pPr algn="l">
+              <a:spcBef>
+                <a:spcPts val="0"/>
+              </a:spcBef>
+              <a:spcAft>
+                <a:spcPts val="0"/>
+              </a:spcAft>
+            </a:pPr>
+            <a:r>
+              <a:rPr sz="750" b="1" i="0" spc="30">
+                <a:solidFill>
+                  <a:srgbClr val="E0402F"/>
+                </a:solidFill>
+                <a:latin typeface="Bahnschrift"/>
+              </a:rPr>
+              <a:t>DEEP_DD  ·  NEG_ALPHA  ·  OVER_ALLOC</a:t>
+            </a:r>
+          </a:p>
+        </p:txBody>
+      </p:sp>
+      <p:sp>
+        <p:nvSpPr>
+          <p:cNvPr id="38" name="TextBox 37"/>
+          <p:cNvSpPr txBox="1"/>
+          <p:nvPr/>
+        </p:nvSpPr>
+        <p:spPr>
+          <a:xfrm>
+            <a:off x="6397599" y="2542032"/>
+            <a:ext cx="4806543" cy="658368"/>
+          </a:xfrm>
+          <a:prstGeom prst="rect">
+            <a:avLst/>
+          </a:prstGeom>
+          <a:noFill/>
+        </p:spPr>
+        <p:txBody>
+          <a:bodyPr wrap="square" anchor="t" lIns="0" rIns="0" tIns="0" bIns="0">
+            <a:spAutoFit/>
+          </a:bodyPr>
+          <a:lstStyle/>
+          <a:p>
+            <a:pPr algn="l">
+              <a:lnSpc>
+                <a:spcPct val="104000"/>
+              </a:lnSpc>
+              <a:spcBef>
+                <a:spcPts val="0"/>
+              </a:spcBef>
+              <a:spcAft>
+                <a:spcPts val="0"/>
+              </a:spcAft>
+            </a:pPr>
+            <a:r>
+              <a:rPr sz="950" b="0" i="0">
+                <a:solidFill>
+                  <a:srgbClr val="16233B"/>
+                </a:solidFill>
+                <a:latin typeface="Georgia"/>
+              </a:rPr>
+              <a:t>Sub-scale ~3L beside a larger small-cap fund; persistent underperformance and duplication, structural exit.</a:t>
+            </a:r>
+          </a:p>
+        </p:txBody>
+      </p:sp>
+      <p:sp>
+        <p:nvSpPr>
+          <p:cNvPr id="39" name="TextBox 38"/>
+          <p:cNvSpPr txBox="1"/>
+          <p:nvPr/>
+        </p:nvSpPr>
+        <p:spPr>
+          <a:xfrm>
+            <a:off x="6397599" y="3182112"/>
+            <a:ext cx="4806543" cy="182880"/>
+          </a:xfrm>
+          <a:prstGeom prst="rect">
+            <a:avLst/>
+          </a:prstGeom>
+          <a:noFill/>
+        </p:spPr>
+        <p:txBody>
+          <a:bodyPr wrap="square" anchor="t" lIns="0" rIns="0" tIns="0" bIns="0">
+            <a:spAutoFit/>
+          </a:bodyPr>
+          <a:lstStyle/>
+          <a:p>
+            <a:pPr algn="l">
+              <a:spcBef>
+                <a:spcPts val="0"/>
+              </a:spcBef>
+              <a:spcAft>
+                <a:spcPts val="0"/>
+              </a:spcAft>
+            </a:pPr>
+            <a:r>
+              <a:rPr sz="850" b="0" i="1">
+                <a:solidFill>
+                  <a:srgbClr val="6B7280"/>
+                </a:solidFill>
+                <a:latin typeface="Georgia"/>
+              </a:rPr>
+              <a:t>Measured against </a:t>
+            </a:r>
+            <a:r>
+              <a:rPr sz="850" b="0" i="1">
+                <a:solidFill>
+                  <a:srgbClr val="1B27A3"/>
+                </a:solidFill>
+                <a:latin typeface="Georgia"/>
+              </a:rPr>
+              <a:t>the primary small-cap sleeve already held</a:t>
+            </a:r>
+          </a:p>
+        </p:txBody>
+      </p:sp>
+      <p:sp>
+        <p:nvSpPr>
+          <p:cNvPr id="40" name="Rounded Rectangle 39"/>
+          <p:cNvSpPr/>
+          <p:nvPr/>
+        </p:nvSpPr>
+        <p:spPr>
+          <a:xfrm>
+            <a:off x="6233007" y="3511296"/>
+            <a:ext cx="5117439" cy="1481328"/>
           </a:xfrm>
           <a:prstGeom prst="roundRect">
             <a:avLst>
@@ -14581,14 +14943,14 @@
       </p:sp>
       <p:sp>
         <p:nvSpPr>
-          <p:cNvPr id="33" name="Rectangle 32"/>
+          <p:cNvPr id="41" name="Rectangle 40"/>
           <p:cNvSpPr/>
           <p:nvPr/>
         </p:nvSpPr>
         <p:spPr>
           <a:xfrm>
-            <a:off x="841248" y="4541520"/>
-            <a:ext cx="54864" cy="1200912"/>
+            <a:off x="6233007" y="3511296"/>
+            <a:ext cx="54864" cy="1481328"/>
           </a:xfrm>
           <a:prstGeom prst="rect">
             <a:avLst/>
@@ -14625,13 +14987,13 @@
       </p:sp>
       <p:sp>
         <p:nvSpPr>
-          <p:cNvPr id="34" name="Rounded Rectangle 33"/>
+          <p:cNvPr id="42" name="Rounded Rectangle 41"/>
           <p:cNvSpPr/>
           <p:nvPr/>
         </p:nvSpPr>
         <p:spPr>
           <a:xfrm>
-            <a:off x="1005840" y="4669536"/>
+            <a:off x="6397599" y="3639312"/>
             <a:ext cx="1234440" cy="219456"/>
           </a:xfrm>
           <a:prstGeom prst="roundRect">
@@ -14673,13 +15035,13 @@
       </p:sp>
       <p:sp>
         <p:nvSpPr>
-          <p:cNvPr id="35" name="TextBox 34"/>
-          <p:cNvSpPr txBox="1"/>
-          <p:nvPr/>
-        </p:nvSpPr>
-        <p:spPr>
-          <a:xfrm>
-            <a:off x="1005840" y="4664049"/>
+          <p:cNvPr id="43" name="TextBox 42"/>
+          <p:cNvSpPr txBox="1"/>
+          <p:nvPr/>
+        </p:nvSpPr>
+        <p:spPr>
+          <a:xfrm>
+            <a:off x="6397599" y="3633825"/>
             <a:ext cx="1234440" cy="228600"/>
           </a:xfrm>
           <a:prstGeom prst="rect">
@@ -14708,20 +15070,20 @@
                 </a:solidFill>
                 <a:latin typeface="Bahnschrift"/>
               </a:rPr>
-              <a:t>SWITCH</a:t>
-            </a:r>
-          </a:p>
-        </p:txBody>
-      </p:sp>
-      <p:sp>
-        <p:nvSpPr>
-          <p:cNvPr id="36" name="TextBox 35"/>
-          <p:cNvSpPr txBox="1"/>
-          <p:nvPr/>
-        </p:nvSpPr>
-        <p:spPr>
-          <a:xfrm>
-            <a:off x="2322576" y="4660392"/>
+              <a:t>TRIM</a:t>
+            </a:r>
+          </a:p>
+        </p:txBody>
+      </p:sp>
+      <p:sp>
+        <p:nvSpPr>
+          <p:cNvPr id="44" name="TextBox 43"/>
+          <p:cNvSpPr txBox="1"/>
+          <p:nvPr/>
+        </p:nvSpPr>
+        <p:spPr>
+          <a:xfrm>
+            <a:off x="7714335" y="3630168"/>
             <a:ext cx="3517239" cy="237744"/>
           </a:xfrm>
           <a:prstGeom prst="rect">
@@ -14750,20 +15112,20 @@
                 </a:solidFill>
                 <a:latin typeface="Bahnschrift"/>
               </a:rPr>
-              <a:t>LIC MF Multi Cap</a:t>
-            </a:r>
-          </a:p>
-        </p:txBody>
-      </p:sp>
-      <p:sp>
-        <p:nvSpPr>
-          <p:cNvPr id="37" name="TextBox 36"/>
-          <p:cNvSpPr txBox="1"/>
-          <p:nvPr/>
-        </p:nvSpPr>
-        <p:spPr>
-          <a:xfrm>
-            <a:off x="1005840" y="4962144"/>
+              <a:t>LIC MF Balanced Advantage</a:t>
+            </a:r>
+          </a:p>
+        </p:txBody>
+      </p:sp>
+      <p:sp>
+        <p:nvSpPr>
+          <p:cNvPr id="45" name="TextBox 44"/>
+          <p:cNvSpPr txBox="1"/>
+          <p:nvPr/>
+        </p:nvSpPr>
+        <p:spPr>
+          <a:xfrm>
+            <a:off x="6397599" y="3931920"/>
             <a:ext cx="4843119" cy="182880"/>
           </a:xfrm>
           <a:prstGeom prst="rect">
@@ -14792,21 +15154,21 @@
                 </a:solidFill>
                 <a:latin typeface="Bahnschrift"/>
               </a:rPr>
-              <a:t>MANDATE_RIGIDITY</a:t>
-            </a:r>
-          </a:p>
-        </p:txBody>
-      </p:sp>
-      <p:sp>
-        <p:nvSpPr>
-          <p:cNvPr id="38" name="TextBox 37"/>
-          <p:cNvSpPr txBox="1"/>
-          <p:nvPr/>
-        </p:nvSpPr>
-        <p:spPr>
-          <a:xfrm>
-            <a:off x="1005840" y="5163312"/>
-            <a:ext cx="4806543" cy="377952"/>
+              <a:t>SUB_SCALE  ·  SHORT_RECORD  ·  REG_PLAN_DRAG</a:t>
+            </a:r>
+          </a:p>
+        </p:txBody>
+      </p:sp>
+      <p:sp>
+        <p:nvSpPr>
+          <p:cNvPr id="46" name="TextBox 45"/>
+          <p:cNvSpPr txBox="1"/>
+          <p:nvPr/>
+        </p:nvSpPr>
+        <p:spPr>
+          <a:xfrm>
+            <a:off x="6397599" y="4133088"/>
+            <a:ext cx="4806543" cy="658368"/>
           </a:xfrm>
           <a:prstGeom prst="rect">
             <a:avLst/>
@@ -14837,20 +15199,20 @@
                 </a:solidFill>
                 <a:latin typeface="Georgia"/>
               </a:rPr>
-              <a:t>Multi-cap's SEBI 25/25/25 floor forces small/mid we prefer to size ourselves, structural, not performance.</a:t>
-            </a:r>
-          </a:p>
-        </p:txBody>
-      </p:sp>
-      <p:sp>
-        <p:nvSpPr>
-          <p:cNvPr id="39" name="TextBox 38"/>
-          <p:cNvSpPr txBox="1"/>
-          <p:nvPr/>
-        </p:nvSpPr>
-        <p:spPr>
-          <a:xfrm>
-            <a:off x="1005840" y="5522976"/>
+              <a:t>Under four years of record, sub-scale, Regular plan; we fold the sleeve into the proven hybrid held.</a:t>
+            </a:r>
+          </a:p>
+        </p:txBody>
+      </p:sp>
+      <p:sp>
+        <p:nvSpPr>
+          <p:cNvPr id="47" name="TextBox 46"/>
+          <p:cNvSpPr txBox="1"/>
+          <p:nvPr/>
+        </p:nvSpPr>
+        <p:spPr>
+          <a:xfrm>
+            <a:off x="6397599" y="4773168"/>
             <a:ext cx="4806543" cy="182880"/>
           </a:xfrm>
           <a:prstGeom prst="rect">
@@ -14888,1092 +15250,6 @@
                 </a:solidFill>
                 <a:latin typeface="Georgia"/>
               </a:rPr>
-              <a:t>a Flexi-Cap (manager-flexible cap mix)</a:t>
-            </a:r>
-          </a:p>
-        </p:txBody>
-      </p:sp>
-      <p:sp>
-        <p:nvSpPr>
-          <p:cNvPr id="40" name="Rounded Rectangle 39"/>
-          <p:cNvSpPr/>
-          <p:nvPr/>
-        </p:nvSpPr>
-        <p:spPr>
-          <a:xfrm>
-            <a:off x="6233007" y="1920240"/>
-            <a:ext cx="5117439" cy="1200912"/>
-          </a:xfrm>
-          <a:prstGeom prst="roundRect">
-            <a:avLst>
-              <a:gd name="adj" fmla="val 5000"/>
-            </a:avLst>
-          </a:prstGeom>
-          <a:solidFill>
-            <a:srgbClr val="F5F6FC"/>
-          </a:solidFill>
-          <a:ln w="12700">
-            <a:solidFill>
-              <a:srgbClr val="92400E"/>
-            </a:solidFill>
-          </a:ln>
-          <a:effectLst/>
-        </p:spPr>
-        <p:style>
-          <a:lnRef idx="1">
-            <a:schemeClr val="accent1"/>
-          </a:lnRef>
-          <a:fillRef idx="3">
-            <a:schemeClr val="accent1"/>
-          </a:fillRef>
-          <a:effectRef idx="2">
-            <a:schemeClr val="accent1"/>
-          </a:effectRef>
-          <a:fontRef idx="minor">
-            <a:schemeClr val="lt1"/>
-          </a:fontRef>
-        </p:style>
-        <p:txBody>
-          <a:bodyPr rtlCol="0" anchor="ctr"/>
-          <a:lstStyle/>
-          <a:p>
-            <a:pPr algn="ctr"/>
-          </a:p>
-        </p:txBody>
-      </p:sp>
-      <p:sp>
-        <p:nvSpPr>
-          <p:cNvPr id="41" name="Rectangle 40"/>
-          <p:cNvSpPr/>
-          <p:nvPr/>
-        </p:nvSpPr>
-        <p:spPr>
-          <a:xfrm>
-            <a:off x="6233007" y="1920240"/>
-            <a:ext cx="54864" cy="1200912"/>
-          </a:xfrm>
-          <a:prstGeom prst="rect">
-            <a:avLst/>
-          </a:prstGeom>
-          <a:solidFill>
-            <a:srgbClr val="92400E"/>
-          </a:solidFill>
-          <a:ln>
-            <a:noFill/>
-          </a:ln>
-          <a:effectLst/>
-        </p:spPr>
-        <p:style>
-          <a:lnRef idx="1">
-            <a:schemeClr val="accent1"/>
-          </a:lnRef>
-          <a:fillRef idx="3">
-            <a:schemeClr val="accent1"/>
-          </a:fillRef>
-          <a:effectRef idx="2">
-            <a:schemeClr val="accent1"/>
-          </a:effectRef>
-          <a:fontRef idx="minor">
-            <a:schemeClr val="lt1"/>
-          </a:fontRef>
-        </p:style>
-        <p:txBody>
-          <a:bodyPr rtlCol="0" anchor="ctr"/>
-          <a:lstStyle/>
-          <a:p>
-            <a:pPr algn="ctr"/>
-          </a:p>
-        </p:txBody>
-      </p:sp>
-      <p:sp>
-        <p:nvSpPr>
-          <p:cNvPr id="42" name="Rounded Rectangle 41"/>
-          <p:cNvSpPr/>
-          <p:nvPr/>
-        </p:nvSpPr>
-        <p:spPr>
-          <a:xfrm>
-            <a:off x="6397599" y="2048256"/>
-            <a:ext cx="1234440" cy="219456"/>
-          </a:xfrm>
-          <a:prstGeom prst="roundRect">
-            <a:avLst>
-              <a:gd name="adj" fmla="val 50000"/>
-            </a:avLst>
-          </a:prstGeom>
-          <a:solidFill>
-            <a:srgbClr val="FBEFDC"/>
-          </a:solidFill>
-          <a:ln w="9525">
-            <a:solidFill>
-              <a:srgbClr val="92400E"/>
-            </a:solidFill>
-          </a:ln>
-          <a:effectLst/>
-        </p:spPr>
-        <p:style>
-          <a:lnRef idx="1">
-            <a:schemeClr val="accent1"/>
-          </a:lnRef>
-          <a:fillRef idx="3">
-            <a:schemeClr val="accent1"/>
-          </a:fillRef>
-          <a:effectRef idx="2">
-            <a:schemeClr val="accent1"/>
-          </a:effectRef>
-          <a:fontRef idx="minor">
-            <a:schemeClr val="lt1"/>
-          </a:fontRef>
-        </p:style>
-        <p:txBody>
-          <a:bodyPr rtlCol="0" anchor="ctr"/>
-          <a:lstStyle/>
-          <a:p>
-            <a:pPr algn="ctr"/>
-          </a:p>
-        </p:txBody>
-      </p:sp>
-      <p:sp>
-        <p:nvSpPr>
-          <p:cNvPr id="43" name="TextBox 42"/>
-          <p:cNvSpPr txBox="1"/>
-          <p:nvPr/>
-        </p:nvSpPr>
-        <p:spPr>
-          <a:xfrm>
-            <a:off x="6397599" y="2042769"/>
-            <a:ext cx="1234440" cy="228600"/>
-          </a:xfrm>
-          <a:prstGeom prst="rect">
-            <a:avLst/>
-          </a:prstGeom>
-          <a:noFill/>
-        </p:spPr>
-        <p:txBody>
-          <a:bodyPr wrap="square" anchor="ctr" lIns="0" rIns="0" tIns="0" bIns="0">
-            <a:spAutoFit/>
-          </a:bodyPr>
-          <a:lstStyle/>
-          <a:p>
-            <a:pPr algn="ctr">
-              <a:spcBef>
-                <a:spcPts val="0"/>
-              </a:spcBef>
-              <a:spcAft>
-                <a:spcPts val="0"/>
-              </a:spcAft>
-            </a:pPr>
-            <a:r>
-              <a:rPr sz="800" b="1" i="0" spc="60">
-                <a:solidFill>
-                  <a:srgbClr val="92400E"/>
-                </a:solidFill>
-                <a:latin typeface="Bahnschrift"/>
-              </a:rPr>
-              <a:t>REDEEM TO DIRECT</a:t>
-            </a:r>
-          </a:p>
-        </p:txBody>
-      </p:sp>
-      <p:sp>
-        <p:nvSpPr>
-          <p:cNvPr id="44" name="TextBox 43"/>
-          <p:cNvSpPr txBox="1"/>
-          <p:nvPr/>
-        </p:nvSpPr>
-        <p:spPr>
-          <a:xfrm>
-            <a:off x="7714335" y="2039112"/>
-            <a:ext cx="3517239" cy="237744"/>
-          </a:xfrm>
-          <a:prstGeom prst="rect">
-            <a:avLst/>
-          </a:prstGeom>
-          <a:noFill/>
-        </p:spPr>
-        <p:txBody>
-          <a:bodyPr wrap="square" anchor="t" lIns="0" rIns="0" tIns="0" bIns="0">
-            <a:spAutoFit/>
-          </a:bodyPr>
-          <a:lstStyle/>
-          <a:p>
-            <a:pPr algn="l">
-              <a:spcBef>
-                <a:spcPts val="0"/>
-              </a:spcBef>
-              <a:spcAft>
-                <a:spcPts val="0"/>
-              </a:spcAft>
-            </a:pPr>
-            <a:r>
-              <a:rPr sz="1100" b="1" i="0">
-                <a:solidFill>
-                  <a:srgbClr val="16233B"/>
-                </a:solidFill>
-                <a:latin typeface="Bahnschrift"/>
-              </a:rPr>
-              <a:t>ICICI Pru Multi-Asset (Reg)</a:t>
-            </a:r>
-          </a:p>
-        </p:txBody>
-      </p:sp>
-      <p:sp>
-        <p:nvSpPr>
-          <p:cNvPr id="45" name="TextBox 44"/>
-          <p:cNvSpPr txBox="1"/>
-          <p:nvPr/>
-        </p:nvSpPr>
-        <p:spPr>
-          <a:xfrm>
-            <a:off x="6397599" y="2340864"/>
-            <a:ext cx="4843119" cy="182880"/>
-          </a:xfrm>
-          <a:prstGeom prst="rect">
-            <a:avLst/>
-          </a:prstGeom>
-          <a:noFill/>
-        </p:spPr>
-        <p:txBody>
-          <a:bodyPr wrap="square" anchor="t" lIns="0" rIns="0" tIns="0" bIns="0">
-            <a:spAutoFit/>
-          </a:bodyPr>
-          <a:lstStyle/>
-          <a:p>
-            <a:pPr algn="l">
-              <a:spcBef>
-                <a:spcPts val="0"/>
-              </a:spcBef>
-              <a:spcAft>
-                <a:spcPts val="0"/>
-              </a:spcAft>
-            </a:pPr>
-            <a:r>
-              <a:rPr sz="750" b="1" i="0" spc="30">
-                <a:solidFill>
-                  <a:srgbClr val="92400E"/>
-                </a:solidFill>
-                <a:latin typeface="Bahnschrift"/>
-              </a:rPr>
-              <a:t>REG_PLAN_DRAG  ·  HELD ~6Y, COSTLIER TO SWITCH</a:t>
-            </a:r>
-          </a:p>
-        </p:txBody>
-      </p:sp>
-      <p:sp>
-        <p:nvSpPr>
-          <p:cNvPr id="46" name="TextBox 45"/>
-          <p:cNvSpPr txBox="1"/>
-          <p:nvPr/>
-        </p:nvSpPr>
-        <p:spPr>
-          <a:xfrm>
-            <a:off x="6397599" y="2542032"/>
-            <a:ext cx="4806543" cy="377952"/>
-          </a:xfrm>
-          <a:prstGeom prst="rect">
-            <a:avLst/>
-          </a:prstGeom>
-          <a:noFill/>
-        </p:spPr>
-        <p:txBody>
-          <a:bodyPr wrap="square" anchor="t" lIns="0" rIns="0" tIns="0" bIns="0">
-            <a:spAutoFit/>
-          </a:bodyPr>
-          <a:lstStyle/>
-          <a:p>
-            <a:pPr algn="l">
-              <a:lnSpc>
-                <a:spcPct val="104000"/>
-              </a:lnSpc>
-              <a:spcBef>
-                <a:spcPts val="0"/>
-              </a:spcBef>
-              <a:spcAft>
-                <a:spcPts val="0"/>
-              </a:spcAft>
-            </a:pPr>
-            <a:r>
-              <a:rPr sz="950" b="0" i="0">
-                <a:solidFill>
-                  <a:srgbClr val="16233B"/>
-                </a:solidFill>
-                <a:latin typeface="Georgia"/>
-              </a:rPr>
-              <a:t>The identical fund is available Direct; the Regular-plan trail is pure avoidable cost.</a:t>
-            </a:r>
-          </a:p>
-        </p:txBody>
-      </p:sp>
-      <p:sp>
-        <p:nvSpPr>
-          <p:cNvPr id="47" name="TextBox 46"/>
-          <p:cNvSpPr txBox="1"/>
-          <p:nvPr/>
-        </p:nvSpPr>
-        <p:spPr>
-          <a:xfrm>
-            <a:off x="6397599" y="2901696"/>
-            <a:ext cx="4806543" cy="182880"/>
-          </a:xfrm>
-          <a:prstGeom prst="rect">
-            <a:avLst/>
-          </a:prstGeom>
-          <a:noFill/>
-        </p:spPr>
-        <p:txBody>
-          <a:bodyPr wrap="square" anchor="t" lIns="0" rIns="0" tIns="0" bIns="0">
-            <a:spAutoFit/>
-          </a:bodyPr>
-          <a:lstStyle/>
-          <a:p>
-            <a:pPr algn="l">
-              <a:spcBef>
-                <a:spcPts val="0"/>
-              </a:spcBef>
-              <a:spcAft>
-                <a:spcPts val="0"/>
-              </a:spcAft>
-            </a:pPr>
-            <a:r>
-              <a:rPr sz="850" b="0" i="1">
-                <a:solidFill>
-                  <a:srgbClr val="6B7280"/>
-                </a:solidFill>
-                <a:latin typeface="Georgia"/>
-              </a:rPr>
-              <a:t>Measured against </a:t>
-            </a:r>
-            <a:r>
-              <a:rPr sz="850" b="0" i="1">
-                <a:solidFill>
-                  <a:srgbClr val="1B27A3"/>
-                </a:solidFill>
-                <a:latin typeface="Georgia"/>
-              </a:rPr>
-              <a:t>the same fund's Direct plan</a:t>
-            </a:r>
-          </a:p>
-        </p:txBody>
-      </p:sp>
-      <p:sp>
-        <p:nvSpPr>
-          <p:cNvPr id="48" name="Rounded Rectangle 47"/>
-          <p:cNvSpPr/>
-          <p:nvPr/>
-        </p:nvSpPr>
-        <p:spPr>
-          <a:xfrm>
-            <a:off x="6233007" y="3230880"/>
-            <a:ext cx="5117439" cy="1200912"/>
-          </a:xfrm>
-          <a:prstGeom prst="roundRect">
-            <a:avLst>
-              <a:gd name="adj" fmla="val 5000"/>
-            </a:avLst>
-          </a:prstGeom>
-          <a:solidFill>
-            <a:srgbClr val="F5F6FC"/>
-          </a:solidFill>
-          <a:ln w="12700">
-            <a:solidFill>
-              <a:srgbClr val="E0402F"/>
-            </a:solidFill>
-          </a:ln>
-          <a:effectLst/>
-        </p:spPr>
-        <p:style>
-          <a:lnRef idx="1">
-            <a:schemeClr val="accent1"/>
-          </a:lnRef>
-          <a:fillRef idx="3">
-            <a:schemeClr val="accent1"/>
-          </a:fillRef>
-          <a:effectRef idx="2">
-            <a:schemeClr val="accent1"/>
-          </a:effectRef>
-          <a:fontRef idx="minor">
-            <a:schemeClr val="lt1"/>
-          </a:fontRef>
-        </p:style>
-        <p:txBody>
-          <a:bodyPr rtlCol="0" anchor="ctr"/>
-          <a:lstStyle/>
-          <a:p>
-            <a:pPr algn="ctr"/>
-          </a:p>
-        </p:txBody>
-      </p:sp>
-      <p:sp>
-        <p:nvSpPr>
-          <p:cNvPr id="49" name="Rectangle 48"/>
-          <p:cNvSpPr/>
-          <p:nvPr/>
-        </p:nvSpPr>
-        <p:spPr>
-          <a:xfrm>
-            <a:off x="6233007" y="3230880"/>
-            <a:ext cx="54864" cy="1200912"/>
-          </a:xfrm>
-          <a:prstGeom prst="rect">
-            <a:avLst/>
-          </a:prstGeom>
-          <a:solidFill>
-            <a:srgbClr val="E0402F"/>
-          </a:solidFill>
-          <a:ln>
-            <a:noFill/>
-          </a:ln>
-          <a:effectLst/>
-        </p:spPr>
-        <p:style>
-          <a:lnRef idx="1">
-            <a:schemeClr val="accent1"/>
-          </a:lnRef>
-          <a:fillRef idx="3">
-            <a:schemeClr val="accent1"/>
-          </a:fillRef>
-          <a:effectRef idx="2">
-            <a:schemeClr val="accent1"/>
-          </a:effectRef>
-          <a:fontRef idx="minor">
-            <a:schemeClr val="lt1"/>
-          </a:fontRef>
-        </p:style>
-        <p:txBody>
-          <a:bodyPr rtlCol="0" anchor="ctr"/>
-          <a:lstStyle/>
-          <a:p>
-            <a:pPr algn="ctr"/>
-          </a:p>
-        </p:txBody>
-      </p:sp>
-      <p:sp>
-        <p:nvSpPr>
-          <p:cNvPr id="50" name="Rounded Rectangle 49"/>
-          <p:cNvSpPr/>
-          <p:nvPr/>
-        </p:nvSpPr>
-        <p:spPr>
-          <a:xfrm>
-            <a:off x="6397599" y="3358896"/>
-            <a:ext cx="1234440" cy="219456"/>
-          </a:xfrm>
-          <a:prstGeom prst="roundRect">
-            <a:avLst>
-              <a:gd name="adj" fmla="val 50000"/>
-            </a:avLst>
-          </a:prstGeom>
-          <a:solidFill>
-            <a:srgbClr val="FBE3E0"/>
-          </a:solidFill>
-          <a:ln w="9525">
-            <a:solidFill>
-              <a:srgbClr val="E0402F"/>
-            </a:solidFill>
-          </a:ln>
-          <a:effectLst/>
-        </p:spPr>
-        <p:style>
-          <a:lnRef idx="1">
-            <a:schemeClr val="accent1"/>
-          </a:lnRef>
-          <a:fillRef idx="3">
-            <a:schemeClr val="accent1"/>
-          </a:fillRef>
-          <a:effectRef idx="2">
-            <a:schemeClr val="accent1"/>
-          </a:effectRef>
-          <a:fontRef idx="minor">
-            <a:schemeClr val="lt1"/>
-          </a:fontRef>
-        </p:style>
-        <p:txBody>
-          <a:bodyPr rtlCol="0" anchor="ctr"/>
-          <a:lstStyle/>
-          <a:p>
-            <a:pPr algn="ctr"/>
-          </a:p>
-        </p:txBody>
-      </p:sp>
-      <p:sp>
-        <p:nvSpPr>
-          <p:cNvPr id="51" name="TextBox 50"/>
-          <p:cNvSpPr txBox="1"/>
-          <p:nvPr/>
-        </p:nvSpPr>
-        <p:spPr>
-          <a:xfrm>
-            <a:off x="6397599" y="3353409"/>
-            <a:ext cx="1234440" cy="228600"/>
-          </a:xfrm>
-          <a:prstGeom prst="rect">
-            <a:avLst/>
-          </a:prstGeom>
-          <a:noFill/>
-        </p:spPr>
-        <p:txBody>
-          <a:bodyPr wrap="square" anchor="ctr" lIns="0" rIns="0" tIns="0" bIns="0">
-            <a:spAutoFit/>
-          </a:bodyPr>
-          <a:lstStyle/>
-          <a:p>
-            <a:pPr algn="ctr">
-              <a:spcBef>
-                <a:spcPts val="0"/>
-              </a:spcBef>
-              <a:spcAft>
-                <a:spcPts val="0"/>
-              </a:spcAft>
-            </a:pPr>
-            <a:r>
-              <a:rPr sz="800" b="1" i="0" spc="60">
-                <a:solidFill>
-                  <a:srgbClr val="E0402F"/>
-                </a:solidFill>
-                <a:latin typeface="Bahnschrift"/>
-              </a:rPr>
-              <a:t>EXIT</a:t>
-            </a:r>
-          </a:p>
-        </p:txBody>
-      </p:sp>
-      <p:sp>
-        <p:nvSpPr>
-          <p:cNvPr id="52" name="TextBox 51"/>
-          <p:cNvSpPr txBox="1"/>
-          <p:nvPr/>
-        </p:nvSpPr>
-        <p:spPr>
-          <a:xfrm>
-            <a:off x="7714335" y="3349752"/>
-            <a:ext cx="3517239" cy="237744"/>
-          </a:xfrm>
-          <a:prstGeom prst="rect">
-            <a:avLst/>
-          </a:prstGeom>
-          <a:noFill/>
-        </p:spPr>
-        <p:txBody>
-          <a:bodyPr wrap="square" anchor="t" lIns="0" rIns="0" tIns="0" bIns="0">
-            <a:spAutoFit/>
-          </a:bodyPr>
-          <a:lstStyle/>
-          <a:p>
-            <a:pPr algn="l">
-              <a:spcBef>
-                <a:spcPts val="0"/>
-              </a:spcBef>
-              <a:spcAft>
-                <a:spcPts val="0"/>
-              </a:spcAft>
-            </a:pPr>
-            <a:r>
-              <a:rPr sz="1100" b="1" i="0">
-                <a:solidFill>
-                  <a:srgbClr val="16233B"/>
-                </a:solidFill>
-                <a:latin typeface="Bahnschrift"/>
-              </a:rPr>
-              <a:t>PGIM India Small Cap</a:t>
-            </a:r>
-          </a:p>
-        </p:txBody>
-      </p:sp>
-      <p:sp>
-        <p:nvSpPr>
-          <p:cNvPr id="53" name="TextBox 52"/>
-          <p:cNvSpPr txBox="1"/>
-          <p:nvPr/>
-        </p:nvSpPr>
-        <p:spPr>
-          <a:xfrm>
-            <a:off x="6397599" y="3651504"/>
-            <a:ext cx="4843119" cy="182880"/>
-          </a:xfrm>
-          <a:prstGeom prst="rect">
-            <a:avLst/>
-          </a:prstGeom>
-          <a:noFill/>
-        </p:spPr>
-        <p:txBody>
-          <a:bodyPr wrap="square" anchor="t" lIns="0" rIns="0" tIns="0" bIns="0">
-            <a:spAutoFit/>
-          </a:bodyPr>
-          <a:lstStyle/>
-          <a:p>
-            <a:pPr algn="l">
-              <a:spcBef>
-                <a:spcPts val="0"/>
-              </a:spcBef>
-              <a:spcAft>
-                <a:spcPts val="0"/>
-              </a:spcAft>
-            </a:pPr>
-            <a:r>
-              <a:rPr sz="750" b="1" i="0" spc="30">
-                <a:solidFill>
-                  <a:srgbClr val="E0402F"/>
-                </a:solidFill>
-                <a:latin typeface="Bahnschrift"/>
-              </a:rPr>
-              <a:t>DEEP_DD  ·  NEG_ALPHA  ·  OVER_ALLOC</a:t>
-            </a:r>
-          </a:p>
-        </p:txBody>
-      </p:sp>
-      <p:sp>
-        <p:nvSpPr>
-          <p:cNvPr id="54" name="TextBox 53"/>
-          <p:cNvSpPr txBox="1"/>
-          <p:nvPr/>
-        </p:nvSpPr>
-        <p:spPr>
-          <a:xfrm>
-            <a:off x="6397599" y="3852672"/>
-            <a:ext cx="4806543" cy="377952"/>
-          </a:xfrm>
-          <a:prstGeom prst="rect">
-            <a:avLst/>
-          </a:prstGeom>
-          <a:noFill/>
-        </p:spPr>
-        <p:txBody>
-          <a:bodyPr wrap="square" anchor="t" lIns="0" rIns="0" tIns="0" bIns="0">
-            <a:spAutoFit/>
-          </a:bodyPr>
-          <a:lstStyle/>
-          <a:p>
-            <a:pPr algn="l">
-              <a:lnSpc>
-                <a:spcPct val="104000"/>
-              </a:lnSpc>
-              <a:spcBef>
-                <a:spcPts val="0"/>
-              </a:spcBef>
-              <a:spcAft>
-                <a:spcPts val="0"/>
-              </a:spcAft>
-            </a:pPr>
-            <a:r>
-              <a:rPr sz="950" b="0" i="0">
-                <a:solidFill>
-                  <a:srgbClr val="16233B"/>
-                </a:solidFill>
-                <a:latin typeface="Georgia"/>
-              </a:rPr>
-              <a:t>Sub-scale ~3L beside a larger small-cap fund; persistent underperformance and duplication, structural exit.</a:t>
-            </a:r>
-          </a:p>
-        </p:txBody>
-      </p:sp>
-      <p:sp>
-        <p:nvSpPr>
-          <p:cNvPr id="55" name="TextBox 54"/>
-          <p:cNvSpPr txBox="1"/>
-          <p:nvPr/>
-        </p:nvSpPr>
-        <p:spPr>
-          <a:xfrm>
-            <a:off x="6397599" y="4212336"/>
-            <a:ext cx="4806543" cy="182880"/>
-          </a:xfrm>
-          <a:prstGeom prst="rect">
-            <a:avLst/>
-          </a:prstGeom>
-          <a:noFill/>
-        </p:spPr>
-        <p:txBody>
-          <a:bodyPr wrap="square" anchor="t" lIns="0" rIns="0" tIns="0" bIns="0">
-            <a:spAutoFit/>
-          </a:bodyPr>
-          <a:lstStyle/>
-          <a:p>
-            <a:pPr algn="l">
-              <a:spcBef>
-                <a:spcPts val="0"/>
-              </a:spcBef>
-              <a:spcAft>
-                <a:spcPts val="0"/>
-              </a:spcAft>
-            </a:pPr>
-            <a:r>
-              <a:rPr sz="850" b="0" i="1">
-                <a:solidFill>
-                  <a:srgbClr val="6B7280"/>
-                </a:solidFill>
-                <a:latin typeface="Georgia"/>
-              </a:rPr>
-              <a:t>Measured against </a:t>
-            </a:r>
-            <a:r>
-              <a:rPr sz="850" b="0" i="1">
-                <a:solidFill>
-                  <a:srgbClr val="1B27A3"/>
-                </a:solidFill>
-                <a:latin typeface="Georgia"/>
-              </a:rPr>
-              <a:t>the primary small-cap sleeve already held</a:t>
-            </a:r>
-          </a:p>
-        </p:txBody>
-      </p:sp>
-      <p:sp>
-        <p:nvSpPr>
-          <p:cNvPr id="56" name="Rounded Rectangle 55"/>
-          <p:cNvSpPr/>
-          <p:nvPr/>
-        </p:nvSpPr>
-        <p:spPr>
-          <a:xfrm>
-            <a:off x="6233007" y="4541520"/>
-            <a:ext cx="5117439" cy="1200912"/>
-          </a:xfrm>
-          <a:prstGeom prst="roundRect">
-            <a:avLst>
-              <a:gd name="adj" fmla="val 5000"/>
-            </a:avLst>
-          </a:prstGeom>
-          <a:solidFill>
-            <a:srgbClr val="F5F6FC"/>
-          </a:solidFill>
-          <a:ln w="12700">
-            <a:solidFill>
-              <a:srgbClr val="92400E"/>
-            </a:solidFill>
-          </a:ln>
-          <a:effectLst/>
-        </p:spPr>
-        <p:style>
-          <a:lnRef idx="1">
-            <a:schemeClr val="accent1"/>
-          </a:lnRef>
-          <a:fillRef idx="3">
-            <a:schemeClr val="accent1"/>
-          </a:fillRef>
-          <a:effectRef idx="2">
-            <a:schemeClr val="accent1"/>
-          </a:effectRef>
-          <a:fontRef idx="minor">
-            <a:schemeClr val="lt1"/>
-          </a:fontRef>
-        </p:style>
-        <p:txBody>
-          <a:bodyPr rtlCol="0" anchor="ctr"/>
-          <a:lstStyle/>
-          <a:p>
-            <a:pPr algn="ctr"/>
-          </a:p>
-        </p:txBody>
-      </p:sp>
-      <p:sp>
-        <p:nvSpPr>
-          <p:cNvPr id="57" name="Rectangle 56"/>
-          <p:cNvSpPr/>
-          <p:nvPr/>
-        </p:nvSpPr>
-        <p:spPr>
-          <a:xfrm>
-            <a:off x="6233007" y="4541520"/>
-            <a:ext cx="54864" cy="1200912"/>
-          </a:xfrm>
-          <a:prstGeom prst="rect">
-            <a:avLst/>
-          </a:prstGeom>
-          <a:solidFill>
-            <a:srgbClr val="92400E"/>
-          </a:solidFill>
-          <a:ln>
-            <a:noFill/>
-          </a:ln>
-          <a:effectLst/>
-        </p:spPr>
-        <p:style>
-          <a:lnRef idx="1">
-            <a:schemeClr val="accent1"/>
-          </a:lnRef>
-          <a:fillRef idx="3">
-            <a:schemeClr val="accent1"/>
-          </a:fillRef>
-          <a:effectRef idx="2">
-            <a:schemeClr val="accent1"/>
-          </a:effectRef>
-          <a:fontRef idx="minor">
-            <a:schemeClr val="lt1"/>
-          </a:fontRef>
-        </p:style>
-        <p:txBody>
-          <a:bodyPr rtlCol="0" anchor="ctr"/>
-          <a:lstStyle/>
-          <a:p>
-            <a:pPr algn="ctr"/>
-          </a:p>
-        </p:txBody>
-      </p:sp>
-      <p:sp>
-        <p:nvSpPr>
-          <p:cNvPr id="58" name="Rounded Rectangle 57"/>
-          <p:cNvSpPr/>
-          <p:nvPr/>
-        </p:nvSpPr>
-        <p:spPr>
-          <a:xfrm>
-            <a:off x="6397599" y="4669536"/>
-            <a:ext cx="1234440" cy="219456"/>
-          </a:xfrm>
-          <a:prstGeom prst="roundRect">
-            <a:avLst>
-              <a:gd name="adj" fmla="val 50000"/>
-            </a:avLst>
-          </a:prstGeom>
-          <a:solidFill>
-            <a:srgbClr val="FBEFDC"/>
-          </a:solidFill>
-          <a:ln w="9525">
-            <a:solidFill>
-              <a:srgbClr val="92400E"/>
-            </a:solidFill>
-          </a:ln>
-          <a:effectLst/>
-        </p:spPr>
-        <p:style>
-          <a:lnRef idx="1">
-            <a:schemeClr val="accent1"/>
-          </a:lnRef>
-          <a:fillRef idx="3">
-            <a:schemeClr val="accent1"/>
-          </a:fillRef>
-          <a:effectRef idx="2">
-            <a:schemeClr val="accent1"/>
-          </a:effectRef>
-          <a:fontRef idx="minor">
-            <a:schemeClr val="lt1"/>
-          </a:fontRef>
-        </p:style>
-        <p:txBody>
-          <a:bodyPr rtlCol="0" anchor="ctr"/>
-          <a:lstStyle/>
-          <a:p>
-            <a:pPr algn="ctr"/>
-          </a:p>
-        </p:txBody>
-      </p:sp>
-      <p:sp>
-        <p:nvSpPr>
-          <p:cNvPr id="59" name="TextBox 58"/>
-          <p:cNvSpPr txBox="1"/>
-          <p:nvPr/>
-        </p:nvSpPr>
-        <p:spPr>
-          <a:xfrm>
-            <a:off x="6397599" y="4664049"/>
-            <a:ext cx="1234440" cy="228600"/>
-          </a:xfrm>
-          <a:prstGeom prst="rect">
-            <a:avLst/>
-          </a:prstGeom>
-          <a:noFill/>
-        </p:spPr>
-        <p:txBody>
-          <a:bodyPr wrap="square" anchor="ctr" lIns="0" rIns="0" tIns="0" bIns="0">
-            <a:spAutoFit/>
-          </a:bodyPr>
-          <a:lstStyle/>
-          <a:p>
-            <a:pPr algn="ctr">
-              <a:spcBef>
-                <a:spcPts val="0"/>
-              </a:spcBef>
-              <a:spcAft>
-                <a:spcPts val="0"/>
-              </a:spcAft>
-            </a:pPr>
-            <a:r>
-              <a:rPr sz="800" b="1" i="0" spc="60">
-                <a:solidFill>
-                  <a:srgbClr val="92400E"/>
-                </a:solidFill>
-                <a:latin typeface="Bahnschrift"/>
-              </a:rPr>
-              <a:t>TRIM</a:t>
-            </a:r>
-          </a:p>
-        </p:txBody>
-      </p:sp>
-      <p:sp>
-        <p:nvSpPr>
-          <p:cNvPr id="60" name="TextBox 59"/>
-          <p:cNvSpPr txBox="1"/>
-          <p:nvPr/>
-        </p:nvSpPr>
-        <p:spPr>
-          <a:xfrm>
-            <a:off x="7714335" y="4660392"/>
-            <a:ext cx="3517239" cy="237744"/>
-          </a:xfrm>
-          <a:prstGeom prst="rect">
-            <a:avLst/>
-          </a:prstGeom>
-          <a:noFill/>
-        </p:spPr>
-        <p:txBody>
-          <a:bodyPr wrap="square" anchor="t" lIns="0" rIns="0" tIns="0" bIns="0">
-            <a:spAutoFit/>
-          </a:bodyPr>
-          <a:lstStyle/>
-          <a:p>
-            <a:pPr algn="l">
-              <a:spcBef>
-                <a:spcPts val="0"/>
-              </a:spcBef>
-              <a:spcAft>
-                <a:spcPts val="0"/>
-              </a:spcAft>
-            </a:pPr>
-            <a:r>
-              <a:rPr sz="1100" b="1" i="0">
-                <a:solidFill>
-                  <a:srgbClr val="16233B"/>
-                </a:solidFill>
-                <a:latin typeface="Bahnschrift"/>
-              </a:rPr>
-              <a:t>LIC MF Balanced Advantage</a:t>
-            </a:r>
-          </a:p>
-        </p:txBody>
-      </p:sp>
-      <p:sp>
-        <p:nvSpPr>
-          <p:cNvPr id="61" name="TextBox 60"/>
-          <p:cNvSpPr txBox="1"/>
-          <p:nvPr/>
-        </p:nvSpPr>
-        <p:spPr>
-          <a:xfrm>
-            <a:off x="6397599" y="4962144"/>
-            <a:ext cx="4843119" cy="182880"/>
-          </a:xfrm>
-          <a:prstGeom prst="rect">
-            <a:avLst/>
-          </a:prstGeom>
-          <a:noFill/>
-        </p:spPr>
-        <p:txBody>
-          <a:bodyPr wrap="square" anchor="t" lIns="0" rIns="0" tIns="0" bIns="0">
-            <a:spAutoFit/>
-          </a:bodyPr>
-          <a:lstStyle/>
-          <a:p>
-            <a:pPr algn="l">
-              <a:spcBef>
-                <a:spcPts val="0"/>
-              </a:spcBef>
-              <a:spcAft>
-                <a:spcPts val="0"/>
-              </a:spcAft>
-            </a:pPr>
-            <a:r>
-              <a:rPr sz="750" b="1" i="0" spc="30">
-                <a:solidFill>
-                  <a:srgbClr val="92400E"/>
-                </a:solidFill>
-                <a:latin typeface="Bahnschrift"/>
-              </a:rPr>
-              <a:t>SUB_SCALE  ·  SHORT_RECORD  ·  REG_PLAN_DRAG</a:t>
-            </a:r>
-          </a:p>
-        </p:txBody>
-      </p:sp>
-      <p:sp>
-        <p:nvSpPr>
-          <p:cNvPr id="62" name="TextBox 61"/>
-          <p:cNvSpPr txBox="1"/>
-          <p:nvPr/>
-        </p:nvSpPr>
-        <p:spPr>
-          <a:xfrm>
-            <a:off x="6397599" y="5163312"/>
-            <a:ext cx="4806543" cy="377952"/>
-          </a:xfrm>
-          <a:prstGeom prst="rect">
-            <a:avLst/>
-          </a:prstGeom>
-          <a:noFill/>
-        </p:spPr>
-        <p:txBody>
-          <a:bodyPr wrap="square" anchor="t" lIns="0" rIns="0" tIns="0" bIns="0">
-            <a:spAutoFit/>
-          </a:bodyPr>
-          <a:lstStyle/>
-          <a:p>
-            <a:pPr algn="l">
-              <a:lnSpc>
-                <a:spcPct val="104000"/>
-              </a:lnSpc>
-              <a:spcBef>
-                <a:spcPts val="0"/>
-              </a:spcBef>
-              <a:spcAft>
-                <a:spcPts val="0"/>
-              </a:spcAft>
-            </a:pPr>
-            <a:r>
-              <a:rPr sz="950" b="0" i="0">
-                <a:solidFill>
-                  <a:srgbClr val="16233B"/>
-                </a:solidFill>
-                <a:latin typeface="Georgia"/>
-              </a:rPr>
-              <a:t>Under four years of record, sub-scale, Regular plan; we fold the sleeve into the proven hybrid held.</a:t>
-            </a:r>
-          </a:p>
-        </p:txBody>
-      </p:sp>
-      <p:sp>
-        <p:nvSpPr>
-          <p:cNvPr id="63" name="TextBox 62"/>
-          <p:cNvSpPr txBox="1"/>
-          <p:nvPr/>
-        </p:nvSpPr>
-        <p:spPr>
-          <a:xfrm>
-            <a:off x="6397599" y="5522976"/>
-            <a:ext cx="4806543" cy="182880"/>
-          </a:xfrm>
-          <a:prstGeom prst="rect">
-            <a:avLst/>
-          </a:prstGeom>
-          <a:noFill/>
-        </p:spPr>
-        <p:txBody>
-          <a:bodyPr wrap="square" anchor="t" lIns="0" rIns="0" tIns="0" bIns="0">
-            <a:spAutoFit/>
-          </a:bodyPr>
-          <a:lstStyle/>
-          <a:p>
-            <a:pPr algn="l">
-              <a:spcBef>
-                <a:spcPts val="0"/>
-              </a:spcBef>
-              <a:spcAft>
-                <a:spcPts val="0"/>
-              </a:spcAft>
-            </a:pPr>
-            <a:r>
-              <a:rPr sz="850" b="0" i="1">
-                <a:solidFill>
-                  <a:srgbClr val="6B7280"/>
-                </a:solidFill>
-                <a:latin typeface="Georgia"/>
-              </a:rPr>
-              <a:t>Measured against </a:t>
-            </a:r>
-            <a:r>
-              <a:rPr sz="850" b="0" i="1">
-                <a:solidFill>
-                  <a:srgbClr val="1B27A3"/>
-                </a:solidFill>
-                <a:latin typeface="Georgia"/>
-              </a:rPr>
               <a:t>the hybrid core already held (HDFC BAF, Direct)</a:t>
             </a:r>
           </a:p>
@@ -15981,7 +15257,7 @@
       </p:sp>
       <p:sp>
         <p:nvSpPr>
-          <p:cNvPr id="64" name="TextBox 63"/>
+          <p:cNvPr id="48" name="TextBox 47"/>
           <p:cNvSpPr txBox="1"/>
           <p:nvPr/>
         </p:nvSpPr>
@@ -17084,7 +16360,7 @@
                 </a:solidFill>
                 <a:latin typeface="Bahnschrift"/>
               </a:rPr>
-              <a:t>Rs 2.2 L</a:t>
+              <a:t>Rs 1.8 L</a:t>
             </a:r>
           </a:p>
         </p:txBody>
@@ -17171,7 +16447,7 @@
                 </a:solidFill>
                 <a:latin typeface="Bahnschrift"/>
               </a:rPr>
-              <a:t>97 bps blended</a:t>
+              <a:t>79 bps blended</a:t>
             </a:r>
           </a:p>
         </p:txBody>
@@ -17213,7 +16489,7 @@
                 </a:solidFill>
                 <a:latin typeface="Bahnschrift"/>
               </a:rPr>
-              <a:t>97 bps</a:t>
+              <a:t>79 bps</a:t>
             </a:r>
           </a:p>
         </p:txBody>
@@ -18886,7 +18162,7 @@
                 </a:solidFill>
                 <a:latin typeface="Georgia"/>
               </a:rPr>
-              <a:t>LIC MF Flexi Cap</a:t>
+              <a:t>LIC MF Multi Cap</a:t>
             </a:r>
           </a:p>
         </p:txBody>
@@ -18928,7 +18204,7 @@
                 </a:solidFill>
                 <a:latin typeface="Georgia"/>
               </a:rPr>
-              <a:t>Rs 28.6 L</a:t>
+              <a:t>Rs 22.2 L</a:t>
             </a:r>
           </a:p>
         </p:txBody>
@@ -19028,6 +18304,266 @@
         <p:spPr>
           <a:xfrm>
             <a:off x="914400" y="2990088"/>
+            <a:ext cx="870508" cy="219456"/>
+          </a:xfrm>
+          <a:prstGeom prst="roundRect">
+            <a:avLst>
+              <a:gd name="adj" fmla="val 50000"/>
+            </a:avLst>
+          </a:prstGeom>
+          <a:solidFill>
+            <a:srgbClr val="FBE3E0"/>
+          </a:solidFill>
+          <a:ln w="9525">
+            <a:solidFill>
+              <a:srgbClr val="E0402F"/>
+            </a:solidFill>
+          </a:ln>
+          <a:effectLst/>
+        </p:spPr>
+        <p:style>
+          <a:lnRef idx="1">
+            <a:schemeClr val="accent1"/>
+          </a:lnRef>
+          <a:fillRef idx="3">
+            <a:schemeClr val="accent1"/>
+          </a:fillRef>
+          <a:effectRef idx="2">
+            <a:schemeClr val="accent1"/>
+          </a:effectRef>
+          <a:fontRef idx="minor">
+            <a:schemeClr val="lt1"/>
+          </a:fontRef>
+        </p:style>
+        <p:txBody>
+          <a:bodyPr rtlCol="0" anchor="ctr"/>
+          <a:lstStyle/>
+          <a:p>
+            <a:pPr algn="ctr"/>
+          </a:p>
+        </p:txBody>
+      </p:sp>
+      <p:sp>
+        <p:nvSpPr>
+          <p:cNvPr id="34" name="TextBox 33"/>
+          <p:cNvSpPr txBox="1"/>
+          <p:nvPr/>
+        </p:nvSpPr>
+        <p:spPr>
+          <a:xfrm>
+            <a:off x="914400" y="2984601"/>
+            <a:ext cx="870508" cy="228600"/>
+          </a:xfrm>
+          <a:prstGeom prst="rect">
+            <a:avLst/>
+          </a:prstGeom>
+          <a:noFill/>
+        </p:spPr>
+        <p:txBody>
+          <a:bodyPr wrap="square" anchor="ctr" lIns="0" rIns="0" tIns="0" bIns="0">
+            <a:spAutoFit/>
+          </a:bodyPr>
+          <a:lstStyle/>
+          <a:p>
+            <a:pPr algn="ctr">
+              <a:spcBef>
+                <a:spcPts val="0"/>
+              </a:spcBef>
+              <a:spcAft>
+                <a:spcPts val="0"/>
+              </a:spcAft>
+            </a:pPr>
+            <a:r>
+              <a:rPr sz="800" b="1" i="0" spc="60">
+                <a:solidFill>
+                  <a:srgbClr val="E0402F"/>
+                </a:solidFill>
+                <a:latin typeface="Bahnschrift"/>
+              </a:rPr>
+              <a:t>EXIT</a:t>
+            </a:r>
+          </a:p>
+        </p:txBody>
+      </p:sp>
+      <p:sp>
+        <p:nvSpPr>
+          <p:cNvPr id="35" name="TextBox 34"/>
+          <p:cNvSpPr txBox="1"/>
+          <p:nvPr/>
+        </p:nvSpPr>
+        <p:spPr>
+          <a:xfrm>
+            <a:off x="1931212" y="2916936"/>
+            <a:ext cx="2649931" cy="384048"/>
+          </a:xfrm>
+          <a:prstGeom prst="rect">
+            <a:avLst/>
+          </a:prstGeom>
+          <a:noFill/>
+        </p:spPr>
+        <p:txBody>
+          <a:bodyPr wrap="square" anchor="ctr" lIns="0" rIns="0" tIns="0" bIns="0">
+            <a:spAutoFit/>
+          </a:bodyPr>
+          <a:lstStyle/>
+          <a:p>
+            <a:pPr algn="l">
+              <a:spcBef>
+                <a:spcPts val="0"/>
+              </a:spcBef>
+              <a:spcAft>
+                <a:spcPts val="0"/>
+              </a:spcAft>
+            </a:pPr>
+            <a:r>
+              <a:rPr sz="950" b="0" i="0">
+                <a:solidFill>
+                  <a:srgbClr val="16233B"/>
+                </a:solidFill>
+                <a:latin typeface="Georgia"/>
+              </a:rPr>
+              <a:t>PGIM India Small Cap</a:t>
+            </a:r>
+          </a:p>
+        </p:txBody>
+      </p:sp>
+      <p:sp>
+        <p:nvSpPr>
+          <p:cNvPr id="36" name="TextBox 35"/>
+          <p:cNvSpPr txBox="1"/>
+          <p:nvPr/>
+        </p:nvSpPr>
+        <p:spPr>
+          <a:xfrm>
+            <a:off x="4727448" y="2916936"/>
+            <a:ext cx="997610" cy="384048"/>
+          </a:xfrm>
+          <a:prstGeom prst="rect">
+            <a:avLst/>
+          </a:prstGeom>
+          <a:noFill/>
+        </p:spPr>
+        <p:txBody>
+          <a:bodyPr wrap="square" anchor="ctr" lIns="0" rIns="0" tIns="0" bIns="0">
+            <a:spAutoFit/>
+          </a:bodyPr>
+          <a:lstStyle/>
+          <a:p>
+            <a:pPr algn="r">
+              <a:spcBef>
+                <a:spcPts val="0"/>
+              </a:spcBef>
+              <a:spcAft>
+                <a:spcPts val="0"/>
+              </a:spcAft>
+            </a:pPr>
+            <a:r>
+              <a:rPr sz="950" b="0" i="0">
+                <a:solidFill>
+                  <a:srgbClr val="16233B"/>
+                </a:solidFill>
+                <a:latin typeface="Georgia"/>
+              </a:rPr>
+              <a:t>Rs 2.9 L</a:t>
+            </a:r>
+          </a:p>
+        </p:txBody>
+      </p:sp>
+      <p:sp>
+        <p:nvSpPr>
+          <p:cNvPr id="37" name="TextBox 36"/>
+          <p:cNvSpPr txBox="1"/>
+          <p:nvPr/>
+        </p:nvSpPr>
+        <p:spPr>
+          <a:xfrm>
+            <a:off x="5871362" y="2916936"/>
+            <a:ext cx="1251813" cy="384048"/>
+          </a:xfrm>
+          <a:prstGeom prst="rect">
+            <a:avLst/>
+          </a:prstGeom>
+          <a:noFill/>
+        </p:spPr>
+        <p:txBody>
+          <a:bodyPr wrap="square" anchor="ctr" lIns="0" rIns="0" tIns="0" bIns="0">
+            <a:spAutoFit/>
+          </a:bodyPr>
+          <a:lstStyle/>
+          <a:p>
+            <a:pPr algn="l">
+              <a:spcBef>
+                <a:spcPts val="0"/>
+              </a:spcBef>
+              <a:spcAft>
+                <a:spcPts val="0"/>
+              </a:spcAft>
+            </a:pPr>
+            <a:r>
+              <a:rPr sz="950" b="0" i="0">
+                <a:solidFill>
+                  <a:srgbClr val="16233B"/>
+                </a:solidFill>
+                <a:latin typeface="Georgia"/>
+              </a:rPr>
+              <a:t>LTCG</a:t>
+            </a:r>
+          </a:p>
+        </p:txBody>
+      </p:sp>
+      <p:sp>
+        <p:nvSpPr>
+          <p:cNvPr id="38" name="Rectangle 37"/>
+          <p:cNvSpPr/>
+          <p:nvPr/>
+        </p:nvSpPr>
+        <p:spPr>
+          <a:xfrm>
+            <a:off x="841248" y="3282696"/>
+            <a:ext cx="6355080" cy="5486"/>
+          </a:xfrm>
+          <a:prstGeom prst="rect">
+            <a:avLst/>
+          </a:prstGeom>
+          <a:solidFill>
+            <a:srgbClr val="E5E7EB"/>
+          </a:solidFill>
+          <a:ln>
+            <a:noFill/>
+          </a:ln>
+          <a:effectLst/>
+        </p:spPr>
+        <p:style>
+          <a:lnRef idx="1">
+            <a:schemeClr val="accent1"/>
+          </a:lnRef>
+          <a:fillRef idx="3">
+            <a:schemeClr val="accent1"/>
+          </a:fillRef>
+          <a:effectRef idx="2">
+            <a:schemeClr val="accent1"/>
+          </a:effectRef>
+          <a:fontRef idx="minor">
+            <a:schemeClr val="lt1"/>
+          </a:fontRef>
+        </p:style>
+        <p:txBody>
+          <a:bodyPr rtlCol="0" anchor="ctr"/>
+          <a:lstStyle/>
+          <a:p>
+            <a:pPr algn="ctr"/>
+          </a:p>
+        </p:txBody>
+      </p:sp>
+      <p:sp>
+        <p:nvSpPr>
+          <p:cNvPr id="39" name="Rounded Rectangle 38"/>
+          <p:cNvSpPr/>
+          <p:nvPr/>
+        </p:nvSpPr>
+        <p:spPr>
+          <a:xfrm>
+            <a:off x="914400" y="3374136"/>
             <a:ext cx="870508" cy="219456"/>
           </a:xfrm>
           <a:prstGeom prst="roundRect">
@@ -19069,13 +18605,13 @@
       </p:sp>
       <p:sp>
         <p:nvSpPr>
-          <p:cNvPr id="34" name="TextBox 33"/>
-          <p:cNvSpPr txBox="1"/>
-          <p:nvPr/>
-        </p:nvSpPr>
-        <p:spPr>
-          <a:xfrm>
-            <a:off x="914400" y="2984601"/>
+          <p:cNvPr id="40" name="TextBox 39"/>
+          <p:cNvSpPr txBox="1"/>
+          <p:nvPr/>
+        </p:nvSpPr>
+        <p:spPr>
+          <a:xfrm>
+            <a:off x="914400" y="3368649"/>
             <a:ext cx="870508" cy="228600"/>
           </a:xfrm>
           <a:prstGeom prst="rect">
@@ -19104,20 +18640,20 @@
                 </a:solidFill>
                 <a:latin typeface="Bahnschrift"/>
               </a:rPr>
-              <a:t>SWITCH</a:t>
-            </a:r>
-          </a:p>
-        </p:txBody>
-      </p:sp>
-      <p:sp>
-        <p:nvSpPr>
-          <p:cNvPr id="35" name="TextBox 34"/>
-          <p:cNvSpPr txBox="1"/>
-          <p:nvPr/>
-        </p:nvSpPr>
-        <p:spPr>
-          <a:xfrm>
-            <a:off x="1931212" y="2916936"/>
+              <a:t>TRIM</a:t>
+            </a:r>
+          </a:p>
+        </p:txBody>
+      </p:sp>
+      <p:sp>
+        <p:nvSpPr>
+          <p:cNvPr id="41" name="TextBox 40"/>
+          <p:cNvSpPr txBox="1"/>
+          <p:nvPr/>
+        </p:nvSpPr>
+        <p:spPr>
+          <a:xfrm>
+            <a:off x="1931212" y="3300984"/>
             <a:ext cx="2649931" cy="384048"/>
           </a:xfrm>
           <a:prstGeom prst="rect">
@@ -19146,20 +18682,20 @@
                 </a:solidFill>
                 <a:latin typeface="Georgia"/>
               </a:rPr>
-              <a:t>LIC MF Multi Cap</a:t>
-            </a:r>
-          </a:p>
-        </p:txBody>
-      </p:sp>
-      <p:sp>
-        <p:nvSpPr>
-          <p:cNvPr id="36" name="TextBox 35"/>
-          <p:cNvSpPr txBox="1"/>
-          <p:nvPr/>
-        </p:nvSpPr>
-        <p:spPr>
-          <a:xfrm>
-            <a:off x="4727448" y="2916936"/>
+              <a:t>LIC MF Balanced Advantage</a:t>
+            </a:r>
+          </a:p>
+        </p:txBody>
+      </p:sp>
+      <p:sp>
+        <p:nvSpPr>
+          <p:cNvPr id="42" name="TextBox 41"/>
+          <p:cNvSpPr txBox="1"/>
+          <p:nvPr/>
+        </p:nvSpPr>
+        <p:spPr>
+          <a:xfrm>
+            <a:off x="4727448" y="3300984"/>
             <a:ext cx="997610" cy="384048"/>
           </a:xfrm>
           <a:prstGeom prst="rect">
@@ -19188,20 +18724,20 @@
                 </a:solidFill>
                 <a:latin typeface="Georgia"/>
               </a:rPr>
-              <a:t>Rs 22.2 L</a:t>
-            </a:r>
-          </a:p>
-        </p:txBody>
-      </p:sp>
-      <p:sp>
-        <p:nvSpPr>
-          <p:cNvPr id="37" name="TextBox 36"/>
-          <p:cNvSpPr txBox="1"/>
-          <p:nvPr/>
-        </p:nvSpPr>
-        <p:spPr>
-          <a:xfrm>
-            <a:off x="5871362" y="2916936"/>
+              <a:t>Rs 19.0 L</a:t>
+            </a:r>
+          </a:p>
+        </p:txBody>
+      </p:sp>
+      <p:sp>
+        <p:nvSpPr>
+          <p:cNvPr id="43" name="TextBox 42"/>
+          <p:cNvSpPr txBox="1"/>
+          <p:nvPr/>
+        </p:nvSpPr>
+        <p:spPr>
+          <a:xfrm>
+            <a:off x="5871362" y="3300984"/>
             <a:ext cx="1251813" cy="384048"/>
           </a:xfrm>
           <a:prstGeom prst="rect">
@@ -19237,13 +18773,13 @@
       </p:sp>
       <p:sp>
         <p:nvSpPr>
-          <p:cNvPr id="38" name="Rectangle 37"/>
+          <p:cNvPr id="44" name="Rectangle 43"/>
           <p:cNvSpPr/>
           <p:nvPr/>
         </p:nvSpPr>
         <p:spPr>
           <a:xfrm>
-            <a:off x="841248" y="3282696"/>
+            <a:off x="841248" y="3666744"/>
             <a:ext cx="6355080" cy="5486"/>
           </a:xfrm>
           <a:prstGeom prst="rect">
@@ -19281,229 +18817,181 @@
       </p:sp>
       <p:sp>
         <p:nvSpPr>
-          <p:cNvPr id="39" name="Rounded Rectangle 38"/>
+          <p:cNvPr id="45" name="TextBox 44"/>
+          <p:cNvSpPr txBox="1"/>
+          <p:nvPr/>
+        </p:nvSpPr>
+        <p:spPr>
+          <a:xfrm>
+            <a:off x="914400" y="3685032"/>
+            <a:ext cx="870508" cy="384048"/>
+          </a:xfrm>
+          <a:prstGeom prst="rect">
+            <a:avLst/>
+          </a:prstGeom>
+          <a:noFill/>
+        </p:spPr>
+        <p:txBody>
+          <a:bodyPr wrap="square" anchor="ctr" lIns="0" rIns="0" tIns="0" bIns="0">
+            <a:spAutoFit/>
+          </a:bodyPr>
+          <a:lstStyle/>
+          <a:p>
+            <a:pPr algn="l">
+              <a:spcBef>
+                <a:spcPts val="0"/>
+              </a:spcBef>
+              <a:spcAft>
+                <a:spcPts val="0"/>
+              </a:spcAft>
+            </a:pPr>
+            <a:r>
+              <a:rPr sz="950" b="0" i="0">
+                <a:solidFill>
+                  <a:srgbClr val="16233B"/>
+                </a:solidFill>
+                <a:latin typeface="Georgia"/>
+              </a:rPr>
+              <a:t/>
+            </a:r>
+          </a:p>
+        </p:txBody>
+      </p:sp>
+      <p:sp>
+        <p:nvSpPr>
+          <p:cNvPr id="46" name="TextBox 45"/>
+          <p:cNvSpPr txBox="1"/>
+          <p:nvPr/>
+        </p:nvSpPr>
+        <p:spPr>
+          <a:xfrm>
+            <a:off x="1931212" y="3685032"/>
+            <a:ext cx="2649931" cy="384048"/>
+          </a:xfrm>
+          <a:prstGeom prst="rect">
+            <a:avLst/>
+          </a:prstGeom>
+          <a:noFill/>
+        </p:spPr>
+        <p:txBody>
+          <a:bodyPr wrap="square" anchor="ctr" lIns="0" rIns="0" tIns="0" bIns="0">
+            <a:spAutoFit/>
+          </a:bodyPr>
+          <a:lstStyle/>
+          <a:p>
+            <a:pPr algn="l">
+              <a:spcBef>
+                <a:spcPts val="0"/>
+              </a:spcBef>
+              <a:spcAft>
+                <a:spcPts val="0"/>
+              </a:spcAft>
+            </a:pPr>
+            <a:r>
+              <a:rPr sz="950" b="1" i="0">
+                <a:solidFill>
+                  <a:srgbClr val="16233B"/>
+                </a:solidFill>
+                <a:latin typeface="Bahnschrift"/>
+              </a:rPr>
+              <a:t>Total fund actions</a:t>
+            </a:r>
+          </a:p>
+        </p:txBody>
+      </p:sp>
+      <p:sp>
+        <p:nvSpPr>
+          <p:cNvPr id="47" name="TextBox 46"/>
+          <p:cNvSpPr txBox="1"/>
+          <p:nvPr/>
+        </p:nvSpPr>
+        <p:spPr>
+          <a:xfrm>
+            <a:off x="4727448" y="3685032"/>
+            <a:ext cx="997610" cy="384048"/>
+          </a:xfrm>
+          <a:prstGeom prst="rect">
+            <a:avLst/>
+          </a:prstGeom>
+          <a:noFill/>
+        </p:spPr>
+        <p:txBody>
+          <a:bodyPr wrap="square" anchor="ctr" lIns="0" rIns="0" tIns="0" bIns="0">
+            <a:spAutoFit/>
+          </a:bodyPr>
+          <a:lstStyle/>
+          <a:p>
+            <a:pPr algn="r">
+              <a:spcBef>
+                <a:spcPts val="0"/>
+              </a:spcBef>
+              <a:spcAft>
+                <a:spcPts val="0"/>
+              </a:spcAft>
+            </a:pPr>
+            <a:r>
+              <a:rPr sz="950" b="1" i="0">
+                <a:solidFill>
+                  <a:srgbClr val="16233B"/>
+                </a:solidFill>
+                <a:latin typeface="Bahnschrift"/>
+              </a:rPr>
+              <a:t>Rs 82.2 L</a:t>
+            </a:r>
+          </a:p>
+        </p:txBody>
+      </p:sp>
+      <p:sp>
+        <p:nvSpPr>
+          <p:cNvPr id="48" name="TextBox 47"/>
+          <p:cNvSpPr txBox="1"/>
+          <p:nvPr/>
+        </p:nvSpPr>
+        <p:spPr>
+          <a:xfrm>
+            <a:off x="5871362" y="3685032"/>
+            <a:ext cx="1251813" cy="384048"/>
+          </a:xfrm>
+          <a:prstGeom prst="rect">
+            <a:avLst/>
+          </a:prstGeom>
+          <a:noFill/>
+        </p:spPr>
+        <p:txBody>
+          <a:bodyPr wrap="square" anchor="ctr" lIns="0" rIns="0" tIns="0" bIns="0">
+            <a:spAutoFit/>
+          </a:bodyPr>
+          <a:lstStyle/>
+          <a:p>
+            <a:pPr algn="l">
+              <a:spcBef>
+                <a:spcPts val="0"/>
+              </a:spcBef>
+              <a:spcAft>
+                <a:spcPts val="0"/>
+              </a:spcAft>
+            </a:pPr>
+            <a:r>
+              <a:rPr sz="950" b="0" i="0">
+                <a:solidFill>
+                  <a:srgbClr val="16233B"/>
+                </a:solidFill>
+                <a:latin typeface="Georgia"/>
+              </a:rPr>
+              <a:t/>
+            </a:r>
+          </a:p>
+        </p:txBody>
+      </p:sp>
+      <p:sp>
+        <p:nvSpPr>
+          <p:cNvPr id="49" name="Rectangle 48"/>
           <p:cNvSpPr/>
           <p:nvPr/>
         </p:nvSpPr>
         <p:spPr>
           <a:xfrm>
-            <a:off x="914400" y="3374136"/>
-            <a:ext cx="870508" cy="219456"/>
-          </a:xfrm>
-          <a:prstGeom prst="roundRect">
-            <a:avLst>
-              <a:gd name="adj" fmla="val 50000"/>
-            </a:avLst>
-          </a:prstGeom>
-          <a:solidFill>
-            <a:srgbClr val="FBEFDC"/>
-          </a:solidFill>
-          <a:ln w="9525">
-            <a:solidFill>
-              <a:srgbClr val="92400E"/>
-            </a:solidFill>
-          </a:ln>
-          <a:effectLst/>
-        </p:spPr>
-        <p:style>
-          <a:lnRef idx="1">
-            <a:schemeClr val="accent1"/>
-          </a:lnRef>
-          <a:fillRef idx="3">
-            <a:schemeClr val="accent1"/>
-          </a:fillRef>
-          <a:effectRef idx="2">
-            <a:schemeClr val="accent1"/>
-          </a:effectRef>
-          <a:fontRef idx="minor">
-            <a:schemeClr val="lt1"/>
-          </a:fontRef>
-        </p:style>
-        <p:txBody>
-          <a:bodyPr rtlCol="0" anchor="ctr"/>
-          <a:lstStyle/>
-          <a:p>
-            <a:pPr algn="ctr"/>
-          </a:p>
-        </p:txBody>
-      </p:sp>
-      <p:sp>
-        <p:nvSpPr>
-          <p:cNvPr id="40" name="TextBox 39"/>
-          <p:cNvSpPr txBox="1"/>
-          <p:nvPr/>
-        </p:nvSpPr>
-        <p:spPr>
-          <a:xfrm>
-            <a:off x="914400" y="3368649"/>
-            <a:ext cx="870508" cy="228600"/>
-          </a:xfrm>
-          <a:prstGeom prst="rect">
-            <a:avLst/>
-          </a:prstGeom>
-          <a:noFill/>
-        </p:spPr>
-        <p:txBody>
-          <a:bodyPr wrap="square" anchor="ctr" lIns="0" rIns="0" tIns="0" bIns="0">
-            <a:spAutoFit/>
-          </a:bodyPr>
-          <a:lstStyle/>
-          <a:p>
-            <a:pPr algn="ctr">
-              <a:spcBef>
-                <a:spcPts val="0"/>
-              </a:spcBef>
-              <a:spcAft>
-                <a:spcPts val="0"/>
-              </a:spcAft>
-            </a:pPr>
-            <a:r>
-              <a:rPr sz="800" b="1" i="0" spc="60">
-                <a:solidFill>
-                  <a:srgbClr val="92400E"/>
-                </a:solidFill>
-                <a:latin typeface="Bahnschrift"/>
-              </a:rPr>
-              <a:t>REDEEM</a:t>
-            </a:r>
-          </a:p>
-        </p:txBody>
-      </p:sp>
-      <p:sp>
-        <p:nvSpPr>
-          <p:cNvPr id="41" name="TextBox 40"/>
-          <p:cNvSpPr txBox="1"/>
-          <p:nvPr/>
-        </p:nvSpPr>
-        <p:spPr>
-          <a:xfrm>
-            <a:off x="1931212" y="3300984"/>
-            <a:ext cx="2649931" cy="384048"/>
-          </a:xfrm>
-          <a:prstGeom prst="rect">
-            <a:avLst/>
-          </a:prstGeom>
-          <a:noFill/>
-        </p:spPr>
-        <p:txBody>
-          <a:bodyPr wrap="square" anchor="ctr" lIns="0" rIns="0" tIns="0" bIns="0">
-            <a:spAutoFit/>
-          </a:bodyPr>
-          <a:lstStyle/>
-          <a:p>
-            <a:pPr algn="l">
-              <a:spcBef>
-                <a:spcPts val="0"/>
-              </a:spcBef>
-              <a:spcAft>
-                <a:spcPts val="0"/>
-              </a:spcAft>
-            </a:pPr>
-            <a:r>
-              <a:rPr sz="950" b="0" i="0">
-                <a:solidFill>
-                  <a:srgbClr val="16233B"/>
-                </a:solidFill>
-                <a:latin typeface="Georgia"/>
-              </a:rPr>
-              <a:t>ICICI Pru Multi-Asset (Reg)</a:t>
-            </a:r>
-          </a:p>
-        </p:txBody>
-      </p:sp>
-      <p:sp>
-        <p:nvSpPr>
-          <p:cNvPr id="42" name="TextBox 41"/>
-          <p:cNvSpPr txBox="1"/>
-          <p:nvPr/>
-        </p:nvSpPr>
-        <p:spPr>
-          <a:xfrm>
-            <a:off x="4727448" y="3300984"/>
-            <a:ext cx="997610" cy="384048"/>
-          </a:xfrm>
-          <a:prstGeom prst="rect">
-            <a:avLst/>
-          </a:prstGeom>
-          <a:noFill/>
-        </p:spPr>
-        <p:txBody>
-          <a:bodyPr wrap="square" anchor="ctr" lIns="0" rIns="0" tIns="0" bIns="0">
-            <a:spAutoFit/>
-          </a:bodyPr>
-          <a:lstStyle/>
-          <a:p>
-            <a:pPr algn="r">
-              <a:spcBef>
-                <a:spcPts val="0"/>
-              </a:spcBef>
-              <a:spcAft>
-                <a:spcPts val="0"/>
-              </a:spcAft>
-            </a:pPr>
-            <a:r>
-              <a:rPr sz="950" b="0" i="0">
-                <a:solidFill>
-                  <a:srgbClr val="16233B"/>
-                </a:solidFill>
-                <a:latin typeface="Georgia"/>
-              </a:rPr>
-              <a:t>Rs 25.4 L</a:t>
-            </a:r>
-          </a:p>
-        </p:txBody>
-      </p:sp>
-      <p:sp>
-        <p:nvSpPr>
-          <p:cNvPr id="43" name="TextBox 42"/>
-          <p:cNvSpPr txBox="1"/>
-          <p:nvPr/>
-        </p:nvSpPr>
-        <p:spPr>
-          <a:xfrm>
-            <a:off x="5871362" y="3300984"/>
-            <a:ext cx="1251813" cy="384048"/>
-          </a:xfrm>
-          <a:prstGeom prst="rect">
-            <a:avLst/>
-          </a:prstGeom>
-          <a:noFill/>
-        </p:spPr>
-        <p:txBody>
-          <a:bodyPr wrap="square" anchor="ctr" lIns="0" rIns="0" tIns="0" bIns="0">
-            <a:spAutoFit/>
-          </a:bodyPr>
-          <a:lstStyle/>
-          <a:p>
-            <a:pPr algn="l">
-              <a:spcBef>
-                <a:spcPts val="0"/>
-              </a:spcBef>
-              <a:spcAft>
-                <a:spcPts val="0"/>
-              </a:spcAft>
-            </a:pPr>
-            <a:r>
-              <a:rPr sz="950" b="0" i="0">
-                <a:solidFill>
-                  <a:srgbClr val="16233B"/>
-                </a:solidFill>
-                <a:latin typeface="Georgia"/>
-              </a:rPr>
-              <a:t>Mixed, lot-by-lot</a:t>
-            </a:r>
-          </a:p>
-        </p:txBody>
-      </p:sp>
-      <p:sp>
-        <p:nvSpPr>
-          <p:cNvPr id="44" name="Rectangle 43"/>
-          <p:cNvSpPr/>
-          <p:nvPr/>
-        </p:nvSpPr>
-        <p:spPr>
-          <a:xfrm>
-            <a:off x="841248" y="3666744"/>
+            <a:off x="841248" y="4050792"/>
             <a:ext cx="6355080" cy="5486"/>
           </a:xfrm>
           <a:prstGeom prst="rect">
@@ -19541,739 +19029,7 @@
       </p:sp>
       <p:sp>
         <p:nvSpPr>
-          <p:cNvPr id="45" name="Rounded Rectangle 44"/>
-          <p:cNvSpPr/>
-          <p:nvPr/>
-        </p:nvSpPr>
-        <p:spPr>
-          <a:xfrm>
-            <a:off x="914400" y="3758184"/>
-            <a:ext cx="870508" cy="219456"/>
-          </a:xfrm>
-          <a:prstGeom prst="roundRect">
-            <a:avLst>
-              <a:gd name="adj" fmla="val 50000"/>
-            </a:avLst>
-          </a:prstGeom>
-          <a:solidFill>
-            <a:srgbClr val="FBE3E0"/>
-          </a:solidFill>
-          <a:ln w="9525">
-            <a:solidFill>
-              <a:srgbClr val="E0402F"/>
-            </a:solidFill>
-          </a:ln>
-          <a:effectLst/>
-        </p:spPr>
-        <p:style>
-          <a:lnRef idx="1">
-            <a:schemeClr val="accent1"/>
-          </a:lnRef>
-          <a:fillRef idx="3">
-            <a:schemeClr val="accent1"/>
-          </a:fillRef>
-          <a:effectRef idx="2">
-            <a:schemeClr val="accent1"/>
-          </a:effectRef>
-          <a:fontRef idx="minor">
-            <a:schemeClr val="lt1"/>
-          </a:fontRef>
-        </p:style>
-        <p:txBody>
-          <a:bodyPr rtlCol="0" anchor="ctr"/>
-          <a:lstStyle/>
-          <a:p>
-            <a:pPr algn="ctr"/>
-          </a:p>
-        </p:txBody>
-      </p:sp>
-      <p:sp>
-        <p:nvSpPr>
-          <p:cNvPr id="46" name="TextBox 45"/>
-          <p:cNvSpPr txBox="1"/>
-          <p:nvPr/>
-        </p:nvSpPr>
-        <p:spPr>
-          <a:xfrm>
-            <a:off x="914400" y="3752697"/>
-            <a:ext cx="870508" cy="228600"/>
-          </a:xfrm>
-          <a:prstGeom prst="rect">
-            <a:avLst/>
-          </a:prstGeom>
-          <a:noFill/>
-        </p:spPr>
-        <p:txBody>
-          <a:bodyPr wrap="square" anchor="ctr" lIns="0" rIns="0" tIns="0" bIns="0">
-            <a:spAutoFit/>
-          </a:bodyPr>
-          <a:lstStyle/>
-          <a:p>
-            <a:pPr algn="ctr">
-              <a:spcBef>
-                <a:spcPts val="0"/>
-              </a:spcBef>
-              <a:spcAft>
-                <a:spcPts val="0"/>
-              </a:spcAft>
-            </a:pPr>
-            <a:r>
-              <a:rPr sz="800" b="1" i="0" spc="60">
-                <a:solidFill>
-                  <a:srgbClr val="E0402F"/>
-                </a:solidFill>
-                <a:latin typeface="Bahnschrift"/>
-              </a:rPr>
-              <a:t>EXIT</a:t>
-            </a:r>
-          </a:p>
-        </p:txBody>
-      </p:sp>
-      <p:sp>
-        <p:nvSpPr>
-          <p:cNvPr id="47" name="TextBox 46"/>
-          <p:cNvSpPr txBox="1"/>
-          <p:nvPr/>
-        </p:nvSpPr>
-        <p:spPr>
-          <a:xfrm>
-            <a:off x="1931212" y="3685032"/>
-            <a:ext cx="2649931" cy="384048"/>
-          </a:xfrm>
-          <a:prstGeom prst="rect">
-            <a:avLst/>
-          </a:prstGeom>
-          <a:noFill/>
-        </p:spPr>
-        <p:txBody>
-          <a:bodyPr wrap="square" anchor="ctr" lIns="0" rIns="0" tIns="0" bIns="0">
-            <a:spAutoFit/>
-          </a:bodyPr>
-          <a:lstStyle/>
-          <a:p>
-            <a:pPr algn="l">
-              <a:spcBef>
-                <a:spcPts val="0"/>
-              </a:spcBef>
-              <a:spcAft>
-                <a:spcPts val="0"/>
-              </a:spcAft>
-            </a:pPr>
-            <a:r>
-              <a:rPr sz="950" b="0" i="0">
-                <a:solidFill>
-                  <a:srgbClr val="16233B"/>
-                </a:solidFill>
-                <a:latin typeface="Georgia"/>
-              </a:rPr>
-              <a:t>PGIM India Small Cap</a:t>
-            </a:r>
-          </a:p>
-        </p:txBody>
-      </p:sp>
-      <p:sp>
-        <p:nvSpPr>
-          <p:cNvPr id="48" name="TextBox 47"/>
-          <p:cNvSpPr txBox="1"/>
-          <p:nvPr/>
-        </p:nvSpPr>
-        <p:spPr>
-          <a:xfrm>
-            <a:off x="4727448" y="3685032"/>
-            <a:ext cx="997610" cy="384048"/>
-          </a:xfrm>
-          <a:prstGeom prst="rect">
-            <a:avLst/>
-          </a:prstGeom>
-          <a:noFill/>
-        </p:spPr>
-        <p:txBody>
-          <a:bodyPr wrap="square" anchor="ctr" lIns="0" rIns="0" tIns="0" bIns="0">
-            <a:spAutoFit/>
-          </a:bodyPr>
-          <a:lstStyle/>
-          <a:p>
-            <a:pPr algn="r">
-              <a:spcBef>
-                <a:spcPts val="0"/>
-              </a:spcBef>
-              <a:spcAft>
-                <a:spcPts val="0"/>
-              </a:spcAft>
-            </a:pPr>
-            <a:r>
-              <a:rPr sz="950" b="0" i="0">
-                <a:solidFill>
-                  <a:srgbClr val="16233B"/>
-                </a:solidFill>
-                <a:latin typeface="Georgia"/>
-              </a:rPr>
-              <a:t>Rs 2.9 L</a:t>
-            </a:r>
-          </a:p>
-        </p:txBody>
-      </p:sp>
-      <p:sp>
-        <p:nvSpPr>
-          <p:cNvPr id="49" name="TextBox 48"/>
-          <p:cNvSpPr txBox="1"/>
-          <p:nvPr/>
-        </p:nvSpPr>
-        <p:spPr>
-          <a:xfrm>
-            <a:off x="5871362" y="3685032"/>
-            <a:ext cx="1251813" cy="384048"/>
-          </a:xfrm>
-          <a:prstGeom prst="rect">
-            <a:avLst/>
-          </a:prstGeom>
-          <a:noFill/>
-        </p:spPr>
-        <p:txBody>
-          <a:bodyPr wrap="square" anchor="ctr" lIns="0" rIns="0" tIns="0" bIns="0">
-            <a:spAutoFit/>
-          </a:bodyPr>
-          <a:lstStyle/>
-          <a:p>
-            <a:pPr algn="l">
-              <a:spcBef>
-                <a:spcPts val="0"/>
-              </a:spcBef>
-              <a:spcAft>
-                <a:spcPts val="0"/>
-              </a:spcAft>
-            </a:pPr>
-            <a:r>
-              <a:rPr sz="950" b="0" i="0">
-                <a:solidFill>
-                  <a:srgbClr val="16233B"/>
-                </a:solidFill>
-                <a:latin typeface="Georgia"/>
-              </a:rPr>
-              <a:t>LTCG</a:t>
-            </a:r>
-          </a:p>
-        </p:txBody>
-      </p:sp>
-      <p:sp>
-        <p:nvSpPr>
-          <p:cNvPr id="50" name="Rectangle 49"/>
-          <p:cNvSpPr/>
-          <p:nvPr/>
-        </p:nvSpPr>
-        <p:spPr>
-          <a:xfrm>
-            <a:off x="841248" y="4050792"/>
-            <a:ext cx="6355080" cy="5486"/>
-          </a:xfrm>
-          <a:prstGeom prst="rect">
-            <a:avLst/>
-          </a:prstGeom>
-          <a:solidFill>
-            <a:srgbClr val="E5E7EB"/>
-          </a:solidFill>
-          <a:ln>
-            <a:noFill/>
-          </a:ln>
-          <a:effectLst/>
-        </p:spPr>
-        <p:style>
-          <a:lnRef idx="1">
-            <a:schemeClr val="accent1"/>
-          </a:lnRef>
-          <a:fillRef idx="3">
-            <a:schemeClr val="accent1"/>
-          </a:fillRef>
-          <a:effectRef idx="2">
-            <a:schemeClr val="accent1"/>
-          </a:effectRef>
-          <a:fontRef idx="minor">
-            <a:schemeClr val="lt1"/>
-          </a:fontRef>
-        </p:style>
-        <p:txBody>
-          <a:bodyPr rtlCol="0" anchor="ctr"/>
-          <a:lstStyle/>
-          <a:p>
-            <a:pPr algn="ctr"/>
-          </a:p>
-        </p:txBody>
-      </p:sp>
-      <p:sp>
-        <p:nvSpPr>
-          <p:cNvPr id="51" name="Rounded Rectangle 50"/>
-          <p:cNvSpPr/>
-          <p:nvPr/>
-        </p:nvSpPr>
-        <p:spPr>
-          <a:xfrm>
-            <a:off x="914400" y="4142232"/>
-            <a:ext cx="870508" cy="219456"/>
-          </a:xfrm>
-          <a:prstGeom prst="roundRect">
-            <a:avLst>
-              <a:gd name="adj" fmla="val 50000"/>
-            </a:avLst>
-          </a:prstGeom>
-          <a:solidFill>
-            <a:srgbClr val="FBEFDC"/>
-          </a:solidFill>
-          <a:ln w="9525">
-            <a:solidFill>
-              <a:srgbClr val="92400E"/>
-            </a:solidFill>
-          </a:ln>
-          <a:effectLst/>
-        </p:spPr>
-        <p:style>
-          <a:lnRef idx="1">
-            <a:schemeClr val="accent1"/>
-          </a:lnRef>
-          <a:fillRef idx="3">
-            <a:schemeClr val="accent1"/>
-          </a:fillRef>
-          <a:effectRef idx="2">
-            <a:schemeClr val="accent1"/>
-          </a:effectRef>
-          <a:fontRef idx="minor">
-            <a:schemeClr val="lt1"/>
-          </a:fontRef>
-        </p:style>
-        <p:txBody>
-          <a:bodyPr rtlCol="0" anchor="ctr"/>
-          <a:lstStyle/>
-          <a:p>
-            <a:pPr algn="ctr"/>
-          </a:p>
-        </p:txBody>
-      </p:sp>
-      <p:sp>
-        <p:nvSpPr>
-          <p:cNvPr id="52" name="TextBox 51"/>
-          <p:cNvSpPr txBox="1"/>
-          <p:nvPr/>
-        </p:nvSpPr>
-        <p:spPr>
-          <a:xfrm>
-            <a:off x="914400" y="4136745"/>
-            <a:ext cx="870508" cy="228600"/>
-          </a:xfrm>
-          <a:prstGeom prst="rect">
-            <a:avLst/>
-          </a:prstGeom>
-          <a:noFill/>
-        </p:spPr>
-        <p:txBody>
-          <a:bodyPr wrap="square" anchor="ctr" lIns="0" rIns="0" tIns="0" bIns="0">
-            <a:spAutoFit/>
-          </a:bodyPr>
-          <a:lstStyle/>
-          <a:p>
-            <a:pPr algn="ctr">
-              <a:spcBef>
-                <a:spcPts val="0"/>
-              </a:spcBef>
-              <a:spcAft>
-                <a:spcPts val="0"/>
-              </a:spcAft>
-            </a:pPr>
-            <a:r>
-              <a:rPr sz="800" b="1" i="0" spc="60">
-                <a:solidFill>
-                  <a:srgbClr val="92400E"/>
-                </a:solidFill>
-                <a:latin typeface="Bahnschrift"/>
-              </a:rPr>
-              <a:t>TRIM</a:t>
-            </a:r>
-          </a:p>
-        </p:txBody>
-      </p:sp>
-      <p:sp>
-        <p:nvSpPr>
-          <p:cNvPr id="53" name="TextBox 52"/>
-          <p:cNvSpPr txBox="1"/>
-          <p:nvPr/>
-        </p:nvSpPr>
-        <p:spPr>
-          <a:xfrm>
-            <a:off x="1931212" y="4069080"/>
-            <a:ext cx="2649931" cy="384048"/>
-          </a:xfrm>
-          <a:prstGeom prst="rect">
-            <a:avLst/>
-          </a:prstGeom>
-          <a:noFill/>
-        </p:spPr>
-        <p:txBody>
-          <a:bodyPr wrap="square" anchor="ctr" lIns="0" rIns="0" tIns="0" bIns="0">
-            <a:spAutoFit/>
-          </a:bodyPr>
-          <a:lstStyle/>
-          <a:p>
-            <a:pPr algn="l">
-              <a:spcBef>
-                <a:spcPts val="0"/>
-              </a:spcBef>
-              <a:spcAft>
-                <a:spcPts val="0"/>
-              </a:spcAft>
-            </a:pPr>
-            <a:r>
-              <a:rPr sz="950" b="0" i="0">
-                <a:solidFill>
-                  <a:srgbClr val="16233B"/>
-                </a:solidFill>
-                <a:latin typeface="Georgia"/>
-              </a:rPr>
-              <a:t>LIC MF Balanced Advantage</a:t>
-            </a:r>
-          </a:p>
-        </p:txBody>
-      </p:sp>
-      <p:sp>
-        <p:nvSpPr>
-          <p:cNvPr id="54" name="TextBox 53"/>
-          <p:cNvSpPr txBox="1"/>
-          <p:nvPr/>
-        </p:nvSpPr>
-        <p:spPr>
-          <a:xfrm>
-            <a:off x="4727448" y="4069080"/>
-            <a:ext cx="997610" cy="384048"/>
-          </a:xfrm>
-          <a:prstGeom prst="rect">
-            <a:avLst/>
-          </a:prstGeom>
-          <a:noFill/>
-        </p:spPr>
-        <p:txBody>
-          <a:bodyPr wrap="square" anchor="ctr" lIns="0" rIns="0" tIns="0" bIns="0">
-            <a:spAutoFit/>
-          </a:bodyPr>
-          <a:lstStyle/>
-          <a:p>
-            <a:pPr algn="r">
-              <a:spcBef>
-                <a:spcPts val="0"/>
-              </a:spcBef>
-              <a:spcAft>
-                <a:spcPts val="0"/>
-              </a:spcAft>
-            </a:pPr>
-            <a:r>
-              <a:rPr sz="950" b="0" i="0">
-                <a:solidFill>
-                  <a:srgbClr val="16233B"/>
-                </a:solidFill>
-                <a:latin typeface="Georgia"/>
-              </a:rPr>
-              <a:t>Rs 19.0 L</a:t>
-            </a:r>
-          </a:p>
-        </p:txBody>
-      </p:sp>
-      <p:sp>
-        <p:nvSpPr>
-          <p:cNvPr id="55" name="TextBox 54"/>
-          <p:cNvSpPr txBox="1"/>
-          <p:nvPr/>
-        </p:nvSpPr>
-        <p:spPr>
-          <a:xfrm>
-            <a:off x="5871362" y="4069080"/>
-            <a:ext cx="1251813" cy="384048"/>
-          </a:xfrm>
-          <a:prstGeom prst="rect">
-            <a:avLst/>
-          </a:prstGeom>
-          <a:noFill/>
-        </p:spPr>
-        <p:txBody>
-          <a:bodyPr wrap="square" anchor="ctr" lIns="0" rIns="0" tIns="0" bIns="0">
-            <a:spAutoFit/>
-          </a:bodyPr>
-          <a:lstStyle/>
-          <a:p>
-            <a:pPr algn="l">
-              <a:spcBef>
-                <a:spcPts val="0"/>
-              </a:spcBef>
-              <a:spcAft>
-                <a:spcPts val="0"/>
-              </a:spcAft>
-            </a:pPr>
-            <a:r>
-              <a:rPr sz="950" b="0" i="0">
-                <a:solidFill>
-                  <a:srgbClr val="16233B"/>
-                </a:solidFill>
-                <a:latin typeface="Georgia"/>
-              </a:rPr>
-              <a:t>LTCG</a:t>
-            </a:r>
-          </a:p>
-        </p:txBody>
-      </p:sp>
-      <p:sp>
-        <p:nvSpPr>
-          <p:cNvPr id="56" name="Rectangle 55"/>
-          <p:cNvSpPr/>
-          <p:nvPr/>
-        </p:nvSpPr>
-        <p:spPr>
-          <a:xfrm>
-            <a:off x="841248" y="4434840"/>
-            <a:ext cx="6355080" cy="5486"/>
-          </a:xfrm>
-          <a:prstGeom prst="rect">
-            <a:avLst/>
-          </a:prstGeom>
-          <a:solidFill>
-            <a:srgbClr val="E5E7EB"/>
-          </a:solidFill>
-          <a:ln>
-            <a:noFill/>
-          </a:ln>
-          <a:effectLst/>
-        </p:spPr>
-        <p:style>
-          <a:lnRef idx="1">
-            <a:schemeClr val="accent1"/>
-          </a:lnRef>
-          <a:fillRef idx="3">
-            <a:schemeClr val="accent1"/>
-          </a:fillRef>
-          <a:effectRef idx="2">
-            <a:schemeClr val="accent1"/>
-          </a:effectRef>
-          <a:fontRef idx="minor">
-            <a:schemeClr val="lt1"/>
-          </a:fontRef>
-        </p:style>
-        <p:txBody>
-          <a:bodyPr rtlCol="0" anchor="ctr"/>
-          <a:lstStyle/>
-          <a:p>
-            <a:pPr algn="ctr"/>
-          </a:p>
-        </p:txBody>
-      </p:sp>
-      <p:sp>
-        <p:nvSpPr>
-          <p:cNvPr id="57" name="TextBox 56"/>
-          <p:cNvSpPr txBox="1"/>
-          <p:nvPr/>
-        </p:nvSpPr>
-        <p:spPr>
-          <a:xfrm>
-            <a:off x="914400" y="4453128"/>
-            <a:ext cx="870508" cy="384048"/>
-          </a:xfrm>
-          <a:prstGeom prst="rect">
-            <a:avLst/>
-          </a:prstGeom>
-          <a:noFill/>
-        </p:spPr>
-        <p:txBody>
-          <a:bodyPr wrap="square" anchor="ctr" lIns="0" rIns="0" tIns="0" bIns="0">
-            <a:spAutoFit/>
-          </a:bodyPr>
-          <a:lstStyle/>
-          <a:p>
-            <a:pPr algn="l">
-              <a:spcBef>
-                <a:spcPts val="0"/>
-              </a:spcBef>
-              <a:spcAft>
-                <a:spcPts val="0"/>
-              </a:spcAft>
-            </a:pPr>
-            <a:r>
-              <a:rPr sz="950" b="0" i="0">
-                <a:solidFill>
-                  <a:srgbClr val="16233B"/>
-                </a:solidFill>
-                <a:latin typeface="Georgia"/>
-              </a:rPr>
-              <a:t/>
-            </a:r>
-          </a:p>
-        </p:txBody>
-      </p:sp>
-      <p:sp>
-        <p:nvSpPr>
-          <p:cNvPr id="58" name="TextBox 57"/>
-          <p:cNvSpPr txBox="1"/>
-          <p:nvPr/>
-        </p:nvSpPr>
-        <p:spPr>
-          <a:xfrm>
-            <a:off x="1931212" y="4453128"/>
-            <a:ext cx="2649931" cy="384048"/>
-          </a:xfrm>
-          <a:prstGeom prst="rect">
-            <a:avLst/>
-          </a:prstGeom>
-          <a:noFill/>
-        </p:spPr>
-        <p:txBody>
-          <a:bodyPr wrap="square" anchor="ctr" lIns="0" rIns="0" tIns="0" bIns="0">
-            <a:spAutoFit/>
-          </a:bodyPr>
-          <a:lstStyle/>
-          <a:p>
-            <a:pPr algn="l">
-              <a:spcBef>
-                <a:spcPts val="0"/>
-              </a:spcBef>
-              <a:spcAft>
-                <a:spcPts val="0"/>
-              </a:spcAft>
-            </a:pPr>
-            <a:r>
-              <a:rPr sz="950" b="1" i="0">
-                <a:solidFill>
-                  <a:srgbClr val="16233B"/>
-                </a:solidFill>
-                <a:latin typeface="Bahnschrift"/>
-              </a:rPr>
-              <a:t>Total fund actions</a:t>
-            </a:r>
-          </a:p>
-        </p:txBody>
-      </p:sp>
-      <p:sp>
-        <p:nvSpPr>
-          <p:cNvPr id="59" name="TextBox 58"/>
-          <p:cNvSpPr txBox="1"/>
-          <p:nvPr/>
-        </p:nvSpPr>
-        <p:spPr>
-          <a:xfrm>
-            <a:off x="4727448" y="4453128"/>
-            <a:ext cx="997610" cy="384048"/>
-          </a:xfrm>
-          <a:prstGeom prst="rect">
-            <a:avLst/>
-          </a:prstGeom>
-          <a:noFill/>
-        </p:spPr>
-        <p:txBody>
-          <a:bodyPr wrap="square" anchor="ctr" lIns="0" rIns="0" tIns="0" bIns="0">
-            <a:spAutoFit/>
-          </a:bodyPr>
-          <a:lstStyle/>
-          <a:p>
-            <a:pPr algn="r">
-              <a:spcBef>
-                <a:spcPts val="0"/>
-              </a:spcBef>
-              <a:spcAft>
-                <a:spcPts val="0"/>
-              </a:spcAft>
-            </a:pPr>
-            <a:r>
-              <a:rPr sz="950" b="1" i="0">
-                <a:solidFill>
-                  <a:srgbClr val="16233B"/>
-                </a:solidFill>
-                <a:latin typeface="Bahnschrift"/>
-              </a:rPr>
-              <a:t>Rs 1.36 Cr</a:t>
-            </a:r>
-          </a:p>
-        </p:txBody>
-      </p:sp>
-      <p:sp>
-        <p:nvSpPr>
-          <p:cNvPr id="60" name="TextBox 59"/>
-          <p:cNvSpPr txBox="1"/>
-          <p:nvPr/>
-        </p:nvSpPr>
-        <p:spPr>
-          <a:xfrm>
-            <a:off x="5871362" y="4453128"/>
-            <a:ext cx="1251813" cy="384048"/>
-          </a:xfrm>
-          <a:prstGeom prst="rect">
-            <a:avLst/>
-          </a:prstGeom>
-          <a:noFill/>
-        </p:spPr>
-        <p:txBody>
-          <a:bodyPr wrap="square" anchor="ctr" lIns="0" rIns="0" tIns="0" bIns="0">
-            <a:spAutoFit/>
-          </a:bodyPr>
-          <a:lstStyle/>
-          <a:p>
-            <a:pPr algn="l">
-              <a:spcBef>
-                <a:spcPts val="0"/>
-              </a:spcBef>
-              <a:spcAft>
-                <a:spcPts val="0"/>
-              </a:spcAft>
-            </a:pPr>
-            <a:r>
-              <a:rPr sz="950" b="0" i="0">
-                <a:solidFill>
-                  <a:srgbClr val="16233B"/>
-                </a:solidFill>
-                <a:latin typeface="Georgia"/>
-              </a:rPr>
-              <a:t/>
-            </a:r>
-          </a:p>
-        </p:txBody>
-      </p:sp>
-      <p:sp>
-        <p:nvSpPr>
-          <p:cNvPr id="61" name="Rectangle 60"/>
-          <p:cNvSpPr/>
-          <p:nvPr/>
-        </p:nvSpPr>
-        <p:spPr>
-          <a:xfrm>
-            <a:off x="841248" y="4818888"/>
-            <a:ext cx="6355080" cy="5486"/>
-          </a:xfrm>
-          <a:prstGeom prst="rect">
-            <a:avLst/>
-          </a:prstGeom>
-          <a:solidFill>
-            <a:srgbClr val="E5E7EB"/>
-          </a:solidFill>
-          <a:ln>
-            <a:noFill/>
-          </a:ln>
-          <a:effectLst/>
-        </p:spPr>
-        <p:style>
-          <a:lnRef idx="1">
-            <a:schemeClr val="accent1"/>
-          </a:lnRef>
-          <a:fillRef idx="3">
-            <a:schemeClr val="accent1"/>
-          </a:fillRef>
-          <a:effectRef idx="2">
-            <a:schemeClr val="accent1"/>
-          </a:effectRef>
-          <a:fontRef idx="minor">
-            <a:schemeClr val="lt1"/>
-          </a:fontRef>
-        </p:style>
-        <p:txBody>
-          <a:bodyPr rtlCol="0" anchor="ctr"/>
-          <a:lstStyle/>
-          <a:p>
-            <a:pPr algn="ctr"/>
-          </a:p>
-        </p:txBody>
-      </p:sp>
-      <p:sp>
-        <p:nvSpPr>
-          <p:cNvPr id="62" name="TextBox 61"/>
+          <p:cNvPr id="50" name="TextBox 49"/>
           <p:cNvSpPr txBox="1"/>
           <p:nvPr/>
         </p:nvSpPr>
@@ -20318,7 +19074,7 @@
       </p:sp>
       <p:pic>
         <p:nvPicPr>
-          <p:cNvPr id="63" name="Picture 62" descr="azby_tax_bridge.png"/>
+          <p:cNvPr id="51" name="Picture 50" descr="azby_tax_bridge.png"/>
           <p:cNvPicPr>
             <a:picLocks noChangeAspect="1"/>
           </p:cNvPicPr>
@@ -20342,7 +19098,7 @@
       </p:pic>
       <p:sp>
         <p:nvSpPr>
-          <p:cNvPr id="64" name="TextBox 63"/>
+          <p:cNvPr id="52" name="TextBox 51"/>
           <p:cNvSpPr txBox="1"/>
           <p:nvPr/>
         </p:nvSpPr>
@@ -20384,7 +19140,7 @@
       </p:sp>
       <p:sp>
         <p:nvSpPr>
-          <p:cNvPr id="65" name="Rounded Rectangle 64"/>
+          <p:cNvPr id="53" name="Rounded Rectangle 52"/>
           <p:cNvSpPr/>
           <p:nvPr/>
         </p:nvSpPr>
@@ -20430,7 +19186,7 @@
       </p:sp>
       <p:sp>
         <p:nvSpPr>
-          <p:cNvPr id="66" name="Rectangle 65"/>
+          <p:cNvPr id="54" name="Rectangle 53"/>
           <p:cNvSpPr/>
           <p:nvPr/>
         </p:nvSpPr>
@@ -20474,7 +19230,7 @@
       </p:sp>
       <p:sp>
         <p:nvSpPr>
-          <p:cNvPr id="67" name="TextBox 66"/>
+          <p:cNvPr id="55" name="TextBox 54"/>
           <p:cNvSpPr txBox="1"/>
           <p:nvPr/>
         </p:nvSpPr>
@@ -20516,7 +19272,7 @@
       </p:sp>
       <p:sp>
         <p:nvSpPr>
-          <p:cNvPr id="68" name="TextBox 67"/>
+          <p:cNvPr id="56" name="TextBox 55"/>
           <p:cNvSpPr txBox="1"/>
           <p:nvPr/>
         </p:nvSpPr>
@@ -20561,7 +19317,7 @@
       </p:sp>
       <p:sp>
         <p:nvSpPr>
-          <p:cNvPr id="69" name="Rounded Rectangle 68"/>
+          <p:cNvPr id="57" name="Rounded Rectangle 56"/>
           <p:cNvSpPr/>
           <p:nvPr/>
         </p:nvSpPr>
@@ -20607,7 +19363,7 @@
       </p:sp>
       <p:sp>
         <p:nvSpPr>
-          <p:cNvPr id="70" name="Rectangle 69"/>
+          <p:cNvPr id="58" name="Rectangle 57"/>
           <p:cNvSpPr/>
           <p:nvPr/>
         </p:nvSpPr>
@@ -20651,7 +19407,7 @@
       </p:sp>
       <p:sp>
         <p:nvSpPr>
-          <p:cNvPr id="71" name="TextBox 70"/>
+          <p:cNvPr id="59" name="TextBox 58"/>
           <p:cNvSpPr txBox="1"/>
           <p:nvPr/>
         </p:nvSpPr>
@@ -20693,7 +19449,7 @@
       </p:sp>
       <p:sp>
         <p:nvSpPr>
-          <p:cNvPr id="72" name="TextBox 71"/>
+          <p:cNvPr id="60" name="TextBox 59"/>
           <p:cNvSpPr txBox="1"/>
           <p:nvPr/>
         </p:nvSpPr>
@@ -20738,7 +19494,7 @@
       </p:sp>
       <p:sp>
         <p:nvSpPr>
-          <p:cNvPr id="73" name="TextBox 72"/>
+          <p:cNvPr id="61" name="TextBox 60"/>
           <p:cNvSpPr txBox="1"/>
           <p:nvPr/>
         </p:nvSpPr>
@@ -21504,7 +20260,7 @@
                 </a:solidFill>
                 <a:latin typeface="Bahnschrift"/>
               </a:rPr>
-              <a:t>6</a:t>
+              <a:t>4</a:t>
             </a:r>
           </a:p>
         </p:txBody>
@@ -21591,7 +20347,7 @@
                 </a:solidFill>
                 <a:latin typeface="Bahnschrift"/>
               </a:rPr>
-              <a:t>switch / move / drop</a:t>
+              <a:t>switch / drop / trim</a:t>
             </a:r>
           </a:p>
         </p:txBody>
@@ -22583,7 +21339,7 @@
                 </a:solidFill>
                 <a:latin typeface="Georgia"/>
               </a:rPr>
-              <a:t>Tidy the fund list, move 6 to cheaper or Direct versions, drop the tiny one.</a:t>
+              <a:t>Tidy the fund list, move 3 to cheaper or Direct versions, drop the tiny one.</a:t>
             </a:r>
           </a:p>
         </p:txBody>
@@ -22625,7 +21381,7 @@
                 </a:solidFill>
                 <a:latin typeface="Bahnschrift"/>
               </a:rPr>
-              <a:t>Rs 1.36 Cr</a:t>
+              <a:t>Rs 82.2 L</a:t>
             </a:r>
           </a:p>
         </p:txBody>
@@ -27642,7 +26398,7 @@
                 </a:solidFill>
                 <a:latin typeface="Bahnschrift"/>
               </a:rPr>
-              <a:t>6</a:t>
+              <a:t>4</a:t>
             </a:r>
           </a:p>
         </p:txBody>
@@ -28661,7 +27417,7 @@
                 </a:solidFill>
                 <a:latin typeface="Georgia"/>
               </a:rPr>
-              <a:t>About Rs 53k/yr of avoidable Regular-plan cost.</a:t>
+              <a:t>About Rs 32k/yr of avoidable Regular-plan cost.</a:t>
             </a:r>
           </a:p>
         </p:txBody>
@@ -28703,7 +27459,7 @@
                 </a:solidFill>
                 <a:latin typeface="Bahnschrift"/>
               </a:rPr>
-              <a:t>Move to the cheaper Direct plan.</a:t>
+              <a:t>Every fund change we suggest lands in a cheaper Direct plan.</a:t>
             </a:r>
           </a:p>
         </p:txBody>
@@ -28829,7 +27585,7 @@
                 </a:solidFill>
                 <a:latin typeface="Georgia"/>
               </a:rPr>
-              <a:t>3 funds trail the index, lack consistency, or are too rigid.</a:t>
+              <a:t>2 funds trail the index or are built too rigidly.</a:t>
             </a:r>
           </a:p>
         </p:txBody>

--- a/Shreyas_Ionic_AMC/09_PRODUCT/reports/NDPMS_Portfolio_Review_ABXY_RM_Lite.pptx
+++ b/Shreyas_Ionic_AMC/09_PRODUCT/reports/NDPMS_Portfolio_Review_ABXY_RM_Lite.pptx
@@ -21339,7 +21339,7 @@
                 </a:solidFill>
                 <a:latin typeface="Georgia"/>
               </a:rPr>
-              <a:t>Tidy the fund list, move 3 to cheaper or Direct versions, drop the tiny one.</a:t>
+              <a:t>Tidy the fund list, replace 3 weak funds with stronger, cheaper ones, drop the tiny one.</a:t>
             </a:r>
           </a:p>
         </p:txBody>

--- a/Shreyas_Ionic_AMC/09_PRODUCT/reports/NDPMS_Portfolio_Review_ABXY_RM_Lite.pptx
+++ b/Shreyas_Ionic_AMC/09_PRODUCT/reports/NDPMS_Portfolio_Review_ABXY_RM_Lite.pptx
@@ -8908,7 +8908,7 @@
                 </a:solidFill>
                 <a:latin typeface="Georgia"/>
               </a:rPr>
-              <a:t>MF sleeve only, Direct-plan NAV vs total-return benchmark · as of 2026-07-25</a:t>
+              <a:t>MF sleeve only, Direct-plan NAV, each scheme vs its own SEBI category benchmark (TRI) · as of 2026-07-25</a:t>
             </a:r>
           </a:p>
         </p:txBody>
@@ -9346,7 +9346,7 @@
         <p:spPr>
           <a:xfrm>
             <a:off x="7259576" y="2295144"/>
-            <a:ext cx="179222" cy="64008"/>
+            <a:ext cx="192024" cy="64008"/>
           </a:xfrm>
           <a:prstGeom prst="rect">
             <a:avLst/>
@@ -9462,7 +9462,7 @@
                 </a:solidFill>
                 <a:latin typeface="Bahnschrift"/>
               </a:rPr>
-              <a:t>28</a:t>
+              <a:t>30</a:t>
             </a:r>
           </a:p>
         </p:txBody>
@@ -9780,7 +9780,7 @@
         <p:spPr>
           <a:xfrm>
             <a:off x="7259576" y="2660904"/>
-            <a:ext cx="473659" cy="64008"/>
+            <a:ext cx="435254" cy="64008"/>
           </a:xfrm>
           <a:prstGeom prst="rect">
             <a:avLst/>
@@ -9896,7 +9896,7 @@
                 </a:solidFill>
                 <a:latin typeface="Bahnschrift"/>
               </a:rPr>
-              <a:t>74</a:t>
+              <a:t>68</a:t>
             </a:r>
           </a:p>
         </p:txBody>
@@ -10648,7 +10648,7 @@
         <p:spPr>
           <a:xfrm>
             <a:off x="7259576" y="3392424"/>
-            <a:ext cx="480060" cy="64008"/>
+            <a:ext cx="416052" cy="64008"/>
           </a:xfrm>
           <a:prstGeom prst="rect">
             <a:avLst/>
@@ -10764,7 +10764,7 @@
                 </a:solidFill>
                 <a:latin typeface="Bahnschrift"/>
               </a:rPr>
-              <a:t>75</a:t>
+              <a:t>65</a:t>
             </a:r>
           </a:p>
         </p:txBody>
@@ -11082,7 +11082,7 @@
         <p:spPr>
           <a:xfrm>
             <a:off x="7259576" y="3758184"/>
-            <a:ext cx="51206" cy="64008"/>
+            <a:ext cx="108813" cy="64008"/>
           </a:xfrm>
           <a:prstGeom prst="rect">
             <a:avLst/>
@@ -11198,7 +11198,7 @@
                 </a:solidFill>
                 <a:latin typeface="Bahnschrift"/>
               </a:rPr>
-              <a:t>8</a:t>
+              <a:t>17</a:t>
             </a:r>
           </a:p>
         </p:txBody>
@@ -11516,7 +11516,7 @@
         <p:spPr>
           <a:xfrm>
             <a:off x="7259576" y="4123944"/>
-            <a:ext cx="352044" cy="64008"/>
+            <a:ext cx="364845" cy="64008"/>
           </a:xfrm>
           <a:prstGeom prst="rect">
             <a:avLst/>
@@ -11632,7 +11632,7 @@
                 </a:solidFill>
                 <a:latin typeface="Bahnschrift"/>
               </a:rPr>
-              <a:t>55</a:t>
+              <a:t>57</a:t>
             </a:r>
           </a:p>
         </p:txBody>
@@ -11950,7 +11950,7 @@
         <p:spPr>
           <a:xfrm>
             <a:off x="7259576" y="4489704"/>
-            <a:ext cx="460857" cy="64008"/>
+            <a:ext cx="441655" cy="64008"/>
           </a:xfrm>
           <a:prstGeom prst="rect">
             <a:avLst/>
@@ -12066,7 +12066,7 @@
                 </a:solidFill>
                 <a:latin typeface="Bahnschrift"/>
               </a:rPr>
-              <a:t>72</a:t>
+              <a:t>69</a:t>
             </a:r>
           </a:p>
         </p:txBody>
@@ -12818,7 +12818,7 @@
         <p:spPr>
           <a:xfrm>
             <a:off x="7259576" y="5221224"/>
-            <a:ext cx="512064" cy="64008"/>
+            <a:ext cx="416052" cy="64008"/>
           </a:xfrm>
           <a:prstGeom prst="rect">
             <a:avLst/>
@@ -12934,7 +12934,7 @@
                 </a:solidFill>
                 <a:latin typeface="Bahnschrift"/>
               </a:rPr>
-              <a:t>80</a:t>
+              <a:t>65</a:t>
             </a:r>
           </a:p>
         </p:txBody>
@@ -13155,7 +13155,7 @@
                 </a:solidFill>
                 <a:latin typeface="Bahnschrift"/>
               </a:rPr>
-              <a:t>Ionic fund-quality framework · Direct-plan NAV vs total-return benchmark · structural watch-outs flagged per scheme. Illustrative synthetic funds.</a:t>
+              <a:t>Ionic fund-quality framework · Direct-plan NAV vs each scheme's own SEBI category benchmark (TRI) · structural watch-outs flagged per scheme. Illustrative synthetic funds.</a:t>
             </a:r>
           </a:p>
         </p:txBody>
